--- a/docs/FoodLoop-Presentation.pptx
+++ b/docs/FoodLoop-Presentation.pptx
@@ -130,6 +130,219 @@
 </p:presentation>
 </file>
 
+<file path=ppt/charts/chart1.xml><?xml version="1.0" encoding="utf-8"?>
+<c:chartSpace xmlns:c="http://schemas.openxmlformats.org/drawingml/2006/chart" xmlns:a="http://schemas.openxmlformats.org/drawingml/2006/main" xmlns:r="http://schemas.openxmlformats.org/officeDocument/2006/relationships">
+  <c:date1904 val="0"/>
+  <c:chart>
+    <c:autoTitleDeleted val="1"/>
+    <c:plotArea>
+      <c:barChart>
+        <c:barDir val="bar"/>
+        <c:grouping val="clustered"/>
+        <c:ser>
+          <c:idx val="0"/>
+          <c:order val="0"/>
+          <c:tx>
+            <c:strRef>
+              <c:f>Sheet1!$B$1</c:f>
+              <c:strCache>
+                <c:ptCount val="1"/>
+                <c:pt idx="0">
+                  <c:v>Weight</c:v>
+                </c:pt>
+              </c:strCache>
+            </c:strRef>
+          </c:tx>
+          <c:dPt>
+            <c:idx val="0"/>
+            <c:spPr>
+              <a:solidFill>
+                <a:srgbClr val="A6A6A6"/>
+              </a:solidFill>
+            </c:spPr>
+          </c:dPt>
+          <c:dPt>
+            <c:idx val="1"/>
+            <c:spPr>
+              <a:solidFill>
+                <a:srgbClr val="A6A6A6"/>
+              </a:solidFill>
+            </c:spPr>
+          </c:dPt>
+          <c:dPt>
+            <c:idx val="2"/>
+            <c:spPr>
+              <a:solidFill>
+                <a:srgbClr val="B7202E"/>
+              </a:solidFill>
+            </c:spPr>
+          </c:dPt>
+          <c:dPt>
+            <c:idx val="3"/>
+            <c:spPr>
+              <a:solidFill>
+                <a:srgbClr val="B7202E"/>
+              </a:solidFill>
+            </c:spPr>
+          </c:dPt>
+          <c:dPt>
+            <c:idx val="4"/>
+            <c:spPr>
+              <a:solidFill>
+                <a:srgbClr val="C00000"/>
+              </a:solidFill>
+            </c:spPr>
+          </c:dPt>
+          <c:cat>
+            <c:strRef>
+              <c:f>Sheet1!$A$2:$A$6</c:f>
+              <c:strCache>
+                <c:ptCount val="5"/>
+                <c:pt idx="0">
+                  <c:v>Reliability</c:v>
+                </c:pt>
+                <c:pt idx="1">
+                  <c:v>Food type</c:v>
+                </c:pt>
+                <c:pt idx="2">
+                  <c:v>Capacity fit</c:v>
+                </c:pt>
+                <c:pt idx="3">
+                  <c:v>Proximity</c:v>
+                </c:pt>
+                <c:pt idx="4">
+                  <c:v>Time feasibility</c:v>
+                </c:pt>
+              </c:strCache>
+            </c:strRef>
+          </c:cat>
+          <c:val>
+            <c:numRef>
+              <c:f>Sheet1!$B$2:$B$6</c:f>
+              <c:numCache>
+                <c:formatCode>General</c:formatCode>
+                <c:ptCount val="5"/>
+                <c:pt idx="0">
+                  <c:v>10</c:v>
+                </c:pt>
+                <c:pt idx="1">
+                  <c:v>10</c:v>
+                </c:pt>
+                <c:pt idx="2">
+                  <c:v>20</c:v>
+                </c:pt>
+                <c:pt idx="3">
+                  <c:v>25</c:v>
+                </c:pt>
+                <c:pt idx="4">
+                  <c:v>35</c:v>
+                </c:pt>
+              </c:numCache>
+            </c:numRef>
+          </c:val>
+        </c:ser>
+        <c:dLbls>
+          <c:numFmt formatCode="0&quot;%&quot;" sourceLinked="0"/>
+          <c:txPr>
+            <a:bodyPr/>
+            <a:lstStyle/>
+            <a:p>
+              <a:pPr>
+                <a:defRPr sz="950" b="1">
+                  <a:solidFill>
+                    <a:srgbClr val="1F1F1F"/>
+                  </a:solidFill>
+                  <a:latin typeface="Calibri"/>
+                </a:defRPr>
+              </a:pPr>
+            </a:p>
+          </c:txPr>
+          <c:dLblPos val="outEnd"/>
+          <c:showLegendKey val="0"/>
+          <c:showVal val="1"/>
+          <c:showCatName val="0"/>
+          <c:showSerName val="0"/>
+          <c:showPercent val="0"/>
+          <c:showBubbleSize val="0"/>
+          <c:showLeaderLines val="1"/>
+        </c:dLbls>
+        <c:gapWidth val="48"/>
+        <c:axId val="-2068027336"/>
+        <c:axId val="-2113994440"/>
+      </c:barChart>
+      <c:catAx>
+        <c:axId val="-2068027336"/>
+        <c:scaling>
+          <c:orientation val="minMax"/>
+        </c:scaling>
+        <c:delete val="0"/>
+        <c:axPos val="l"/>
+        <c:majorTickMark val="none"/>
+        <c:minorTickMark val="none"/>
+        <c:tickLblPos val="nextTo"/>
+        <c:spPr>
+          <a:ln>
+            <a:noFill/>
+          </a:ln>
+        </c:spPr>
+        <c:txPr>
+          <a:bodyPr/>
+          <a:lstStyle/>
+          <a:p>
+            <a:pPr>
+              <a:defRPr sz="950">
+                <a:solidFill>
+                  <a:srgbClr val="4A4A4A"/>
+                </a:solidFill>
+                <a:latin typeface="Calibri"/>
+              </a:defRPr>
+            </a:pPr>
+          </a:p>
+        </c:txPr>
+        <c:crossAx val="-2113994440"/>
+        <c:crosses val="autoZero"/>
+        <c:auto val="1"/>
+        <c:lblAlgn val="ctr"/>
+        <c:lblOffset val="100"/>
+        <c:noMultiLvlLbl val="0"/>
+      </c:catAx>
+      <c:valAx>
+        <c:axId val="-2113994440"/>
+        <c:scaling>
+          <c:max val="42.0"/>
+        </c:scaling>
+        <c:delete/>
+        <c:axPos val="b"/>
+        <c:majorTickMark val="out"/>
+        <c:minorTickMark val="none"/>
+        <c:tickLblPos val="nextTo"/>
+        <c:crossAx val="-2068027336"/>
+        <c:crosses val="autoZero"/>
+      </c:valAx>
+    </c:plotArea>
+    <c:dispBlanksAs val="gap"/>
+  </c:chart>
+  <c:txPr>
+    <a:bodyPr/>
+    <a:lstStyle/>
+    <a:p>
+      <a:pPr>
+        <a:defRPr sz="950">
+          <a:solidFill>
+            <a:srgbClr val="4A4A4A"/>
+          </a:solidFill>
+          <a:latin typeface="Calibri"/>
+        </a:defRPr>
+      </a:pPr>
+      <a:endParaRPr lang="en-US"/>
+    </a:p>
+  </c:txPr>
+  <c:externalData r:id="rId1">
+    <c:autoUpdate val="0"/>
+  </c:externalData>
+</c:chartSpace>
+</file>
+
 <file path=ppt/notesMasters/notesMaster1.xml><?xml version="1.0" encoding="utf-8"?>
 <p:notesMaster xmlns:a="http://schemas.openxmlformats.org/drawingml/2006/main" xmlns:r="http://schemas.openxmlformats.org/officeDocument/2006/relationships" xmlns:p="http://schemas.openxmlformats.org/presentationml/2006/main">
   <p:cSld>
@@ -524,7 +737,7 @@
           <a:lstStyle/>
           <a:p>
             <a:r>
-              <a:t>Good morning. Our project is FoodLoop, a surplus food matching platform for Mumbai. Every night restaurants, canteens and banquet halls finish service with food that is still good, while shelters a few kilometres away are short of meals. The problem is not generosity, it is the time in between. FoodLoop lets a kitchen post its surplus with a pickup deadline, scores every verified shelter and offers the food to the best match first. The shelter collects it with its own staff, so there is no delivery rider. We built it on the MERN stack: MongoDB, Express and Node, with plain HTML, CSS and JavaScript on the front end.</a:t>
+              <a:t>Good morning. Our project is FoodLoop, a surplus food matching platform for Mumbai. Every night restaurants, canteens and banquet halls finish service with food that is still good, while shelters a few kilometres away are short of meals. The problem is not generosity, it is the time in between. FoodLoop lets a kitchen post its surplus with a pickup deadline, scores every verified shelter, and offers the food to the best match first. The shelter collects it with its own staff, so there is no delivery rider. It is built on the MERN stack: MongoDB, Express and Node, with plain HTML, CSS and JavaScript on the front end. Three user roles, twenty-two API routes, and a hundred automated tests that all pass.</a:t>
             </a:r>
           </a:p>
         </p:txBody>
@@ -594,7 +807,7 @@
           <a:lstStyle/>
           <a:p>
             <a:r>
-              <a:t>This is a typical evening without FoodLoop. Nobody is unwilling to help; the food simply cannot find the right people in time, and by 11:40 it goes in the bin. So we set four objectives. One: offer food only to shelters that can reach it before the deadline. Two: send one ranked offer at a time instead of messaging everyone, because when everyone is messaged nobody is sure who is coming. Three: the shelter collects it with its own staff and shows a handover code. Four: every decision must be explainable, so we show the score factor by factor and measure the impact on a dashboard.</a:t>
+              <a:t>This is a typical evening without FoodLoop. Nobody here is unwilling to help. The food simply cannot find the right people in time, and by twenty to twelve it goes in the bin. The problem is timing, not generosity. So we set four objectives. One, beat the deadline: only offer food to shelters that can actually collect it in time. Two, ask one shelter at a time instead of broadcasting, because when everyone is messaged nobody is sure who is coming. Three, the shelter collects it itself and shows a four digit handover code. And four, explain every decision: we show the score factor by factor and measure the impact on a dashboard.</a:t>
             </a:r>
           </a:p>
         </p:txBody>
@@ -664,7 +877,7 @@
           <a:lstStyle/>
           <a:p>
             <a:r>
-              <a:t>We have three human actors. The donor kitchen, the recipient shelter and a FoodLoop admin. Both donors and recipients register and log in, and logging in includes authenticating with a JSON Web Token. When a donor posts food, the system filters the eligible shelters, which includes scoring and ranking them, which in turn includes calculating distance and drive time. Those are include relationships, they always happen. If a recipient passes, or does not reply within ten minutes, re-scoring and offering to the next shelter extends that flow. The admin exists because somebody has to check that an NGO is genuine before food is sent to it.</a:t>
+              <a:t>We have three human actors: the donor kitchen, the recipient shelter and a FoodLoop admin. The colours on the right match the ellipses in the diagram. Both donors and recipients register and log in, and logging in includes authenticating with a JSON Web Token. When a donor posts food, the system filters the eligible shelters, which includes scoring and ranking them, which in turn includes calculating distance and drive time. Those are include relationships: they always happen. If a recipient passes, or does not reply within ten minutes, re-scoring and offering to the next shelter extends that flow. The admin exists because somebody has to check that an NGO is genuine before food is sent to it.</a:t>
             </a:r>
           </a:p>
         </p:txBody>
@@ -734,7 +947,7 @@
           <a:lstStyle/>
           <a:p>
             <a:r>
-              <a:t>On the left is the architecture. The browser pages are plain HTML, CSS and JavaScript with no framework; api.js keeps the login token and calls the API with fetch. The Express server exposes six route groups, each protected by a JWT check and a role guard, so a donor cannot call a recipient route. MongoDB stores three collections through Mongoose: organisations, listings and offers. On the right is the matching engine. First we filter: a shelter that does not take that food type, has no room left today, is outside its own travel radius or cannot drive there before the deadline is dropped. The rest are scored out of 100. Time counts most at 35 percent because cooked food does not wait. The best shelter is asked first and has ten minutes to reply; if it passes, we re-score the remaining shelters with the time that is left and ask the next best.</a:t>
+              <a:t>On the left, the architecture. The browser pages are plain HTML, CSS and JavaScript with no framework; api.js keeps the login token and calls the API with fetch. The Express server exposes six route groups, each behind a JWT check and a role guard, so a donor cannot call a recipient route. MongoDB stores three collections through Mongoose. On the right, the matching engine. First we filter: a shelter that does not take that food type, has no room left today, is outside its own travel radius, or cannot drive there before the deadline is dropped. The survivors are scored out of a hundred. Time counts most, thirty-five percent, because cooked food does not wait. The best shelter is asked first and gets ten minutes; if it passes we re-score the rest with the time that is left and ask the next best. The worked example gives sixty-five out of a hundred.</a:t>
             </a:r>
           </a:p>
         </p:txBody>
@@ -804,7 +1017,7 @@
           <a:lstStyle/>
           <a:p>
             <a:r>
-              <a:t>Ten pages, all sharing one MongoDB database. On the donor dashboard you post food and the ranked shelters appear straight away, with a live countdown and, once a shelter accepts, a box to type their handover code. On the recipient dashboard the shelter sees how long it has to reply, the score broken down factor by factor, and after collecting, a printable slip. The impact dashboard is built entirely from MongoDB aggregation pipelines: meals saved per day, the food type split, and the kitchens and shelters that did the most. We tested the whole system with 100 automated checks, 44 on the API and 56 driving the pages in a real browser, and they all pass. Next we would deploy it and add SMS alerts so shelters do not have to keep the page open.</a:t>
+              <a:t>Ten pages, all sharing one MongoDB database. On the donor dashboard you post food and the ranked shelters appear immediately with distance, drive time and score, a live countdown, and once a shelter accepts, a box to type their handover code. The impact dashboard on the right is built entirely from MongoDB aggregation pipelines: meals saved per day, the food type split, collected against expired, and the kitchens and shelters that did the most. We did not test by clicking around and hoping. There are a hundred automated checks: forty-four calling the API directly and fifty-six driving a real browser with a donor in one window and a shelter in another. All of them pass, and the browser tests also fail on any JavaScript error. Next we would deploy it and add SMS alerts, so a shelter does not have to keep the page open.</a:t>
             </a:r>
           </a:p>
         </p:txBody>
@@ -4631,8 +4844,8 @@
         </p:nvSpPr>
         <p:spPr>
           <a:xfrm>
-            <a:off x="2377440" y="109728"/>
-            <a:ext cx="6217920" cy="566928"/>
+            <a:off x="2331720" y="109728"/>
+            <a:ext cx="6309360" cy="566928"/>
           </a:xfrm>
           <a:prstGeom prst="rect">
             <a:avLst/>
@@ -4823,8 +5036,8 @@
         </p:blipFill>
         <p:spPr>
           <a:xfrm>
-            <a:off x="5057908" y="914400"/>
-            <a:ext cx="3720331" cy="4617720"/>
+            <a:off x="5035807" y="896112"/>
+            <a:ext cx="3742432" cy="4645152"/>
           </a:xfrm>
           <a:prstGeom prst="rect">
             <a:avLst/>
@@ -4839,8 +5052,8 @@
         </p:nvSpPr>
         <p:spPr>
           <a:xfrm>
-            <a:off x="457200" y="1051560"/>
-            <a:ext cx="4937760" cy="228600"/>
+            <a:off x="457200" y="1042415"/>
+            <a:ext cx="4258567" cy="219456"/>
           </a:xfrm>
           <a:prstGeom prst="rect">
             <a:avLst/>
@@ -4874,8 +5087,8 @@
         </p:nvSpPr>
         <p:spPr>
           <a:xfrm>
-            <a:off x="457200" y="1371600"/>
-            <a:ext cx="4754880" cy="1554480"/>
+            <a:off x="457200" y="1353312"/>
+            <a:ext cx="4258567" cy="1600200"/>
           </a:xfrm>
           <a:prstGeom prst="rect">
             <a:avLst/>
@@ -4888,7 +5101,11 @@
           </a:bodyPr>
           <a:lstStyle/>
           <a:p>
-            <a:pPr algn="l"/>
+            <a:pPr algn="l">
+              <a:lnSpc>
+                <a:spcPct val="95000"/>
+              </a:lnSpc>
+            </a:pPr>
             <a:r>
               <a:rPr sz="2800" b="1" i="0">
                 <a:solidFill>
@@ -4918,8 +5135,8 @@
         </p:nvSpPr>
         <p:spPr>
           <a:xfrm>
-            <a:off x="457200" y="3017520"/>
-            <a:ext cx="4572000" cy="1097280"/>
+            <a:off x="457200" y="3035808"/>
+            <a:ext cx="4075687" cy="1051560"/>
           </a:xfrm>
           <a:prstGeom prst="rect">
             <a:avLst/>
@@ -4932,15 +5149,19 @@
           </a:bodyPr>
           <a:lstStyle/>
           <a:p>
-            <a:pPr algn="l"/>
-            <a:r>
-              <a:rPr sz="1250" b="0" i="0">
+            <a:pPr algn="l">
+              <a:lnSpc>
+                <a:spcPct val="105000"/>
+              </a:lnSpc>
+            </a:pPr>
+            <a:r>
+              <a:rPr sz="1150" b="0" i="0">
                 <a:solidFill>
                   <a:srgbClr val="4A4A4A"/>
                 </a:solidFill>
                 <a:latin typeface="Calibri"/>
               </a:rPr>
-              <a:t>Mumbai's kitchens throw away good food at closing time while shelters a few kilometres away go short. FoodLoop scores every nearby shelter, offers the food to the best one first, and the shelter collects it itself using a handover code.</a:t>
+              <a:t>Mumbai's kitchens throw away good food at closing time while shelters a few kilometres away go short. FoodLoop scores every nearby shelter, offers the food to the best one first, and the shelter collects it itself with a handover code.</a:t>
             </a:r>
           </a:p>
         </p:txBody>
@@ -4953,14 +5174,14 @@
         </p:nvSpPr>
         <p:spPr>
           <a:xfrm>
-            <a:off x="457200" y="4224528"/>
-            <a:ext cx="4572000" cy="18288"/>
+            <a:off x="457200" y="4233672"/>
+            <a:ext cx="4258567" cy="13716"/>
           </a:xfrm>
           <a:prstGeom prst="rect">
             <a:avLst/>
           </a:prstGeom>
           <a:solidFill>
-            <a:srgbClr val="D9D9D9"/>
+            <a:srgbClr val="DBD6D6"/>
           </a:solidFill>
           <a:ln>
             <a:noFill/>
@@ -4997,8 +5218,8 @@
         </p:nvSpPr>
         <p:spPr>
           <a:xfrm>
-            <a:off x="457200" y="4370832"/>
-            <a:ext cx="5486400" cy="228600"/>
+            <a:off x="457200" y="4389120"/>
+            <a:ext cx="5486400" cy="219456"/>
           </a:xfrm>
           <a:prstGeom prst="rect">
             <a:avLst/>
@@ -5032,8 +5253,8 @@
         </p:nvSpPr>
         <p:spPr>
           <a:xfrm>
-            <a:off x="457200" y="4626864"/>
-            <a:ext cx="2194560" cy="640080"/>
+            <a:off x="457200" y="4645152"/>
+            <a:ext cx="2148840" cy="640080"/>
           </a:xfrm>
           <a:prstGeom prst="rect">
             <a:avLst/>
@@ -5060,7 +5281,7 @@
           <a:p>
             <a:pPr algn="l"/>
             <a:r>
-              <a:rPr sz="1150" b="0" i="0">
+              <a:rPr sz="1100" b="0" i="0">
                 <a:solidFill>
                   <a:srgbClr val="7A7A7A"/>
                 </a:solidFill>
@@ -5079,8 +5300,8 @@
         </p:nvSpPr>
         <p:spPr>
           <a:xfrm>
-            <a:off x="2743200" y="4626864"/>
-            <a:ext cx="2194560" cy="640080"/>
+            <a:off x="2697480" y="4645152"/>
+            <a:ext cx="2148840" cy="640080"/>
           </a:xfrm>
           <a:prstGeom prst="rect">
             <a:avLst/>
@@ -5107,7 +5328,7 @@
           <a:p>
             <a:pPr algn="l"/>
             <a:r>
-              <a:rPr sz="1150" b="0" i="0">
+              <a:rPr sz="1100" b="0" i="0">
                 <a:solidFill>
                   <a:srgbClr val="7A7A7A"/>
                 </a:solidFill>
@@ -5120,14 +5341,62 @@
       </p:sp>
       <p:sp>
         <p:nvSpPr>
-          <p:cNvPr id="28" name="TextBox 27"/>
+          <p:cNvPr id="28" name="Rounded Rectangle 27"/>
+          <p:cNvSpPr/>
+          <p:nvPr/>
+        </p:nvSpPr>
+        <p:spPr>
+          <a:xfrm>
+            <a:off x="457200" y="5212080"/>
+            <a:ext cx="1417320" cy="548640"/>
+          </a:xfrm>
+          <a:prstGeom prst="roundRect">
+            <a:avLst>
+              <a:gd name="adj" fmla="val 8000"/>
+            </a:avLst>
+          </a:prstGeom>
+          <a:solidFill>
+            <a:srgbClr val="ECF5EE"/>
+          </a:solidFill>
+          <a:ln w="12700">
+            <a:solidFill>
+              <a:srgbClr val="C6E2CB"/>
+            </a:solidFill>
+          </a:ln>
+          <a:effectLst/>
+        </p:spPr>
+        <p:style>
+          <a:lnRef idx="1">
+            <a:schemeClr val="accent1"/>
+          </a:lnRef>
+          <a:fillRef idx="3">
+            <a:schemeClr val="accent1"/>
+          </a:fillRef>
+          <a:effectRef idx="2">
+            <a:schemeClr val="accent1"/>
+          </a:effectRef>
+          <a:fontRef idx="minor">
+            <a:schemeClr val="lt1"/>
+          </a:fontRef>
+        </p:style>
+        <p:txBody>
+          <a:bodyPr rtlCol="0" anchor="ctr"/>
+          <a:lstStyle/>
+          <a:p>
+            <a:pPr algn="ctr"/>
+          </a:p>
+        </p:txBody>
+      </p:sp>
+      <p:sp>
+        <p:nvSpPr>
+          <p:cNvPr id="29" name="TextBox 28"/>
           <p:cNvSpPr txBox="1"/>
           <p:nvPr/>
         </p:nvSpPr>
         <p:spPr>
           <a:xfrm>
-            <a:off x="457200" y="5394960"/>
-            <a:ext cx="1508760" cy="548640"/>
+            <a:off x="457200" y="5285232"/>
+            <a:ext cx="1417320" cy="274320"/>
           </a:xfrm>
           <a:prstGeom prst="rect">
             <a:avLst/>
@@ -5140,41 +5409,29 @@
           </a:bodyPr>
           <a:lstStyle/>
           <a:p>
-            <a:pPr algn="l"/>
+            <a:pPr algn="ctr"/>
             <a:r>
               <a:rPr sz="1700" b="1" i="0">
                 <a:solidFill>
-                  <a:srgbClr val="C00000"/>
+                  <a:srgbClr val="2E7D32"/>
                 </a:solidFill>
                 <a:latin typeface="Calibri"/>
               </a:rPr>
-              <a:t>MERN</a:t>
-            </a:r>
-          </a:p>
-          <a:p>
-            <a:pPr algn="l"/>
-            <a:r>
-              <a:rPr sz="950" b="0" i="0">
-                <a:solidFill>
-                  <a:srgbClr val="7A7A7A"/>
-                </a:solidFill>
-                <a:latin typeface="Calibri"/>
-              </a:rPr>
-              <a:t>stack (no React)</a:t>
-            </a:r>
-          </a:p>
-        </p:txBody>
-      </p:sp>
-      <p:sp>
-        <p:nvSpPr>
-          <p:cNvPr id="29" name="TextBox 28"/>
+              <a:t>3</a:t>
+            </a:r>
+          </a:p>
+        </p:txBody>
+      </p:sp>
+      <p:sp>
+        <p:nvSpPr>
+          <p:cNvPr id="30" name="TextBox 29"/>
           <p:cNvSpPr txBox="1"/>
           <p:nvPr/>
         </p:nvSpPr>
         <p:spPr>
           <a:xfrm>
-            <a:off x="2011680" y="5394960"/>
-            <a:ext cx="1508760" cy="548640"/>
+            <a:off x="457200" y="5522976"/>
+            <a:ext cx="1417320" cy="201168"/>
           </a:xfrm>
           <a:prstGeom prst="rect">
             <a:avLst/>
@@ -5187,23 +5444,11 @@
           </a:bodyPr>
           <a:lstStyle/>
           <a:p>
-            <a:pPr algn="l"/>
-            <a:r>
-              <a:rPr sz="1700" b="1" i="0">
-                <a:solidFill>
-                  <a:srgbClr val="C00000"/>
-                </a:solidFill>
-                <a:latin typeface="Calibri"/>
-              </a:rPr>
-              <a:t>3</a:t>
-            </a:r>
-          </a:p>
-          <a:p>
-            <a:pPr algn="l"/>
-            <a:r>
-              <a:rPr sz="950" b="0" i="0">
-                <a:solidFill>
-                  <a:srgbClr val="7A7A7A"/>
+            <a:pPr algn="ctr"/>
+            <a:r>
+              <a:rPr sz="900" b="0" i="0">
+                <a:solidFill>
+                  <a:srgbClr val="4A4A4A"/>
                 </a:solidFill>
                 <a:latin typeface="Calibri"/>
               </a:rPr>
@@ -5214,14 +5459,62 @@
       </p:sp>
       <p:sp>
         <p:nvSpPr>
-          <p:cNvPr id="30" name="TextBox 29"/>
+          <p:cNvPr id="31" name="Rounded Rectangle 30"/>
+          <p:cNvSpPr/>
+          <p:nvPr/>
+        </p:nvSpPr>
+        <p:spPr>
+          <a:xfrm>
+            <a:off x="1993391" y="5212080"/>
+            <a:ext cx="1417320" cy="548640"/>
+          </a:xfrm>
+          <a:prstGeom prst="roundRect">
+            <a:avLst>
+              <a:gd name="adj" fmla="val 8000"/>
+            </a:avLst>
+          </a:prstGeom>
+          <a:solidFill>
+            <a:srgbClr val="ECF5EE"/>
+          </a:solidFill>
+          <a:ln w="12700">
+            <a:solidFill>
+              <a:srgbClr val="C6E2CB"/>
+            </a:solidFill>
+          </a:ln>
+          <a:effectLst/>
+        </p:spPr>
+        <p:style>
+          <a:lnRef idx="1">
+            <a:schemeClr val="accent1"/>
+          </a:lnRef>
+          <a:fillRef idx="3">
+            <a:schemeClr val="accent1"/>
+          </a:fillRef>
+          <a:effectRef idx="2">
+            <a:schemeClr val="accent1"/>
+          </a:effectRef>
+          <a:fontRef idx="minor">
+            <a:schemeClr val="lt1"/>
+          </a:fontRef>
+        </p:style>
+        <p:txBody>
+          <a:bodyPr rtlCol="0" anchor="ctr"/>
+          <a:lstStyle/>
+          <a:p>
+            <a:pPr algn="ctr"/>
+          </a:p>
+        </p:txBody>
+      </p:sp>
+      <p:sp>
+        <p:nvSpPr>
+          <p:cNvPr id="32" name="TextBox 31"/>
           <p:cNvSpPr txBox="1"/>
           <p:nvPr/>
         </p:nvSpPr>
         <p:spPr>
           <a:xfrm>
-            <a:off x="3566160" y="5394960"/>
-            <a:ext cx="1508760" cy="548640"/>
+            <a:off x="1993391" y="5285232"/>
+            <a:ext cx="1417320" cy="274320"/>
           </a:xfrm>
           <a:prstGeom prst="rect">
             <a:avLst/>
@@ -5234,27 +5527,168 @@
           </a:bodyPr>
           <a:lstStyle/>
           <a:p>
-            <a:pPr algn="l"/>
+            <a:pPr algn="ctr"/>
             <a:r>
               <a:rPr sz="1700" b="1" i="0">
                 <a:solidFill>
-                  <a:srgbClr val="C00000"/>
+                  <a:srgbClr val="2E7D32"/>
                 </a:solidFill>
                 <a:latin typeface="Calibri"/>
               </a:rPr>
-              <a:t>5</a:t>
-            </a:r>
-          </a:p>
-          <a:p>
-            <a:pPr algn="l"/>
-            <a:r>
-              <a:rPr sz="950" b="0" i="0">
-                <a:solidFill>
-                  <a:srgbClr val="7A7A7A"/>
+              <a:t>22</a:t>
+            </a:r>
+          </a:p>
+        </p:txBody>
+      </p:sp>
+      <p:sp>
+        <p:nvSpPr>
+          <p:cNvPr id="33" name="TextBox 32"/>
+          <p:cNvSpPr txBox="1"/>
+          <p:nvPr/>
+        </p:nvSpPr>
+        <p:spPr>
+          <a:xfrm>
+            <a:off x="1993391" y="5522976"/>
+            <a:ext cx="1417320" cy="201168"/>
+          </a:xfrm>
+          <a:prstGeom prst="rect">
+            <a:avLst/>
+          </a:prstGeom>
+          <a:noFill/>
+        </p:spPr>
+        <p:txBody>
+          <a:bodyPr wrap="square" lIns="0" rIns="0" tIns="0" bIns="0" anchor="t">
+            <a:spAutoFit/>
+          </a:bodyPr>
+          <a:lstStyle/>
+          <a:p>
+            <a:pPr algn="ctr"/>
+            <a:r>
+              <a:rPr sz="900" b="0" i="0">
+                <a:solidFill>
+                  <a:srgbClr val="4A4A4A"/>
                 </a:solidFill>
                 <a:latin typeface="Calibri"/>
               </a:rPr>
-              <a:t>factor match score</a:t>
+              <a:t>API routes</a:t>
+            </a:r>
+          </a:p>
+        </p:txBody>
+      </p:sp>
+      <p:sp>
+        <p:nvSpPr>
+          <p:cNvPr id="34" name="Rounded Rectangle 33"/>
+          <p:cNvSpPr/>
+          <p:nvPr/>
+        </p:nvSpPr>
+        <p:spPr>
+          <a:xfrm>
+            <a:off x="3529584" y="5212080"/>
+            <a:ext cx="1417320" cy="548640"/>
+          </a:xfrm>
+          <a:prstGeom prst="roundRect">
+            <a:avLst>
+              <a:gd name="adj" fmla="val 8000"/>
+            </a:avLst>
+          </a:prstGeom>
+          <a:solidFill>
+            <a:srgbClr val="ECF5EE"/>
+          </a:solidFill>
+          <a:ln w="12700">
+            <a:solidFill>
+              <a:srgbClr val="C6E2CB"/>
+            </a:solidFill>
+          </a:ln>
+          <a:effectLst/>
+        </p:spPr>
+        <p:style>
+          <a:lnRef idx="1">
+            <a:schemeClr val="accent1"/>
+          </a:lnRef>
+          <a:fillRef idx="3">
+            <a:schemeClr val="accent1"/>
+          </a:fillRef>
+          <a:effectRef idx="2">
+            <a:schemeClr val="accent1"/>
+          </a:effectRef>
+          <a:fontRef idx="minor">
+            <a:schemeClr val="lt1"/>
+          </a:fontRef>
+        </p:style>
+        <p:txBody>
+          <a:bodyPr rtlCol="0" anchor="ctr"/>
+          <a:lstStyle/>
+          <a:p>
+            <a:pPr algn="ctr"/>
+          </a:p>
+        </p:txBody>
+      </p:sp>
+      <p:sp>
+        <p:nvSpPr>
+          <p:cNvPr id="35" name="TextBox 34"/>
+          <p:cNvSpPr txBox="1"/>
+          <p:nvPr/>
+        </p:nvSpPr>
+        <p:spPr>
+          <a:xfrm>
+            <a:off x="3529584" y="5285232"/>
+            <a:ext cx="1417320" cy="274320"/>
+          </a:xfrm>
+          <a:prstGeom prst="rect">
+            <a:avLst/>
+          </a:prstGeom>
+          <a:noFill/>
+        </p:spPr>
+        <p:txBody>
+          <a:bodyPr wrap="square" lIns="0" rIns="0" tIns="0" bIns="0" anchor="t">
+            <a:spAutoFit/>
+          </a:bodyPr>
+          <a:lstStyle/>
+          <a:p>
+            <a:pPr algn="ctr"/>
+            <a:r>
+              <a:rPr sz="1700" b="1" i="0">
+                <a:solidFill>
+                  <a:srgbClr val="2E7D32"/>
+                </a:solidFill>
+                <a:latin typeface="Calibri"/>
+              </a:rPr>
+              <a:t>100</a:t>
+            </a:r>
+          </a:p>
+        </p:txBody>
+      </p:sp>
+      <p:sp>
+        <p:nvSpPr>
+          <p:cNvPr id="36" name="TextBox 35"/>
+          <p:cNvSpPr txBox="1"/>
+          <p:nvPr/>
+        </p:nvSpPr>
+        <p:spPr>
+          <a:xfrm>
+            <a:off x="3529584" y="5522976"/>
+            <a:ext cx="1417320" cy="201168"/>
+          </a:xfrm>
+          <a:prstGeom prst="rect">
+            <a:avLst/>
+          </a:prstGeom>
+          <a:noFill/>
+        </p:spPr>
+        <p:txBody>
+          <a:bodyPr wrap="square" lIns="0" rIns="0" tIns="0" bIns="0" anchor="t">
+            <a:spAutoFit/>
+          </a:bodyPr>
+          <a:lstStyle/>
+          <a:p>
+            <a:pPr algn="ctr"/>
+            <a:r>
+              <a:rPr sz="900" b="0" i="0">
+                <a:solidFill>
+                  <a:srgbClr val="4A4A4A"/>
+                </a:solidFill>
+                <a:latin typeface="Calibri"/>
+              </a:rPr>
+              <a:t>tests pass</a:t>
             </a:r>
           </a:p>
         </p:txBody>
@@ -5367,8 +5801,8 @@
         </p:nvSpPr>
         <p:spPr>
           <a:xfrm>
-            <a:off x="2377440" y="109728"/>
-            <a:ext cx="6217920" cy="566928"/>
+            <a:off x="2331720" y="109728"/>
+            <a:ext cx="6309360" cy="566928"/>
           </a:xfrm>
           <a:prstGeom prst="rect">
             <a:avLst/>
@@ -5551,8 +5985,8 @@
         </p:nvSpPr>
         <p:spPr>
           <a:xfrm>
-            <a:off x="457200" y="868680"/>
-            <a:ext cx="4389120" cy="822960"/>
+            <a:off x="457200" y="841248"/>
+            <a:ext cx="4160520" cy="777240"/>
           </a:xfrm>
           <a:prstGeom prst="rect">
             <a:avLst/>
@@ -5565,9 +5999,13 @@
           </a:bodyPr>
           <a:lstStyle/>
           <a:p>
-            <a:pPr algn="l"/>
-            <a:r>
-              <a:rPr sz="1800" b="1" i="0">
+            <a:pPr algn="l">
+              <a:lnSpc>
+                <a:spcPct val="100000"/>
+              </a:lnSpc>
+            </a:pPr>
+            <a:r>
+              <a:rPr sz="1700" b="1" i="0">
                 <a:solidFill>
                   <a:srgbClr val="1F1F1F"/>
                 </a:solidFill>
@@ -5577,9 +6015,13 @@
             </a:r>
           </a:p>
           <a:p>
-            <a:pPr algn="l"/>
-            <a:r>
-              <a:rPr sz="1800" b="1" i="1">
+            <a:pPr algn="l">
+              <a:lnSpc>
+                <a:spcPct val="100000"/>
+              </a:lnSpc>
+            </a:pPr>
+            <a:r>
+              <a:rPr sz="1700" b="1" i="1">
                 <a:solidFill>
                   <a:srgbClr val="C00000"/>
                 </a:solidFill>
@@ -5598,15 +6040,15 @@
         </p:nvCxnSpPr>
         <p:spPr>
           <a:xfrm>
-            <a:off x="548640" y="1920240"/>
-            <a:ext cx="0" cy="2706624"/>
+            <a:off x="548640" y="1837943"/>
+            <a:ext cx="0" cy="2560321"/>
           </a:xfrm>
           <a:prstGeom prst="line">
             <a:avLst/>
           </a:prstGeom>
           <a:ln w="19050">
             <a:solidFill>
-              <a:srgbClr val="D9D9D9"/>
+              <a:srgbClr val="DBD6D6"/>
             </a:solidFill>
           </a:ln>
         </p:spPr>
@@ -5633,8 +6075,8 @@
         </p:nvSpPr>
         <p:spPr>
           <a:xfrm>
-            <a:off x="475488" y="1856231"/>
-            <a:ext cx="146304" cy="146304"/>
+            <a:off x="480060" y="1783080"/>
+            <a:ext cx="137160" cy="137160"/>
           </a:xfrm>
           <a:prstGeom prst="ellipse">
             <a:avLst/>
@@ -5679,8 +6121,8 @@
         </p:nvSpPr>
         <p:spPr>
           <a:xfrm>
-            <a:off x="777240" y="1828800"/>
-            <a:ext cx="777240" cy="274320"/>
+            <a:off x="777240" y="1755648"/>
+            <a:ext cx="749808" cy="237744"/>
           </a:xfrm>
           <a:prstGeom prst="rect">
             <a:avLst/>
@@ -5695,7 +6137,7 @@
           <a:p>
             <a:pPr algn="l"/>
             <a:r>
-              <a:rPr sz="1150" b="1" i="0">
+              <a:rPr sz="1100" b="1" i="0">
                 <a:solidFill>
                   <a:srgbClr val="1F1F1F"/>
                 </a:solidFill>
@@ -5714,8 +6156,8 @@
         </p:nvSpPr>
         <p:spPr>
           <a:xfrm>
-            <a:off x="1600200" y="1828800"/>
-            <a:ext cx="3200400" cy="548640"/>
+            <a:off x="1572768" y="1755648"/>
+            <a:ext cx="3017520" cy="457200"/>
           </a:xfrm>
           <a:prstGeom prst="rect">
             <a:avLst/>
@@ -5728,15 +6170,19 @@
           </a:bodyPr>
           <a:lstStyle/>
           <a:p>
-            <a:pPr algn="l"/>
-            <a:r>
-              <a:rPr sz="1150" b="0" i="0">
+            <a:pPr algn="l">
+              <a:lnSpc>
+                <a:spcPct val="100000"/>
+              </a:lnSpc>
+            </a:pPr>
+            <a:r>
+              <a:rPr sz="1100" b="0" i="0">
                 <a:solidFill>
                   <a:srgbClr val="4A4A4A"/>
                 </a:solidFill>
                 <a:latin typeface="Calibri"/>
               </a:rPr>
-              <a:t>A wedding ends at an Andheri banquet hall. Sixty thalis untouched.</a:t>
+              <a:t>A wedding ends in Andheri. Sixty thalis untouched.</a:t>
             </a:r>
           </a:p>
         </p:txBody>
@@ -5749,8 +6195,8 @@
         </p:nvSpPr>
         <p:spPr>
           <a:xfrm>
-            <a:off x="475488" y="2532888"/>
-            <a:ext cx="146304" cy="146304"/>
+            <a:off x="480060" y="2423160"/>
+            <a:ext cx="137160" cy="137160"/>
           </a:xfrm>
           <a:prstGeom prst="ellipse">
             <a:avLst/>
@@ -5795,8 +6241,8 @@
         </p:nvSpPr>
         <p:spPr>
           <a:xfrm>
-            <a:off x="777240" y="2505456"/>
-            <a:ext cx="777240" cy="274320"/>
+            <a:off x="777240" y="2395728"/>
+            <a:ext cx="749808" cy="237744"/>
           </a:xfrm>
           <a:prstGeom prst="rect">
             <a:avLst/>
@@ -5811,7 +6257,7 @@
           <a:p>
             <a:pPr algn="l"/>
             <a:r>
-              <a:rPr sz="1150" b="1" i="0">
+              <a:rPr sz="1100" b="1" i="0">
                 <a:solidFill>
                   <a:srgbClr val="1F1F1F"/>
                 </a:solidFill>
@@ -5830,8 +6276,8 @@
         </p:nvSpPr>
         <p:spPr>
           <a:xfrm>
-            <a:off x="1600200" y="2505456"/>
-            <a:ext cx="3200400" cy="548640"/>
+            <a:off x="1572768" y="2395728"/>
+            <a:ext cx="3017520" cy="457200"/>
           </a:xfrm>
           <a:prstGeom prst="rect">
             <a:avLst/>
@@ -5844,15 +6290,19 @@
           </a:bodyPr>
           <a:lstStyle/>
           <a:p>
-            <a:pPr algn="l"/>
-            <a:r>
-              <a:rPr sz="1150" b="0" i="0">
+            <a:pPr algn="l">
+              <a:lnSpc>
+                <a:spcPct val="100000"/>
+              </a:lnSpc>
+            </a:pPr>
+            <a:r>
+              <a:rPr sz="1100" b="0" i="0">
                 <a:solidFill>
                   <a:srgbClr val="4A4A4A"/>
                 </a:solidFill>
                 <a:latin typeface="Calibri"/>
               </a:rPr>
-              <a:t>The manager calls two NGOs he knows. One is closed, one doesn't pick up.</a:t>
+              <a:t>The manager calls two NGOs. One closed, one no answer.</a:t>
             </a:r>
           </a:p>
         </p:txBody>
@@ -5865,8 +6315,8 @@
         </p:nvSpPr>
         <p:spPr>
           <a:xfrm>
-            <a:off x="475488" y="3209544"/>
-            <a:ext cx="146304" cy="146304"/>
+            <a:off x="480060" y="3063239"/>
+            <a:ext cx="137160" cy="137160"/>
           </a:xfrm>
           <a:prstGeom prst="ellipse">
             <a:avLst/>
@@ -5911,8 +6361,8 @@
         </p:nvSpPr>
         <p:spPr>
           <a:xfrm>
-            <a:off x="777240" y="3182112"/>
-            <a:ext cx="777240" cy="274320"/>
+            <a:off x="777240" y="3035808"/>
+            <a:ext cx="749808" cy="237744"/>
           </a:xfrm>
           <a:prstGeom prst="rect">
             <a:avLst/>
@@ -5927,7 +6377,7 @@
           <a:p>
             <a:pPr algn="l"/>
             <a:r>
-              <a:rPr sz="1150" b="1" i="0">
+              <a:rPr sz="1100" b="1" i="0">
                 <a:solidFill>
                   <a:srgbClr val="1F1F1F"/>
                 </a:solidFill>
@@ -5946,8 +6396,8 @@
         </p:nvSpPr>
         <p:spPr>
           <a:xfrm>
-            <a:off x="1600200" y="3182112"/>
-            <a:ext cx="3200400" cy="548640"/>
+            <a:off x="1572768" y="3035808"/>
+            <a:ext cx="3017520" cy="457200"/>
           </a:xfrm>
           <a:prstGeom prst="rect">
             <a:avLst/>
@@ -5960,15 +6410,19 @@
           </a:bodyPr>
           <a:lstStyle/>
           <a:p>
-            <a:pPr algn="l"/>
-            <a:r>
-              <a:rPr sz="1150" b="0" i="0">
+            <a:pPr algn="l">
+              <a:lnSpc>
+                <a:spcPct val="100000"/>
+              </a:lnSpc>
+            </a:pPr>
+            <a:r>
+              <a:rPr sz="1100" b="0" i="0">
                 <a:solidFill>
                   <a:srgbClr val="4A4A4A"/>
                 </a:solidFill>
                 <a:latin typeface="Calibri"/>
               </a:rPr>
-              <a:t>A volunteer group replies on WhatsApp. Their van is in Thane.</a:t>
+              <a:t>A volunteer group replies. Their van is in Thane.</a:t>
             </a:r>
           </a:p>
         </p:txBody>
@@ -5981,8 +6435,8 @@
         </p:nvSpPr>
         <p:spPr>
           <a:xfrm>
-            <a:off x="475488" y="3886200"/>
-            <a:ext cx="146304" cy="146304"/>
+            <a:off x="480060" y="3703320"/>
+            <a:ext cx="137160" cy="137160"/>
           </a:xfrm>
           <a:prstGeom prst="ellipse">
             <a:avLst/>
@@ -6027,8 +6481,8 @@
         </p:nvSpPr>
         <p:spPr>
           <a:xfrm>
-            <a:off x="777240" y="3858768"/>
-            <a:ext cx="777240" cy="274320"/>
+            <a:off x="777240" y="3675887"/>
+            <a:ext cx="749808" cy="237744"/>
           </a:xfrm>
           <a:prstGeom prst="rect">
             <a:avLst/>
@@ -6043,7 +6497,7 @@
           <a:p>
             <a:pPr algn="l"/>
             <a:r>
-              <a:rPr sz="1150" b="1" i="0">
+              <a:rPr sz="1100" b="1" i="0">
                 <a:solidFill>
                   <a:srgbClr val="1F1F1F"/>
                 </a:solidFill>
@@ -6062,8 +6516,8 @@
         </p:nvSpPr>
         <p:spPr>
           <a:xfrm>
-            <a:off x="1600200" y="3858768"/>
-            <a:ext cx="3200400" cy="548640"/>
+            <a:off x="1572768" y="3675887"/>
+            <a:ext cx="3017520" cy="457200"/>
           </a:xfrm>
           <a:prstGeom prst="rect">
             <a:avLst/>
@@ -6076,15 +6530,19 @@
           </a:bodyPr>
           <a:lstStyle/>
           <a:p>
-            <a:pPr algn="l"/>
-            <a:r>
-              <a:rPr sz="1150" b="0" i="0">
+            <a:pPr algn="l">
+              <a:lnSpc>
+                <a:spcPct val="100000"/>
+              </a:lnSpc>
+            </a:pPr>
+            <a:r>
+              <a:rPr sz="1100" b="0" i="0">
                 <a:solidFill>
                   <a:srgbClr val="4A4A4A"/>
                 </a:solidFill>
                 <a:latin typeface="Calibri"/>
               </a:rPr>
-              <a:t>The kitchen has to close. The trays are still sitting out.</a:t>
+              <a:t>The kitchen must close. The trays are still out.</a:t>
             </a:r>
           </a:p>
         </p:txBody>
@@ -6097,8 +6555,8 @@
         </p:nvSpPr>
         <p:spPr>
           <a:xfrm>
-            <a:off x="475488" y="4562856"/>
-            <a:ext cx="146304" cy="146304"/>
+            <a:off x="457200" y="4325112"/>
+            <a:ext cx="182880" cy="182880"/>
           </a:xfrm>
           <a:prstGeom prst="ellipse">
             <a:avLst/>
@@ -6106,10 +6564,8 @@
           <a:solidFill>
             <a:srgbClr val="C00000"/>
           </a:solidFill>
-          <a:ln w="19050">
-            <a:solidFill>
-              <a:srgbClr val="C00000"/>
-            </a:solidFill>
+          <a:ln>
+            <a:noFill/>
           </a:ln>
           <a:effectLst/>
         </p:spPr>
@@ -6143,8 +6599,8 @@
         </p:nvSpPr>
         <p:spPr>
           <a:xfrm>
-            <a:off x="777240" y="4535424"/>
-            <a:ext cx="777240" cy="274320"/>
+            <a:off x="777240" y="4297680"/>
+            <a:ext cx="749808" cy="237744"/>
           </a:xfrm>
           <a:prstGeom prst="rect">
             <a:avLst/>
@@ -6159,7 +6615,7 @@
           <a:p>
             <a:pPr algn="l"/>
             <a:r>
-              <a:rPr sz="1150" b="1" i="0">
+              <a:rPr sz="1100" b="1" i="0">
                 <a:solidFill>
                   <a:srgbClr val="C00000"/>
                 </a:solidFill>
@@ -6178,8 +6634,8 @@
         </p:nvSpPr>
         <p:spPr>
           <a:xfrm>
-            <a:off x="1600200" y="4535424"/>
-            <a:ext cx="3200400" cy="548640"/>
+            <a:off x="1572768" y="4261104"/>
+            <a:ext cx="3017520" cy="548640"/>
           </a:xfrm>
           <a:prstGeom prst="rect">
             <a:avLst/>
@@ -6192,15 +6648,19 @@
           </a:bodyPr>
           <a:lstStyle/>
           <a:p>
-            <a:pPr algn="l"/>
-            <a:r>
-              <a:rPr sz="1150" b="1" i="0">
+            <a:pPr algn="l">
+              <a:lnSpc>
+                <a:spcPct val="100000"/>
+              </a:lnSpc>
+            </a:pPr>
+            <a:r>
+              <a:rPr sz="1350" b="1" i="0">
                 <a:solidFill>
                   <a:srgbClr val="C00000"/>
                 </a:solidFill>
                 <a:latin typeface="Calibri"/>
               </a:rPr>
-              <a:t>Before locking up, the staff throw the food away.</a:t>
+              <a:t>The staff throw the food away.</a:t>
             </a:r>
           </a:p>
         </p:txBody>
@@ -6213,8 +6673,8 @@
         </p:nvSpPr>
         <p:spPr>
           <a:xfrm>
-            <a:off x="777240" y="5257800"/>
-            <a:ext cx="3840480" cy="274320"/>
+            <a:off x="777240" y="4754879"/>
+            <a:ext cx="3840480" cy="237744"/>
           </a:xfrm>
           <a:prstGeom prst="rect">
             <a:avLst/>
@@ -6229,7 +6689,7 @@
           <a:p>
             <a:pPr algn="l"/>
             <a:r>
-              <a:rPr sz="1050" b="0" i="1">
+              <a:rPr sz="950" b="0" i="1">
                 <a:solidFill>
                   <a:srgbClr val="7A7A7A"/>
                 </a:solidFill>
@@ -6256,8 +6716,8 @@
         </p:blipFill>
         <p:spPr>
           <a:xfrm>
-            <a:off x="4983480" y="914400"/>
-            <a:ext cx="3017520" cy="1346686"/>
+            <a:off x="4892040" y="841248"/>
+            <a:ext cx="3886200" cy="1734369"/>
           </a:xfrm>
           <a:prstGeom prst="rect">
             <a:avLst/>
@@ -6272,8 +6732,8 @@
         </p:nvSpPr>
         <p:spPr>
           <a:xfrm>
-            <a:off x="4983480" y="2304288"/>
-            <a:ext cx="3749039" cy="228600"/>
+            <a:off x="4892040" y="2596896"/>
+            <a:ext cx="3886200" cy="219456"/>
           </a:xfrm>
           <a:prstGeom prst="rect">
             <a:avLst/>
@@ -6288,7 +6748,7 @@
           <a:p>
             <a:pPr algn="l"/>
             <a:r>
-              <a:rPr sz="1000" b="0" i="0">
+              <a:rPr sz="950" b="0" i="0">
                 <a:solidFill>
                   <a:srgbClr val="7A7A7A"/>
                 </a:solidFill>
@@ -6307,8 +6767,8 @@
         </p:nvSpPr>
         <p:spPr>
           <a:xfrm>
-            <a:off x="4983480" y="2633472"/>
-            <a:ext cx="3749039" cy="365760"/>
+            <a:off x="4892040" y="2944368"/>
+            <a:ext cx="3886200" cy="219456"/>
           </a:xfrm>
           <a:prstGeom prst="rect">
             <a:avLst/>
@@ -6323,27 +6783,75 @@
           <a:p>
             <a:pPr algn="l"/>
             <a:r>
-              <a:rPr sz="1700" b="1" i="0">
+              <a:rPr sz="1000" b="1" i="0">
                 <a:solidFill>
                   <a:srgbClr val="C00000"/>
                 </a:solidFill>
                 <a:latin typeface="Calibri"/>
               </a:rPr>
-              <a:t>Objectives</a:t>
-            </a:r>
-          </a:p>
-        </p:txBody>
-      </p:sp>
-      <p:sp>
-        <p:nvSpPr>
-          <p:cNvPr id="41" name="Oval 40"/>
+              <a:t>WHAT WE SET OUT TO BUILD</a:t>
+            </a:r>
+          </a:p>
+        </p:txBody>
+      </p:sp>
+      <p:sp>
+        <p:nvSpPr>
+          <p:cNvPr id="41" name="Rounded Rectangle 40"/>
           <p:cNvSpPr/>
           <p:nvPr/>
         </p:nvSpPr>
         <p:spPr>
           <a:xfrm>
-            <a:off x="4983480" y="3063240"/>
-            <a:ext cx="292608" cy="292608"/>
+            <a:off x="4892040" y="3218688"/>
+            <a:ext cx="1874519" cy="1078992"/>
+          </a:xfrm>
+          <a:prstGeom prst="roundRect">
+            <a:avLst>
+              <a:gd name="adj" fmla="val 8000"/>
+            </a:avLst>
+          </a:prstGeom>
+          <a:solidFill>
+            <a:srgbClr val="F7F4F4"/>
+          </a:solidFill>
+          <a:ln w="12700">
+            <a:solidFill>
+              <a:srgbClr val="DBD6D6"/>
+            </a:solidFill>
+          </a:ln>
+          <a:effectLst/>
+        </p:spPr>
+        <p:style>
+          <a:lnRef idx="1">
+            <a:schemeClr val="accent1"/>
+          </a:lnRef>
+          <a:fillRef idx="3">
+            <a:schemeClr val="accent1"/>
+          </a:fillRef>
+          <a:effectRef idx="2">
+            <a:schemeClr val="accent1"/>
+          </a:effectRef>
+          <a:fontRef idx="minor">
+            <a:schemeClr val="lt1"/>
+          </a:fontRef>
+        </p:style>
+        <p:txBody>
+          <a:bodyPr rtlCol="0" anchor="ctr"/>
+          <a:lstStyle/>
+          <a:p>
+            <a:pPr algn="ctr"/>
+          </a:p>
+        </p:txBody>
+      </p:sp>
+      <p:sp>
+        <p:nvSpPr>
+          <p:cNvPr id="42" name="Oval 41"/>
+          <p:cNvSpPr/>
+          <p:nvPr/>
+        </p:nvSpPr>
+        <p:spPr>
+          <a:xfrm>
+            <a:off x="5020055" y="3337560"/>
+            <a:ext cx="256032" cy="256032"/>
           </a:xfrm>
           <a:prstGeom prst="ellipse">
             <a:avLst/>
@@ -6380,14 +6888,14 @@
       </p:sp>
       <p:sp>
         <p:nvSpPr>
-          <p:cNvPr id="42" name="TextBox 41"/>
+          <p:cNvPr id="43" name="TextBox 42"/>
           <p:cNvSpPr txBox="1"/>
           <p:nvPr/>
         </p:nvSpPr>
         <p:spPr>
           <a:xfrm>
-            <a:off x="4983480" y="3063240"/>
-            <a:ext cx="292608" cy="292608"/>
+            <a:off x="5020055" y="3337560"/>
+            <a:ext cx="256032" cy="256032"/>
           </a:xfrm>
           <a:prstGeom prst="rect">
             <a:avLst/>
@@ -6402,7 +6910,7 @@
           <a:p>
             <a:pPr algn="ctr"/>
             <a:r>
-              <a:rPr sz="1200" b="1" i="0">
+              <a:rPr sz="1100" b="1" i="0">
                 <a:solidFill>
                   <a:srgbClr val="FFFFFF"/>
                 </a:solidFill>
@@ -6415,14 +6923,14 @@
       </p:sp>
       <p:sp>
         <p:nvSpPr>
-          <p:cNvPr id="43" name="TextBox 42"/>
+          <p:cNvPr id="44" name="TextBox 43"/>
           <p:cNvSpPr txBox="1"/>
           <p:nvPr/>
         </p:nvSpPr>
         <p:spPr>
           <a:xfrm>
-            <a:off x="5404104" y="3026664"/>
-            <a:ext cx="3383280" cy="640080"/>
+            <a:off x="5349240" y="3364992"/>
+            <a:ext cx="1289303" cy="237744"/>
           </a:xfrm>
           <a:prstGeom prst="rect">
             <a:avLst/>
@@ -6437,39 +6945,114 @@
           <a:p>
             <a:pPr algn="l"/>
             <a:r>
-              <a:rPr sz="1150" b="1" i="0">
+              <a:rPr sz="1100" b="1" i="0">
                 <a:solidFill>
                   <a:srgbClr val="1F1F1F"/>
                 </a:solidFill>
                 <a:latin typeface="Calibri"/>
               </a:rPr>
-              <a:t>Match food before its deadline</a:t>
-            </a:r>
-          </a:p>
-          <a:p>
-            <a:pPr algn="l"/>
-            <a:r>
-              <a:rPr sz="1000" b="0" i="0">
+              <a:t>Beat the deadline</a:t>
+            </a:r>
+          </a:p>
+        </p:txBody>
+      </p:sp>
+      <p:sp>
+        <p:nvSpPr>
+          <p:cNvPr id="45" name="TextBox 44"/>
+          <p:cNvSpPr txBox="1"/>
+          <p:nvPr/>
+        </p:nvSpPr>
+        <p:spPr>
+          <a:xfrm>
+            <a:off x="5020055" y="3675887"/>
+            <a:ext cx="1618487" cy="548640"/>
+          </a:xfrm>
+          <a:prstGeom prst="rect">
+            <a:avLst/>
+          </a:prstGeom>
+          <a:noFill/>
+        </p:spPr>
+        <p:txBody>
+          <a:bodyPr wrap="square" lIns="0" rIns="0" tIns="0" bIns="0" anchor="t">
+            <a:spAutoFit/>
+          </a:bodyPr>
+          <a:lstStyle/>
+          <a:p>
+            <a:pPr algn="l">
+              <a:lnSpc>
+                <a:spcPct val="100000"/>
+              </a:lnSpc>
+            </a:pPr>
+            <a:r>
+              <a:rPr sz="950" b="0" i="0">
                 <a:solidFill>
                   <a:srgbClr val="4A4A4A"/>
                 </a:solidFill>
                 <a:latin typeface="Calibri"/>
               </a:rPr>
-              <a:t>Only offer it to shelters that can actually collect it in time.</a:t>
-            </a:r>
-          </a:p>
-        </p:txBody>
-      </p:sp>
-      <p:sp>
-        <p:nvSpPr>
-          <p:cNvPr id="44" name="Oval 43"/>
+              <a:t>Offer food only to shelters that can really collect it in time.</a:t>
+            </a:r>
+          </a:p>
+        </p:txBody>
+      </p:sp>
+      <p:sp>
+        <p:nvSpPr>
+          <p:cNvPr id="46" name="Rounded Rectangle 45"/>
           <p:cNvSpPr/>
           <p:nvPr/>
         </p:nvSpPr>
         <p:spPr>
           <a:xfrm>
-            <a:off x="4983480" y="3730752"/>
-            <a:ext cx="292608" cy="292608"/>
+            <a:off x="6903719" y="3218688"/>
+            <a:ext cx="1874519" cy="1078992"/>
+          </a:xfrm>
+          <a:prstGeom prst="roundRect">
+            <a:avLst>
+              <a:gd name="adj" fmla="val 8000"/>
+            </a:avLst>
+          </a:prstGeom>
+          <a:solidFill>
+            <a:srgbClr val="F7F4F4"/>
+          </a:solidFill>
+          <a:ln w="12700">
+            <a:solidFill>
+              <a:srgbClr val="DBD6D6"/>
+            </a:solidFill>
+          </a:ln>
+          <a:effectLst/>
+        </p:spPr>
+        <p:style>
+          <a:lnRef idx="1">
+            <a:schemeClr val="accent1"/>
+          </a:lnRef>
+          <a:fillRef idx="3">
+            <a:schemeClr val="accent1"/>
+          </a:fillRef>
+          <a:effectRef idx="2">
+            <a:schemeClr val="accent1"/>
+          </a:effectRef>
+          <a:fontRef idx="minor">
+            <a:schemeClr val="lt1"/>
+          </a:fontRef>
+        </p:style>
+        <p:txBody>
+          <a:bodyPr rtlCol="0" anchor="ctr"/>
+          <a:lstStyle/>
+          <a:p>
+            <a:pPr algn="ctr"/>
+          </a:p>
+        </p:txBody>
+      </p:sp>
+      <p:sp>
+        <p:nvSpPr>
+          <p:cNvPr id="47" name="Oval 46"/>
+          <p:cNvSpPr/>
+          <p:nvPr/>
+        </p:nvSpPr>
+        <p:spPr>
+          <a:xfrm>
+            <a:off x="7031735" y="3337560"/>
+            <a:ext cx="256032" cy="256032"/>
           </a:xfrm>
           <a:prstGeom prst="ellipse">
             <a:avLst/>
@@ -6506,14 +7089,14 @@
       </p:sp>
       <p:sp>
         <p:nvSpPr>
-          <p:cNvPr id="45" name="TextBox 44"/>
+          <p:cNvPr id="48" name="TextBox 47"/>
           <p:cNvSpPr txBox="1"/>
           <p:nvPr/>
         </p:nvSpPr>
         <p:spPr>
           <a:xfrm>
-            <a:off x="4983480" y="3730752"/>
-            <a:ext cx="292608" cy="292608"/>
+            <a:off x="7031735" y="3337560"/>
+            <a:ext cx="256032" cy="256032"/>
           </a:xfrm>
           <a:prstGeom prst="rect">
             <a:avLst/>
@@ -6528,7 +7111,7 @@
           <a:p>
             <a:pPr algn="ctr"/>
             <a:r>
-              <a:rPr sz="1200" b="1" i="0">
+              <a:rPr sz="1100" b="1" i="0">
                 <a:solidFill>
                   <a:srgbClr val="FFFFFF"/>
                 </a:solidFill>
@@ -6541,14 +7124,14 @@
       </p:sp>
       <p:sp>
         <p:nvSpPr>
-          <p:cNvPr id="46" name="TextBox 45"/>
+          <p:cNvPr id="49" name="TextBox 48"/>
           <p:cNvSpPr txBox="1"/>
           <p:nvPr/>
         </p:nvSpPr>
         <p:spPr>
           <a:xfrm>
-            <a:off x="5404104" y="3694176"/>
-            <a:ext cx="3383280" cy="640080"/>
+            <a:off x="7360919" y="3364992"/>
+            <a:ext cx="1289303" cy="237744"/>
           </a:xfrm>
           <a:prstGeom prst="rect">
             <a:avLst/>
@@ -6563,39 +7146,114 @@
           <a:p>
             <a:pPr algn="l"/>
             <a:r>
-              <a:rPr sz="1150" b="1" i="0">
+              <a:rPr sz="1100" b="1" i="0">
                 <a:solidFill>
                   <a:srgbClr val="1F1F1F"/>
                 </a:solidFill>
                 <a:latin typeface="Calibri"/>
               </a:rPr>
-              <a:t>One ranked offer, not a broadcast</a:t>
-            </a:r>
-          </a:p>
-          <a:p>
-            <a:pPr algn="l"/>
-            <a:r>
-              <a:rPr sz="1000" b="0" i="0">
+              <a:t>Ask one, not all</a:t>
+            </a:r>
+          </a:p>
+        </p:txBody>
+      </p:sp>
+      <p:sp>
+        <p:nvSpPr>
+          <p:cNvPr id="50" name="TextBox 49"/>
+          <p:cNvSpPr txBox="1"/>
+          <p:nvPr/>
+        </p:nvSpPr>
+        <p:spPr>
+          <a:xfrm>
+            <a:off x="7031735" y="3675887"/>
+            <a:ext cx="1618487" cy="548640"/>
+          </a:xfrm>
+          <a:prstGeom prst="rect">
+            <a:avLst/>
+          </a:prstGeom>
+          <a:noFill/>
+        </p:spPr>
+        <p:txBody>
+          <a:bodyPr wrap="square" lIns="0" rIns="0" tIns="0" bIns="0" anchor="t">
+            <a:spAutoFit/>
+          </a:bodyPr>
+          <a:lstStyle/>
+          <a:p>
+            <a:pPr algn="l">
+              <a:lnSpc>
+                <a:spcPct val="100000"/>
+              </a:lnSpc>
+            </a:pPr>
+            <a:r>
+              <a:rPr sz="950" b="0" i="0">
                 <a:solidFill>
                   <a:srgbClr val="4A4A4A"/>
                 </a:solidFill>
                 <a:latin typeface="Calibri"/>
               </a:rPr>
-              <a:t>Score every verified shelter; ask the best fit first, then cascade.</a:t>
-            </a:r>
-          </a:p>
-        </p:txBody>
-      </p:sp>
-      <p:sp>
-        <p:nvSpPr>
-          <p:cNvPr id="47" name="Oval 46"/>
+              <a:t>Rank every verified shelter and ask the best fit first.</a:t>
+            </a:r>
+          </a:p>
+        </p:txBody>
+      </p:sp>
+      <p:sp>
+        <p:nvSpPr>
+          <p:cNvPr id="51" name="Rounded Rectangle 50"/>
           <p:cNvSpPr/>
           <p:nvPr/>
         </p:nvSpPr>
         <p:spPr>
           <a:xfrm>
-            <a:off x="4983480" y="4398264"/>
-            <a:ext cx="292608" cy="292608"/>
+            <a:off x="4892040" y="4407408"/>
+            <a:ext cx="1874519" cy="1078992"/>
+          </a:xfrm>
+          <a:prstGeom prst="roundRect">
+            <a:avLst>
+              <a:gd name="adj" fmla="val 8000"/>
+            </a:avLst>
+          </a:prstGeom>
+          <a:solidFill>
+            <a:srgbClr val="F7F4F4"/>
+          </a:solidFill>
+          <a:ln w="12700">
+            <a:solidFill>
+              <a:srgbClr val="DBD6D6"/>
+            </a:solidFill>
+          </a:ln>
+          <a:effectLst/>
+        </p:spPr>
+        <p:style>
+          <a:lnRef idx="1">
+            <a:schemeClr val="accent1"/>
+          </a:lnRef>
+          <a:fillRef idx="3">
+            <a:schemeClr val="accent1"/>
+          </a:fillRef>
+          <a:effectRef idx="2">
+            <a:schemeClr val="accent1"/>
+          </a:effectRef>
+          <a:fontRef idx="minor">
+            <a:schemeClr val="lt1"/>
+          </a:fontRef>
+        </p:style>
+        <p:txBody>
+          <a:bodyPr rtlCol="0" anchor="ctr"/>
+          <a:lstStyle/>
+          <a:p>
+            <a:pPr algn="ctr"/>
+          </a:p>
+        </p:txBody>
+      </p:sp>
+      <p:sp>
+        <p:nvSpPr>
+          <p:cNvPr id="52" name="Oval 51"/>
+          <p:cNvSpPr/>
+          <p:nvPr/>
+        </p:nvSpPr>
+        <p:spPr>
+          <a:xfrm>
+            <a:off x="5020055" y="4526280"/>
+            <a:ext cx="256032" cy="256032"/>
           </a:xfrm>
           <a:prstGeom prst="ellipse">
             <a:avLst/>
@@ -6632,14 +7290,14 @@
       </p:sp>
       <p:sp>
         <p:nvSpPr>
-          <p:cNvPr id="48" name="TextBox 47"/>
+          <p:cNvPr id="53" name="TextBox 52"/>
           <p:cNvSpPr txBox="1"/>
           <p:nvPr/>
         </p:nvSpPr>
         <p:spPr>
           <a:xfrm>
-            <a:off x="4983480" y="4398264"/>
-            <a:ext cx="292608" cy="292608"/>
+            <a:off x="5020055" y="4526280"/>
+            <a:ext cx="256032" cy="256032"/>
           </a:xfrm>
           <a:prstGeom prst="rect">
             <a:avLst/>
@@ -6654,7 +7312,7 @@
           <a:p>
             <a:pPr algn="ctr"/>
             <a:r>
-              <a:rPr sz="1200" b="1" i="0">
+              <a:rPr sz="1100" b="1" i="0">
                 <a:solidFill>
                   <a:srgbClr val="FFFFFF"/>
                 </a:solidFill>
@@ -6667,14 +7325,14 @@
       </p:sp>
       <p:sp>
         <p:nvSpPr>
-          <p:cNvPr id="49" name="TextBox 48"/>
+          <p:cNvPr id="54" name="TextBox 53"/>
           <p:cNvSpPr txBox="1"/>
           <p:nvPr/>
         </p:nvSpPr>
         <p:spPr>
           <a:xfrm>
-            <a:off x="5404104" y="4361688"/>
-            <a:ext cx="3383280" cy="640080"/>
+            <a:off x="5349240" y="4553712"/>
+            <a:ext cx="1289303" cy="237744"/>
           </a:xfrm>
           <a:prstGeom prst="rect">
             <a:avLst/>
@@ -6689,39 +7347,114 @@
           <a:p>
             <a:pPr algn="l"/>
             <a:r>
-              <a:rPr sz="1150" b="1" i="0">
+              <a:rPr sz="1100" b="1" i="0">
                 <a:solidFill>
                   <a:srgbClr val="1F1F1F"/>
                 </a:solidFill>
                 <a:latin typeface="Calibri"/>
               </a:rPr>
-              <a:t>Recipients collect it themselves</a:t>
-            </a:r>
-          </a:p>
-          <a:p>
-            <a:pPr algn="l"/>
-            <a:r>
-              <a:rPr sz="1000" b="0" i="0">
+              <a:t>They collect it</a:t>
+            </a:r>
+          </a:p>
+        </p:txBody>
+      </p:sp>
+      <p:sp>
+        <p:nvSpPr>
+          <p:cNvPr id="55" name="TextBox 54"/>
+          <p:cNvSpPr txBox="1"/>
+          <p:nvPr/>
+        </p:nvSpPr>
+        <p:spPr>
+          <a:xfrm>
+            <a:off x="5020055" y="4864608"/>
+            <a:ext cx="1618487" cy="548640"/>
+          </a:xfrm>
+          <a:prstGeom prst="rect">
+            <a:avLst/>
+          </a:prstGeom>
+          <a:noFill/>
+        </p:spPr>
+        <p:txBody>
+          <a:bodyPr wrap="square" lIns="0" rIns="0" tIns="0" bIns="0" anchor="t">
+            <a:spAutoFit/>
+          </a:bodyPr>
+          <a:lstStyle/>
+          <a:p>
+            <a:pPr algn="l">
+              <a:lnSpc>
+                <a:spcPct val="100000"/>
+              </a:lnSpc>
+            </a:pPr>
+            <a:r>
+              <a:rPr sz="950" b="0" i="0">
                 <a:solidFill>
                   <a:srgbClr val="4A4A4A"/>
                 </a:solidFill>
                 <a:latin typeface="Calibri"/>
               </a:rPr>
-              <a:t>No riders. A 4-digit handover code confirms the right people came.</a:t>
-            </a:r>
-          </a:p>
-        </p:txBody>
-      </p:sp>
-      <p:sp>
-        <p:nvSpPr>
-          <p:cNvPr id="50" name="Oval 49"/>
+              <a:t>No riders. A 4-digit handover code proves the right people came.</a:t>
+            </a:r>
+          </a:p>
+        </p:txBody>
+      </p:sp>
+      <p:sp>
+        <p:nvSpPr>
+          <p:cNvPr id="56" name="Rounded Rectangle 55"/>
           <p:cNvSpPr/>
           <p:nvPr/>
         </p:nvSpPr>
         <p:spPr>
           <a:xfrm>
-            <a:off x="4983480" y="5065776"/>
-            <a:ext cx="292608" cy="292608"/>
+            <a:off x="6903719" y="4407408"/>
+            <a:ext cx="1874519" cy="1078992"/>
+          </a:xfrm>
+          <a:prstGeom prst="roundRect">
+            <a:avLst>
+              <a:gd name="adj" fmla="val 8000"/>
+            </a:avLst>
+          </a:prstGeom>
+          <a:solidFill>
+            <a:srgbClr val="F7F4F4"/>
+          </a:solidFill>
+          <a:ln w="12700">
+            <a:solidFill>
+              <a:srgbClr val="DBD6D6"/>
+            </a:solidFill>
+          </a:ln>
+          <a:effectLst/>
+        </p:spPr>
+        <p:style>
+          <a:lnRef idx="1">
+            <a:schemeClr val="accent1"/>
+          </a:lnRef>
+          <a:fillRef idx="3">
+            <a:schemeClr val="accent1"/>
+          </a:fillRef>
+          <a:effectRef idx="2">
+            <a:schemeClr val="accent1"/>
+          </a:effectRef>
+          <a:fontRef idx="minor">
+            <a:schemeClr val="lt1"/>
+          </a:fontRef>
+        </p:style>
+        <p:txBody>
+          <a:bodyPr rtlCol="0" anchor="ctr"/>
+          <a:lstStyle/>
+          <a:p>
+            <a:pPr algn="ctr"/>
+          </a:p>
+        </p:txBody>
+      </p:sp>
+      <p:sp>
+        <p:nvSpPr>
+          <p:cNvPr id="57" name="Oval 56"/>
+          <p:cNvSpPr/>
+          <p:nvPr/>
+        </p:nvSpPr>
+        <p:spPr>
+          <a:xfrm>
+            <a:off x="7031735" y="4526280"/>
+            <a:ext cx="256032" cy="256032"/>
           </a:xfrm>
           <a:prstGeom prst="ellipse">
             <a:avLst/>
@@ -6758,14 +7491,14 @@
       </p:sp>
       <p:sp>
         <p:nvSpPr>
-          <p:cNvPr id="51" name="TextBox 50"/>
+          <p:cNvPr id="58" name="TextBox 57"/>
           <p:cNvSpPr txBox="1"/>
           <p:nvPr/>
         </p:nvSpPr>
         <p:spPr>
           <a:xfrm>
-            <a:off x="4983480" y="5065776"/>
-            <a:ext cx="292608" cy="292608"/>
+            <a:off x="7031735" y="4526280"/>
+            <a:ext cx="256032" cy="256032"/>
           </a:xfrm>
           <a:prstGeom prst="rect">
             <a:avLst/>
@@ -6780,7 +7513,7 @@
           <a:p>
             <a:pPr algn="ctr"/>
             <a:r>
-              <a:rPr sz="1200" b="1" i="0">
+              <a:rPr sz="1100" b="1" i="0">
                 <a:solidFill>
                   <a:srgbClr val="FFFFFF"/>
                 </a:solidFill>
@@ -6793,14 +7526,14 @@
       </p:sp>
       <p:sp>
         <p:nvSpPr>
-          <p:cNvPr id="52" name="TextBox 51"/>
+          <p:cNvPr id="59" name="TextBox 58"/>
           <p:cNvSpPr txBox="1"/>
           <p:nvPr/>
         </p:nvSpPr>
         <p:spPr>
           <a:xfrm>
-            <a:off x="5404104" y="5029200"/>
-            <a:ext cx="3383280" cy="640080"/>
+            <a:off x="7360919" y="4553712"/>
+            <a:ext cx="1289303" cy="237744"/>
           </a:xfrm>
           <a:prstGeom prst="rect">
             <a:avLst/>
@@ -6815,19 +7548,46 @@
           <a:p>
             <a:pPr algn="l"/>
             <a:r>
-              <a:rPr sz="1150" b="1" i="0">
+              <a:rPr sz="1100" b="1" i="0">
                 <a:solidFill>
                   <a:srgbClr val="1F1F1F"/>
                 </a:solidFill>
                 <a:latin typeface="Calibri"/>
               </a:rPr>
-              <a:t>Make every decision explainable</a:t>
-            </a:r>
-          </a:p>
-          <a:p>
-            <a:pPr algn="l"/>
-            <a:r>
-              <a:rPr sz="1000" b="0" i="0">
+              <a:t>Explain everything</a:t>
+            </a:r>
+          </a:p>
+        </p:txBody>
+      </p:sp>
+      <p:sp>
+        <p:nvSpPr>
+          <p:cNvPr id="60" name="TextBox 59"/>
+          <p:cNvSpPr txBox="1"/>
+          <p:nvPr/>
+        </p:nvSpPr>
+        <p:spPr>
+          <a:xfrm>
+            <a:off x="7031735" y="4864608"/>
+            <a:ext cx="1618487" cy="548640"/>
+          </a:xfrm>
+          <a:prstGeom prst="rect">
+            <a:avLst/>
+          </a:prstGeom>
+          <a:noFill/>
+        </p:spPr>
+        <p:txBody>
+          <a:bodyPr wrap="square" lIns="0" rIns="0" tIns="0" bIns="0" anchor="t">
+            <a:spAutoFit/>
+          </a:bodyPr>
+          <a:lstStyle/>
+          <a:p>
+            <a:pPr algn="l">
+              <a:lnSpc>
+                <a:spcPct val="100000"/>
+              </a:lnSpc>
+            </a:pPr>
+            <a:r>
+              <a:rPr sz="950" b="0" i="0">
                 <a:solidFill>
                   <a:srgbClr val="4A4A4A"/>
                 </a:solidFill>
@@ -6946,8 +7706,8 @@
         </p:nvSpPr>
         <p:spPr>
           <a:xfrm>
-            <a:off x="2377440" y="109728"/>
-            <a:ext cx="6217920" cy="566928"/>
+            <a:off x="2331720" y="109728"/>
+            <a:ext cx="6309360" cy="566928"/>
           </a:xfrm>
           <a:prstGeom prst="rect">
             <a:avLst/>
@@ -7138,8 +7898,8 @@
         </p:blipFill>
         <p:spPr>
           <a:xfrm>
-            <a:off x="274320" y="868680"/>
-            <a:ext cx="6790444" cy="4892040"/>
+            <a:off x="292608" y="868680"/>
+            <a:ext cx="6726981" cy="4846320"/>
           </a:xfrm>
           <a:prstGeom prst="rect">
             <a:avLst/>
@@ -7148,14 +7908,60 @@
       </p:pic>
       <p:sp>
         <p:nvSpPr>
-          <p:cNvPr id="21" name="TextBox 20"/>
+          <p:cNvPr id="21" name="Oval 20"/>
+          <p:cNvSpPr/>
+          <p:nvPr/>
+        </p:nvSpPr>
+        <p:spPr>
+          <a:xfrm>
+            <a:off x="7077456" y="923544"/>
+            <a:ext cx="155448" cy="155448"/>
+          </a:xfrm>
+          <a:prstGeom prst="ellipse">
+            <a:avLst/>
+          </a:prstGeom>
+          <a:solidFill>
+            <a:srgbClr val="E8D9A8"/>
+          </a:solidFill>
+          <a:ln w="9525">
+            <a:solidFill>
+              <a:srgbClr val="A6A6A6"/>
+            </a:solidFill>
+          </a:ln>
+          <a:effectLst/>
+        </p:spPr>
+        <p:style>
+          <a:lnRef idx="1">
+            <a:schemeClr val="accent1"/>
+          </a:lnRef>
+          <a:fillRef idx="3">
+            <a:schemeClr val="accent1"/>
+          </a:fillRef>
+          <a:effectRef idx="2">
+            <a:schemeClr val="accent1"/>
+          </a:effectRef>
+          <a:fontRef idx="minor">
+            <a:schemeClr val="lt1"/>
+          </a:fontRef>
+        </p:style>
+        <p:txBody>
+          <a:bodyPr rtlCol="0" anchor="ctr"/>
+          <a:lstStyle/>
+          <a:p>
+            <a:pPr algn="ctr"/>
+          </a:p>
+        </p:txBody>
+      </p:sp>
+      <p:sp>
+        <p:nvSpPr>
+          <p:cNvPr id="22" name="TextBox 21"/>
           <p:cNvSpPr txBox="1"/>
           <p:nvPr/>
         </p:nvSpPr>
         <p:spPr>
           <a:xfrm>
-            <a:off x="7059168" y="960120"/>
-            <a:ext cx="1783080" cy="1143000"/>
+            <a:off x="7315200" y="896112"/>
+            <a:ext cx="1463040" cy="237744"/>
           </a:xfrm>
           <a:prstGeom prst="rect">
             <a:avLst/>
@@ -7170,17 +7976,44 @@
           <a:p>
             <a:pPr algn="l"/>
             <a:r>
-              <a:rPr sz="1100" b="1" i="0">
+              <a:rPr sz="1150" b="1" i="0">
                 <a:solidFill>
                   <a:srgbClr val="C00000"/>
                 </a:solidFill>
                 <a:latin typeface="Calibri"/>
               </a:rPr>
-              <a:t>Donor (kitchen)</a:t>
-            </a:r>
-          </a:p>
-          <a:p>
-            <a:pPr algn="l"/>
+              <a:t>Donor</a:t>
+            </a:r>
+          </a:p>
+        </p:txBody>
+      </p:sp>
+      <p:sp>
+        <p:nvSpPr>
+          <p:cNvPr id="23" name="TextBox 22"/>
+          <p:cNvSpPr txBox="1"/>
+          <p:nvPr/>
+        </p:nvSpPr>
+        <p:spPr>
+          <a:xfrm>
+            <a:off x="7077456" y="1170432"/>
+            <a:ext cx="1700784" cy="914400"/>
+          </a:xfrm>
+          <a:prstGeom prst="rect">
+            <a:avLst/>
+          </a:prstGeom>
+          <a:noFill/>
+        </p:spPr>
+        <p:txBody>
+          <a:bodyPr wrap="square" lIns="0" rIns="0" tIns="0" bIns="0" anchor="t">
+            <a:spAutoFit/>
+          </a:bodyPr>
+          <a:lstStyle/>
+          <a:p>
+            <a:pPr algn="l">
+              <a:lnSpc>
+                <a:spcPct val="100000"/>
+              </a:lnSpc>
+            </a:pPr>
             <a:r>
               <a:rPr sz="900" b="0" i="0">
                 <a:solidFill>
@@ -7195,14 +8028,60 @@
       </p:sp>
       <p:sp>
         <p:nvSpPr>
-          <p:cNvPr id="22" name="TextBox 21"/>
+          <p:cNvPr id="24" name="Oval 23"/>
+          <p:cNvSpPr/>
+          <p:nvPr/>
+        </p:nvSpPr>
+        <p:spPr>
+          <a:xfrm>
+            <a:off x="7077456" y="2139696"/>
+            <a:ext cx="155448" cy="155448"/>
+          </a:xfrm>
+          <a:prstGeom prst="ellipse">
+            <a:avLst/>
+          </a:prstGeom>
+          <a:solidFill>
+            <a:srgbClr val="BFDFCB"/>
+          </a:solidFill>
+          <a:ln w="9525">
+            <a:solidFill>
+              <a:srgbClr val="A6A6A6"/>
+            </a:solidFill>
+          </a:ln>
+          <a:effectLst/>
+        </p:spPr>
+        <p:style>
+          <a:lnRef idx="1">
+            <a:schemeClr val="accent1"/>
+          </a:lnRef>
+          <a:fillRef idx="3">
+            <a:schemeClr val="accent1"/>
+          </a:fillRef>
+          <a:effectRef idx="2">
+            <a:schemeClr val="accent1"/>
+          </a:effectRef>
+          <a:fontRef idx="minor">
+            <a:schemeClr val="lt1"/>
+          </a:fontRef>
+        </p:style>
+        <p:txBody>
+          <a:bodyPr rtlCol="0" anchor="ctr"/>
+          <a:lstStyle/>
+          <a:p>
+            <a:pPr algn="ctr"/>
+          </a:p>
+        </p:txBody>
+      </p:sp>
+      <p:sp>
+        <p:nvSpPr>
+          <p:cNvPr id="25" name="TextBox 24"/>
           <p:cNvSpPr txBox="1"/>
           <p:nvPr/>
         </p:nvSpPr>
         <p:spPr>
           <a:xfrm>
-            <a:off x="7059168" y="2176272"/>
-            <a:ext cx="1783080" cy="1143000"/>
+            <a:off x="7315200" y="2112264"/>
+            <a:ext cx="1463040" cy="237744"/>
           </a:xfrm>
           <a:prstGeom prst="rect">
             <a:avLst/>
@@ -7217,17 +8096,44 @@
           <a:p>
             <a:pPr algn="l"/>
             <a:r>
-              <a:rPr sz="1100" b="1" i="0">
+              <a:rPr sz="1150" b="1" i="0">
                 <a:solidFill>
                   <a:srgbClr val="C00000"/>
                 </a:solidFill>
                 <a:latin typeface="Calibri"/>
               </a:rPr>
-              <a:t>Recipient (NGO / shelter)</a:t>
-            </a:r>
-          </a:p>
-          <a:p>
-            <a:pPr algn="l"/>
+              <a:t>Recipient</a:t>
+            </a:r>
+          </a:p>
+        </p:txBody>
+      </p:sp>
+      <p:sp>
+        <p:nvSpPr>
+          <p:cNvPr id="26" name="TextBox 25"/>
+          <p:cNvSpPr txBox="1"/>
+          <p:nvPr/>
+        </p:nvSpPr>
+        <p:spPr>
+          <a:xfrm>
+            <a:off x="7077456" y="2386584"/>
+            <a:ext cx="1700784" cy="914400"/>
+          </a:xfrm>
+          <a:prstGeom prst="rect">
+            <a:avLst/>
+          </a:prstGeom>
+          <a:noFill/>
+        </p:spPr>
+        <p:txBody>
+          <a:bodyPr wrap="square" lIns="0" rIns="0" tIns="0" bIns="0" anchor="t">
+            <a:spAutoFit/>
+          </a:bodyPr>
+          <a:lstStyle/>
+          <a:p>
+            <a:pPr algn="l">
+              <a:lnSpc>
+                <a:spcPct val="100000"/>
+              </a:lnSpc>
+            </a:pPr>
             <a:r>
               <a:rPr sz="900" b="0" i="0">
                 <a:solidFill>
@@ -7242,14 +8148,60 @@
       </p:sp>
       <p:sp>
         <p:nvSpPr>
-          <p:cNvPr id="23" name="TextBox 22"/>
+          <p:cNvPr id="27" name="Oval 26"/>
+          <p:cNvSpPr/>
+          <p:nvPr/>
+        </p:nvSpPr>
+        <p:spPr>
+          <a:xfrm>
+            <a:off x="7077456" y="3355848"/>
+            <a:ext cx="155448" cy="155448"/>
+          </a:xfrm>
+          <a:prstGeom prst="ellipse">
+            <a:avLst/>
+          </a:prstGeom>
+          <a:solidFill>
+            <a:srgbClr val="CFD6E0"/>
+          </a:solidFill>
+          <a:ln w="9525">
+            <a:solidFill>
+              <a:srgbClr val="A6A6A6"/>
+            </a:solidFill>
+          </a:ln>
+          <a:effectLst/>
+        </p:spPr>
+        <p:style>
+          <a:lnRef idx="1">
+            <a:schemeClr val="accent1"/>
+          </a:lnRef>
+          <a:fillRef idx="3">
+            <a:schemeClr val="accent1"/>
+          </a:fillRef>
+          <a:effectRef idx="2">
+            <a:schemeClr val="accent1"/>
+          </a:effectRef>
+          <a:fontRef idx="minor">
+            <a:schemeClr val="lt1"/>
+          </a:fontRef>
+        </p:style>
+        <p:txBody>
+          <a:bodyPr rtlCol="0" anchor="ctr"/>
+          <a:lstStyle/>
+          <a:p>
+            <a:pPr algn="ctr"/>
+          </a:p>
+        </p:txBody>
+      </p:sp>
+      <p:sp>
+        <p:nvSpPr>
+          <p:cNvPr id="28" name="TextBox 27"/>
           <p:cNvSpPr txBox="1"/>
           <p:nvPr/>
         </p:nvSpPr>
         <p:spPr>
           <a:xfrm>
-            <a:off x="7059168" y="3392424"/>
-            <a:ext cx="1783080" cy="1143000"/>
+            <a:off x="7315200" y="3328416"/>
+            <a:ext cx="1463040" cy="237744"/>
           </a:xfrm>
           <a:prstGeom prst="rect">
             <a:avLst/>
@@ -7264,7 +8216,7 @@
           <a:p>
             <a:pPr algn="l"/>
             <a:r>
-              <a:rPr sz="1100" b="1" i="0">
+              <a:rPr sz="1150" b="1" i="0">
                 <a:solidFill>
                   <a:srgbClr val="C00000"/>
                 </a:solidFill>
@@ -7273,8 +8225,35 @@
               <a:t>Admin</a:t>
             </a:r>
           </a:p>
-          <a:p>
-            <a:pPr algn="l"/>
+        </p:txBody>
+      </p:sp>
+      <p:sp>
+        <p:nvSpPr>
+          <p:cNvPr id="29" name="TextBox 28"/>
+          <p:cNvSpPr txBox="1"/>
+          <p:nvPr/>
+        </p:nvSpPr>
+        <p:spPr>
+          <a:xfrm>
+            <a:off x="7077456" y="3602736"/>
+            <a:ext cx="1700784" cy="914400"/>
+          </a:xfrm>
+          <a:prstGeom prst="rect">
+            <a:avLst/>
+          </a:prstGeom>
+          <a:noFill/>
+        </p:spPr>
+        <p:txBody>
+          <a:bodyPr wrap="square" lIns="0" rIns="0" tIns="0" bIns="0" anchor="t">
+            <a:spAutoFit/>
+          </a:bodyPr>
+          <a:lstStyle/>
+          <a:p>
+            <a:pPr algn="l">
+              <a:lnSpc>
+                <a:spcPct val="100000"/>
+              </a:lnSpc>
+            </a:pPr>
             <a:r>
               <a:rPr sz="900" b="0" i="0">
                 <a:solidFill>
@@ -7289,14 +8268,60 @@
       </p:sp>
       <p:sp>
         <p:nvSpPr>
-          <p:cNvPr id="24" name="TextBox 23"/>
+          <p:cNvPr id="30" name="Oval 29"/>
+          <p:cNvSpPr/>
+          <p:nvPr/>
+        </p:nvSpPr>
+        <p:spPr>
+          <a:xfrm>
+            <a:off x="7077456" y="4572000"/>
+            <a:ext cx="155448" cy="155448"/>
+          </a:xfrm>
+          <a:prstGeom prst="ellipse">
+            <a:avLst/>
+          </a:prstGeom>
+          <a:solidFill>
+            <a:srgbClr val="FFFFFF"/>
+          </a:solidFill>
+          <a:ln w="9525">
+            <a:solidFill>
+              <a:srgbClr val="A6A6A6"/>
+            </a:solidFill>
+          </a:ln>
+          <a:effectLst/>
+        </p:spPr>
+        <p:style>
+          <a:lnRef idx="1">
+            <a:schemeClr val="accent1"/>
+          </a:lnRef>
+          <a:fillRef idx="3">
+            <a:schemeClr val="accent1"/>
+          </a:fillRef>
+          <a:effectRef idx="2">
+            <a:schemeClr val="accent1"/>
+          </a:effectRef>
+          <a:fontRef idx="minor">
+            <a:schemeClr val="lt1"/>
+          </a:fontRef>
+        </p:style>
+        <p:txBody>
+          <a:bodyPr rtlCol="0" anchor="ctr"/>
+          <a:lstStyle/>
+          <a:p>
+            <a:pPr algn="ctr"/>
+          </a:p>
+        </p:txBody>
+      </p:sp>
+      <p:sp>
+        <p:nvSpPr>
+          <p:cNvPr id="31" name="TextBox 30"/>
           <p:cNvSpPr txBox="1"/>
           <p:nvPr/>
         </p:nvSpPr>
         <p:spPr>
           <a:xfrm>
-            <a:off x="7059168" y="4608576"/>
-            <a:ext cx="1783080" cy="1143000"/>
+            <a:off x="7315200" y="4544568"/>
+            <a:ext cx="1463040" cy="237744"/>
           </a:xfrm>
           <a:prstGeom prst="rect">
             <a:avLst/>
@@ -7311,7 +8336,7 @@
           <a:p>
             <a:pPr algn="l"/>
             <a:r>
-              <a:rPr sz="1100" b="1" i="0">
+              <a:rPr sz="1150" b="1" i="0">
                 <a:solidFill>
                   <a:srgbClr val="C00000"/>
                 </a:solidFill>
@@ -7320,8 +8345,35 @@
               <a:t>System</a:t>
             </a:r>
           </a:p>
-          <a:p>
-            <a:pPr algn="l"/>
+        </p:txBody>
+      </p:sp>
+      <p:sp>
+        <p:nvSpPr>
+          <p:cNvPr id="32" name="TextBox 31"/>
+          <p:cNvSpPr txBox="1"/>
+          <p:nvPr/>
+        </p:nvSpPr>
+        <p:spPr>
+          <a:xfrm>
+            <a:off x="7077456" y="4818888"/>
+            <a:ext cx="1700784" cy="914400"/>
+          </a:xfrm>
+          <a:prstGeom prst="rect">
+            <a:avLst/>
+          </a:prstGeom>
+          <a:noFill/>
+        </p:spPr>
+        <p:txBody>
+          <a:bodyPr wrap="square" lIns="0" rIns="0" tIns="0" bIns="0" anchor="t">
+            <a:spAutoFit/>
+          </a:bodyPr>
+          <a:lstStyle/>
+          <a:p>
+            <a:pPr algn="l">
+              <a:lnSpc>
+                <a:spcPct val="100000"/>
+              </a:lnSpc>
+            </a:pPr>
             <a:r>
               <a:rPr sz="900" b="0" i="0">
                 <a:solidFill>
@@ -7442,8 +8494,8 @@
         </p:nvSpPr>
         <p:spPr>
           <a:xfrm>
-            <a:off x="2377440" y="109728"/>
-            <a:ext cx="6217920" cy="566928"/>
+            <a:off x="2331720" y="109728"/>
+            <a:ext cx="6309360" cy="566928"/>
           </a:xfrm>
           <a:prstGeom prst="rect">
             <a:avLst/>
@@ -7626,8 +8678,8 @@
         </p:nvSpPr>
         <p:spPr>
           <a:xfrm>
-            <a:off x="457200" y="841248"/>
-            <a:ext cx="4023360" cy="274320"/>
+            <a:off x="457200" y="822960"/>
+            <a:ext cx="3977639" cy="292608"/>
           </a:xfrm>
           <a:prstGeom prst="rect">
             <a:avLst/>
@@ -7661,8 +8713,8 @@
         </p:nvSpPr>
         <p:spPr>
           <a:xfrm>
-            <a:off x="457200" y="1188720"/>
-            <a:ext cx="4023360" cy="960120"/>
+            <a:off x="457200" y="1170432"/>
+            <a:ext cx="3977639" cy="1024128"/>
           </a:xfrm>
           <a:prstGeom prst="roundRect">
             <a:avLst>
@@ -7670,11 +8722,11 @@
             </a:avLst>
           </a:prstGeom>
           <a:solidFill>
-            <a:srgbClr val="ECF4EE"/>
+            <a:srgbClr val="ECF5EE"/>
           </a:solidFill>
           <a:ln w="12700">
             <a:solidFill>
-              <a:srgbClr val="C8E3CA"/>
+              <a:srgbClr val="C6E2CB"/>
             </a:solidFill>
           </a:ln>
           <a:effectLst/>
@@ -7703,1250 +8755,17 @@
       </p:sp>
       <p:sp>
         <p:nvSpPr>
-          <p:cNvPr id="22" name="TextBox 21"/>
-          <p:cNvSpPr txBox="1"/>
-          <p:nvPr/>
-        </p:nvSpPr>
-        <p:spPr>
-          <a:xfrm>
-            <a:off x="621792" y="1289304"/>
-            <a:ext cx="3749039" cy="228600"/>
-          </a:xfrm>
-          <a:prstGeom prst="rect">
-            <a:avLst/>
-          </a:prstGeom>
-          <a:noFill/>
-        </p:spPr>
-        <p:txBody>
-          <a:bodyPr wrap="square" lIns="0" rIns="0" tIns="0" bIns="0" anchor="t">
-            <a:spAutoFit/>
-          </a:bodyPr>
-          <a:lstStyle/>
-          <a:p>
-            <a:pPr algn="l"/>
-            <a:r>
-              <a:rPr sz="1150" b="1" i="0">
-                <a:solidFill>
-                  <a:srgbClr val="B7202E"/>
-                </a:solidFill>
-                <a:latin typeface="Calibri"/>
-              </a:rPr>
-              <a:t>Browser · presentation</a:t>
-            </a:r>
-          </a:p>
-        </p:txBody>
-      </p:sp>
-      <p:sp>
-        <p:nvSpPr>
-          <p:cNvPr id="23" name="TextBox 22"/>
-          <p:cNvSpPr txBox="1"/>
-          <p:nvPr/>
-        </p:nvSpPr>
-        <p:spPr>
-          <a:xfrm>
-            <a:off x="621792" y="1554480"/>
-            <a:ext cx="3749039" cy="548640"/>
-          </a:xfrm>
-          <a:prstGeom prst="rect">
-            <a:avLst/>
-          </a:prstGeom>
-          <a:noFill/>
-        </p:spPr>
-        <p:txBody>
-          <a:bodyPr wrap="square" lIns="0" rIns="0" tIns="0" bIns="0" anchor="t">
-            <a:spAutoFit/>
-          </a:bodyPr>
-          <a:lstStyle/>
-          <a:p>
-            <a:pPr algn="l"/>
-            <a:r>
-              <a:rPr sz="1000" b="0" i="0">
-                <a:solidFill>
-                  <a:srgbClr val="4A4A4A"/>
-                </a:solidFill>
-                <a:latin typeface="Calibri"/>
-              </a:rPr>
-              <a:t>10 pages of plain HTML, CSS and JavaScript
-api.js holds the token and calls fetch()
-Leaflet + OpenStreetMap for the map</a:t>
-            </a:r>
-          </a:p>
-        </p:txBody>
-      </p:sp>
-      <p:sp>
-        <p:nvSpPr>
-          <p:cNvPr id="24" name="TextBox 23"/>
-          <p:cNvSpPr txBox="1"/>
-          <p:nvPr/>
-        </p:nvSpPr>
-        <p:spPr>
-          <a:xfrm>
-            <a:off x="457200" y="2130552"/>
-            <a:ext cx="4023360" cy="228600"/>
-          </a:xfrm>
-          <a:prstGeom prst="rect">
-            <a:avLst/>
-          </a:prstGeom>
-          <a:noFill/>
-        </p:spPr>
-        <p:txBody>
-          <a:bodyPr wrap="square" lIns="0" rIns="0" tIns="0" bIns="0" anchor="t">
-            <a:spAutoFit/>
-          </a:bodyPr>
-          <a:lstStyle/>
-          <a:p>
-            <a:pPr algn="ctr"/>
-            <a:r>
-              <a:rPr sz="900" b="1" i="0">
-                <a:solidFill>
-                  <a:srgbClr val="7A7A7A"/>
-                </a:solidFill>
-                <a:latin typeface="Calibri"/>
-              </a:rPr>
-              <a:t>▼  HTTP / JSON  ▼</a:t>
-            </a:r>
-          </a:p>
-        </p:txBody>
-      </p:sp>
-      <p:sp>
-        <p:nvSpPr>
-          <p:cNvPr id="25" name="Rounded Rectangle 24"/>
+          <p:cNvPr id="22" name="Oval 21"/>
           <p:cNvSpPr/>
           <p:nvPr/>
         </p:nvSpPr>
         <p:spPr>
           <a:xfrm>
-            <a:off x="457200" y="2377440"/>
-            <a:ext cx="4023360" cy="960120"/>
-          </a:xfrm>
-          <a:prstGeom prst="roundRect">
-            <a:avLst>
-              <a:gd name="adj" fmla="val 8000"/>
-            </a:avLst>
-          </a:prstGeom>
-          <a:solidFill>
-            <a:srgbClr val="F6F3F3"/>
-          </a:solidFill>
-          <a:ln w="12700">
-            <a:solidFill>
-              <a:srgbClr val="D9D9D9"/>
-            </a:solidFill>
-          </a:ln>
-          <a:effectLst/>
-        </p:spPr>
-        <p:style>
-          <a:lnRef idx="1">
-            <a:schemeClr val="accent1"/>
-          </a:lnRef>
-          <a:fillRef idx="3">
-            <a:schemeClr val="accent1"/>
-          </a:fillRef>
-          <a:effectRef idx="2">
-            <a:schemeClr val="accent1"/>
-          </a:effectRef>
-          <a:fontRef idx="minor">
-            <a:schemeClr val="lt1"/>
-          </a:fontRef>
-        </p:style>
-        <p:txBody>
-          <a:bodyPr rtlCol="0" anchor="ctr"/>
-          <a:lstStyle/>
-          <a:p>
-            <a:pPr algn="ctr"/>
-          </a:p>
-        </p:txBody>
-      </p:sp>
-      <p:sp>
-        <p:nvSpPr>
-          <p:cNvPr id="26" name="TextBox 25"/>
-          <p:cNvSpPr txBox="1"/>
-          <p:nvPr/>
-        </p:nvSpPr>
-        <p:spPr>
-          <a:xfrm>
-            <a:off x="621792" y="2478024"/>
-            <a:ext cx="3749039" cy="228600"/>
-          </a:xfrm>
-          <a:prstGeom prst="rect">
-            <a:avLst/>
-          </a:prstGeom>
-          <a:noFill/>
-        </p:spPr>
-        <p:txBody>
-          <a:bodyPr wrap="square" lIns="0" rIns="0" tIns="0" bIns="0" anchor="t">
-            <a:spAutoFit/>
-          </a:bodyPr>
-          <a:lstStyle/>
-          <a:p>
-            <a:pPr algn="l"/>
-            <a:r>
-              <a:rPr sz="1150" b="1" i="0">
-                <a:solidFill>
-                  <a:srgbClr val="B7202E"/>
-                </a:solidFill>
-                <a:latin typeface="Calibri"/>
-              </a:rPr>
-              <a:t>Node.js + Express · logic</a:t>
-            </a:r>
-          </a:p>
-        </p:txBody>
-      </p:sp>
-      <p:sp>
-        <p:nvSpPr>
-          <p:cNvPr id="27" name="TextBox 26"/>
-          <p:cNvSpPr txBox="1"/>
-          <p:nvPr/>
-        </p:nvSpPr>
-        <p:spPr>
-          <a:xfrm>
-            <a:off x="621792" y="2743200"/>
-            <a:ext cx="3749039" cy="548640"/>
-          </a:xfrm>
-          <a:prstGeom prst="rect">
-            <a:avLst/>
-          </a:prstGeom>
-          <a:noFill/>
-        </p:spPr>
-        <p:txBody>
-          <a:bodyPr wrap="square" lIns="0" rIns="0" tIns="0" bIns="0" anchor="t">
-            <a:spAutoFit/>
-          </a:bodyPr>
-          <a:lstStyle/>
-          <a:p>
-            <a:pPr algn="l"/>
-            <a:r>
-              <a:rPr sz="1000" b="0" i="0">
-                <a:solidFill>
-                  <a:srgbClr val="4A4A4A"/>
-                </a:solidFill>
-                <a:latin typeface="Calibri"/>
-              </a:rPr>
-              <a:t>/auth  /listings  /offers  /organisations
-/admin  /stats
-JWT protect + donor / recipient / admin guard</a:t>
-            </a:r>
-          </a:p>
-        </p:txBody>
-      </p:sp>
-      <p:sp>
-        <p:nvSpPr>
-          <p:cNvPr id="28" name="TextBox 27"/>
-          <p:cNvSpPr txBox="1"/>
-          <p:nvPr/>
-        </p:nvSpPr>
-        <p:spPr>
-          <a:xfrm>
-            <a:off x="457200" y="3319272"/>
-            <a:ext cx="4023360" cy="228600"/>
-          </a:xfrm>
-          <a:prstGeom prst="rect">
-            <a:avLst/>
-          </a:prstGeom>
-          <a:noFill/>
-        </p:spPr>
-        <p:txBody>
-          <a:bodyPr wrap="square" lIns="0" rIns="0" tIns="0" bIns="0" anchor="t">
-            <a:spAutoFit/>
-          </a:bodyPr>
-          <a:lstStyle/>
-          <a:p>
-            <a:pPr algn="ctr"/>
-            <a:r>
-              <a:rPr sz="900" b="1" i="0">
-                <a:solidFill>
-                  <a:srgbClr val="7A7A7A"/>
-                </a:solidFill>
-                <a:latin typeface="Calibri"/>
-              </a:rPr>
-              <a:t>▼  Mongoose  ▼</a:t>
-            </a:r>
-          </a:p>
-        </p:txBody>
-      </p:sp>
-      <p:sp>
-        <p:nvSpPr>
-          <p:cNvPr id="29" name="Rounded Rectangle 28"/>
-          <p:cNvSpPr/>
-          <p:nvPr/>
-        </p:nvSpPr>
-        <p:spPr>
-          <a:xfrm>
-            <a:off x="457200" y="3566160"/>
-            <a:ext cx="4023360" cy="960120"/>
-          </a:xfrm>
-          <a:prstGeom prst="roundRect">
-            <a:avLst>
-              <a:gd name="adj" fmla="val 8000"/>
-            </a:avLst>
-          </a:prstGeom>
-          <a:solidFill>
-            <a:srgbClr val="F6F3F3"/>
-          </a:solidFill>
-          <a:ln w="12700">
-            <a:solidFill>
-              <a:srgbClr val="D9D9D9"/>
-            </a:solidFill>
-          </a:ln>
-          <a:effectLst/>
-        </p:spPr>
-        <p:style>
-          <a:lnRef idx="1">
-            <a:schemeClr val="accent1"/>
-          </a:lnRef>
-          <a:fillRef idx="3">
-            <a:schemeClr val="accent1"/>
-          </a:fillRef>
-          <a:effectRef idx="2">
-            <a:schemeClr val="accent1"/>
-          </a:effectRef>
-          <a:fontRef idx="minor">
-            <a:schemeClr val="lt1"/>
-          </a:fontRef>
-        </p:style>
-        <p:txBody>
-          <a:bodyPr rtlCol="0" anchor="ctr"/>
-          <a:lstStyle/>
-          <a:p>
-            <a:pPr algn="ctr"/>
-          </a:p>
-        </p:txBody>
-      </p:sp>
-      <p:sp>
-        <p:nvSpPr>
-          <p:cNvPr id="30" name="TextBox 29"/>
-          <p:cNvSpPr txBox="1"/>
-          <p:nvPr/>
-        </p:nvSpPr>
-        <p:spPr>
-          <a:xfrm>
-            <a:off x="621792" y="3666744"/>
-            <a:ext cx="3749039" cy="228600"/>
-          </a:xfrm>
-          <a:prstGeom prst="rect">
-            <a:avLst/>
-          </a:prstGeom>
-          <a:noFill/>
-        </p:spPr>
-        <p:txBody>
-          <a:bodyPr wrap="square" lIns="0" rIns="0" tIns="0" bIns="0" anchor="t">
-            <a:spAutoFit/>
-          </a:bodyPr>
-          <a:lstStyle/>
-          <a:p>
-            <a:pPr algn="l"/>
-            <a:r>
-              <a:rPr sz="1150" b="1" i="0">
-                <a:solidFill>
-                  <a:srgbClr val="B7202E"/>
-                </a:solidFill>
-                <a:latin typeface="Calibri"/>
-              </a:rPr>
-              <a:t>MongoDB + Mongoose · data</a:t>
-            </a:r>
-          </a:p>
-        </p:txBody>
-      </p:sp>
-      <p:sp>
-        <p:nvSpPr>
-          <p:cNvPr id="31" name="TextBox 30"/>
-          <p:cNvSpPr txBox="1"/>
-          <p:nvPr/>
-        </p:nvSpPr>
-        <p:spPr>
-          <a:xfrm>
-            <a:off x="621792" y="3931920"/>
-            <a:ext cx="3749039" cy="548640"/>
-          </a:xfrm>
-          <a:prstGeom prst="rect">
-            <a:avLst/>
-          </a:prstGeom>
-          <a:noFill/>
-        </p:spPr>
-        <p:txBody>
-          <a:bodyPr wrap="square" lIns="0" rIns="0" tIns="0" bIns="0" anchor="t">
-            <a:spAutoFit/>
-          </a:bodyPr>
-          <a:lstStyle/>
-          <a:p>
-            <a:pPr algn="l"/>
-            <a:r>
-              <a:rPr sz="1000" b="0" i="0">
-                <a:solidFill>
-                  <a:srgbClr val="4A4A4A"/>
-                </a:solidFill>
-                <a:latin typeface="Calibri"/>
-              </a:rPr>
-              <a:t>organisations  ·  listings  ·  offers
-Schemas, validators and aggregation pipelines</a:t>
-            </a:r>
-          </a:p>
-        </p:txBody>
-      </p:sp>
-      <p:sp>
-        <p:nvSpPr>
-          <p:cNvPr id="32" name="Rounded Rectangle 31"/>
-          <p:cNvSpPr/>
-          <p:nvPr/>
-        </p:nvSpPr>
-        <p:spPr>
-          <a:xfrm>
-            <a:off x="457200" y="4754880"/>
-            <a:ext cx="4023360" cy="960120"/>
-          </a:xfrm>
-          <a:prstGeom prst="roundRect">
-            <a:avLst>
-              <a:gd name="adj" fmla="val 8000"/>
-            </a:avLst>
-          </a:prstGeom>
-          <a:solidFill>
-            <a:srgbClr val="F6F3F3"/>
-          </a:solidFill>
-          <a:ln w="12700">
-            <a:solidFill>
-              <a:srgbClr val="D9D9D9"/>
-            </a:solidFill>
-          </a:ln>
-          <a:effectLst/>
-        </p:spPr>
-        <p:style>
-          <a:lnRef idx="1">
-            <a:schemeClr val="accent1"/>
-          </a:lnRef>
-          <a:fillRef idx="3">
-            <a:schemeClr val="accent1"/>
-          </a:fillRef>
-          <a:effectRef idx="2">
-            <a:schemeClr val="accent1"/>
-          </a:effectRef>
-          <a:fontRef idx="minor">
-            <a:schemeClr val="lt1"/>
-          </a:fontRef>
-        </p:style>
-        <p:txBody>
-          <a:bodyPr rtlCol="0" anchor="ctr"/>
-          <a:lstStyle/>
-          <a:p>
-            <a:pPr algn="ctr"/>
-          </a:p>
-        </p:txBody>
-      </p:sp>
-      <p:sp>
-        <p:nvSpPr>
-          <p:cNvPr id="33" name="TextBox 32"/>
-          <p:cNvSpPr txBox="1"/>
-          <p:nvPr/>
-        </p:nvSpPr>
-        <p:spPr>
-          <a:xfrm>
-            <a:off x="621792" y="4846320"/>
-            <a:ext cx="3749039" cy="228600"/>
-          </a:xfrm>
-          <a:prstGeom prst="rect">
-            <a:avLst/>
-          </a:prstGeom>
-          <a:noFill/>
-        </p:spPr>
-        <p:txBody>
-          <a:bodyPr wrap="square" lIns="0" rIns="0" tIns="0" bIns="0" anchor="t">
-            <a:spAutoFit/>
-          </a:bodyPr>
-          <a:lstStyle/>
-          <a:p>
-            <a:pPr algn="l"/>
-            <a:r>
-              <a:rPr sz="1150" b="1" i="0">
-                <a:solidFill>
-                  <a:srgbClr val="B7202E"/>
-                </a:solidFill>
-                <a:latin typeface="Calibri"/>
-              </a:rPr>
-              <a:t>Security</a:t>
-            </a:r>
-          </a:p>
-        </p:txBody>
-      </p:sp>
-      <p:sp>
-        <p:nvSpPr>
-          <p:cNvPr id="34" name="TextBox 33"/>
-          <p:cNvSpPr txBox="1"/>
-          <p:nvPr/>
-        </p:nvSpPr>
-        <p:spPr>
-          <a:xfrm>
-            <a:off x="621792" y="5102352"/>
-            <a:ext cx="3749039" cy="548640"/>
-          </a:xfrm>
-          <a:prstGeom prst="rect">
-            <a:avLst/>
-          </a:prstGeom>
-          <a:noFill/>
-        </p:spPr>
-        <p:txBody>
-          <a:bodyPr wrap="square" lIns="0" rIns="0" tIns="0" bIns="0" anchor="t">
-            <a:spAutoFit/>
-          </a:bodyPr>
-          <a:lstStyle/>
-          <a:p>
-            <a:pPr algn="l"/>
-            <a:r>
-              <a:rPr sz="1000" b="0" i="0">
-                <a:solidFill>
-                  <a:srgbClr val="4A4A4A"/>
-                </a:solidFill>
-                <a:latin typeface="Calibri"/>
-              </a:rPr>
-              <a:t>Passwords hashed with bcrypt · the server takes the owner from the token, never the request body · owner-only routes · .env kept out of Git</a:t>
-            </a:r>
-          </a:p>
-        </p:txBody>
-      </p:sp>
-      <p:sp>
-        <p:nvSpPr>
-          <p:cNvPr id="35" name="TextBox 34"/>
-          <p:cNvSpPr txBox="1"/>
-          <p:nvPr/>
-        </p:nvSpPr>
-        <p:spPr>
-          <a:xfrm>
-            <a:off x="4754880" y="841248"/>
-            <a:ext cx="4023360" cy="274320"/>
-          </a:xfrm>
-          <a:prstGeom prst="rect">
-            <a:avLst/>
-          </a:prstGeom>
-          <a:noFill/>
-        </p:spPr>
-        <p:txBody>
-          <a:bodyPr wrap="square" lIns="0" rIns="0" tIns="0" bIns="0" anchor="t">
-            <a:spAutoFit/>
-          </a:bodyPr>
-          <a:lstStyle/>
-          <a:p>
-            <a:pPr algn="l"/>
-            <a:r>
-              <a:rPr sz="1500" b="1" i="0">
-                <a:solidFill>
-                  <a:srgbClr val="1F1F1F"/>
-                </a:solidFill>
-                <a:latin typeface="Calibri"/>
-              </a:rPr>
-              <a:t>How a listing is matched</a:t>
-            </a:r>
-          </a:p>
-        </p:txBody>
-      </p:sp>
-      <p:sp>
-        <p:nvSpPr>
-          <p:cNvPr id="36" name="Rounded Rectangle 35"/>
-          <p:cNvSpPr/>
-          <p:nvPr/>
-        </p:nvSpPr>
-        <p:spPr>
-          <a:xfrm>
-            <a:off x="4754880" y="1170432"/>
-            <a:ext cx="941832" cy="914400"/>
-          </a:xfrm>
-          <a:prstGeom prst="roundRect">
-            <a:avLst>
-              <a:gd name="adj" fmla="val 10000"/>
-            </a:avLst>
-          </a:prstGeom>
-          <a:solidFill>
-            <a:srgbClr val="F6F3F3"/>
-          </a:solidFill>
-          <a:ln w="12700">
-            <a:solidFill>
-              <a:srgbClr val="D9D9D9"/>
-            </a:solidFill>
-          </a:ln>
-          <a:effectLst/>
-        </p:spPr>
-        <p:style>
-          <a:lnRef idx="1">
-            <a:schemeClr val="accent1"/>
-          </a:lnRef>
-          <a:fillRef idx="3">
-            <a:schemeClr val="accent1"/>
-          </a:fillRef>
-          <a:effectRef idx="2">
-            <a:schemeClr val="accent1"/>
-          </a:effectRef>
-          <a:fontRef idx="minor">
-            <a:schemeClr val="lt1"/>
-          </a:fontRef>
-        </p:style>
-        <p:txBody>
-          <a:bodyPr rtlCol="0" anchor="ctr"/>
-          <a:lstStyle/>
-          <a:p>
-            <a:pPr algn="ctr"/>
-          </a:p>
-        </p:txBody>
-      </p:sp>
-      <p:sp>
-        <p:nvSpPr>
-          <p:cNvPr id="37" name="TextBox 36"/>
-          <p:cNvSpPr txBox="1"/>
-          <p:nvPr/>
-        </p:nvSpPr>
-        <p:spPr>
-          <a:xfrm>
-            <a:off x="4754880" y="1234440"/>
-            <a:ext cx="941832" cy="256032"/>
-          </a:xfrm>
-          <a:prstGeom prst="rect">
-            <a:avLst/>
-          </a:prstGeom>
-          <a:noFill/>
-        </p:spPr>
-        <p:txBody>
-          <a:bodyPr wrap="square" lIns="0" rIns="0" tIns="0" bIns="0" anchor="t">
-            <a:spAutoFit/>
-          </a:bodyPr>
-          <a:lstStyle/>
-          <a:p>
-            <a:pPr algn="ctr"/>
-            <a:r>
-              <a:rPr sz="1100" b="1" i="0">
-                <a:solidFill>
-                  <a:srgbClr val="C00000"/>
-                </a:solidFill>
-                <a:latin typeface="Calibri"/>
-              </a:rPr>
-              <a:t>1. Filter</a:t>
-            </a:r>
-          </a:p>
-        </p:txBody>
-      </p:sp>
-      <p:sp>
-        <p:nvSpPr>
-          <p:cNvPr id="38" name="TextBox 37"/>
-          <p:cNvSpPr txBox="1"/>
-          <p:nvPr/>
-        </p:nvSpPr>
-        <p:spPr>
-          <a:xfrm>
-            <a:off x="4791456" y="1508760"/>
-            <a:ext cx="868680" cy="548640"/>
-          </a:xfrm>
-          <a:prstGeom prst="rect">
-            <a:avLst/>
-          </a:prstGeom>
-          <a:noFill/>
-        </p:spPr>
-        <p:txBody>
-          <a:bodyPr wrap="square" lIns="0" rIns="0" tIns="0" bIns="0" anchor="t">
-            <a:spAutoFit/>
-          </a:bodyPr>
-          <a:lstStyle/>
-          <a:p>
-            <a:pPr algn="ctr"/>
-            <a:r>
-              <a:rPr sz="850" b="0" i="0">
-                <a:solidFill>
-                  <a:srgbClr val="4A4A4A"/>
-                </a:solidFill>
-                <a:latin typeface="Calibri"/>
-              </a:rPr>
-              <a:t>wrong food, no room,
-too far to reach</a:t>
-            </a:r>
-          </a:p>
-        </p:txBody>
-      </p:sp>
-      <p:sp>
-        <p:nvSpPr>
-          <p:cNvPr id="39" name="TextBox 38"/>
-          <p:cNvSpPr txBox="1"/>
-          <p:nvPr/>
-        </p:nvSpPr>
-        <p:spPr>
-          <a:xfrm>
-            <a:off x="5669280" y="1517904"/>
-            <a:ext cx="128016" cy="274320"/>
-          </a:xfrm>
-          <a:prstGeom prst="rect">
-            <a:avLst/>
-          </a:prstGeom>
-          <a:noFill/>
-        </p:spPr>
-        <p:txBody>
-          <a:bodyPr wrap="square" lIns="0" rIns="0" tIns="0" bIns="0" anchor="t">
-            <a:spAutoFit/>
-          </a:bodyPr>
-          <a:lstStyle/>
-          <a:p>
-            <a:pPr algn="ctr"/>
-            <a:r>
-              <a:rPr sz="1400" b="1" i="0">
-                <a:solidFill>
-                  <a:srgbClr val="7A7A7A"/>
-                </a:solidFill>
-                <a:latin typeface="Calibri"/>
-              </a:rPr>
-              <a:t>›</a:t>
-            </a:r>
-          </a:p>
-        </p:txBody>
-      </p:sp>
-      <p:sp>
-        <p:nvSpPr>
-          <p:cNvPr id="40" name="Rounded Rectangle 39"/>
-          <p:cNvSpPr/>
-          <p:nvPr/>
-        </p:nvSpPr>
-        <p:spPr>
-          <a:xfrm>
-            <a:off x="5779008" y="1170432"/>
-            <a:ext cx="941832" cy="914400"/>
-          </a:xfrm>
-          <a:prstGeom prst="roundRect">
-            <a:avLst>
-              <a:gd name="adj" fmla="val 10000"/>
-            </a:avLst>
-          </a:prstGeom>
-          <a:solidFill>
-            <a:srgbClr val="F6F3F3"/>
-          </a:solidFill>
-          <a:ln w="12700">
-            <a:solidFill>
-              <a:srgbClr val="D9D9D9"/>
-            </a:solidFill>
-          </a:ln>
-          <a:effectLst/>
-        </p:spPr>
-        <p:style>
-          <a:lnRef idx="1">
-            <a:schemeClr val="accent1"/>
-          </a:lnRef>
-          <a:fillRef idx="3">
-            <a:schemeClr val="accent1"/>
-          </a:fillRef>
-          <a:effectRef idx="2">
-            <a:schemeClr val="accent1"/>
-          </a:effectRef>
-          <a:fontRef idx="minor">
-            <a:schemeClr val="lt1"/>
-          </a:fontRef>
-        </p:style>
-        <p:txBody>
-          <a:bodyPr rtlCol="0" anchor="ctr"/>
-          <a:lstStyle/>
-          <a:p>
-            <a:pPr algn="ctr"/>
-          </a:p>
-        </p:txBody>
-      </p:sp>
-      <p:sp>
-        <p:nvSpPr>
-          <p:cNvPr id="41" name="TextBox 40"/>
-          <p:cNvSpPr txBox="1"/>
-          <p:nvPr/>
-        </p:nvSpPr>
-        <p:spPr>
-          <a:xfrm>
-            <a:off x="5779008" y="1234440"/>
-            <a:ext cx="941832" cy="256032"/>
-          </a:xfrm>
-          <a:prstGeom prst="rect">
-            <a:avLst/>
-          </a:prstGeom>
-          <a:noFill/>
-        </p:spPr>
-        <p:txBody>
-          <a:bodyPr wrap="square" lIns="0" rIns="0" tIns="0" bIns="0" anchor="t">
-            <a:spAutoFit/>
-          </a:bodyPr>
-          <a:lstStyle/>
-          <a:p>
-            <a:pPr algn="ctr"/>
-            <a:r>
-              <a:rPr sz="1100" b="1" i="0">
-                <a:solidFill>
-                  <a:srgbClr val="C00000"/>
-                </a:solidFill>
-                <a:latin typeface="Calibri"/>
-              </a:rPr>
-              <a:t>2. Score</a:t>
-            </a:r>
-          </a:p>
-        </p:txBody>
-      </p:sp>
-      <p:sp>
-        <p:nvSpPr>
-          <p:cNvPr id="42" name="TextBox 41"/>
-          <p:cNvSpPr txBox="1"/>
-          <p:nvPr/>
-        </p:nvSpPr>
-        <p:spPr>
-          <a:xfrm>
-            <a:off x="5815584" y="1508760"/>
-            <a:ext cx="868680" cy="548640"/>
-          </a:xfrm>
-          <a:prstGeom prst="rect">
-            <a:avLst/>
-          </a:prstGeom>
-          <a:noFill/>
-        </p:spPr>
-        <p:txBody>
-          <a:bodyPr wrap="square" lIns="0" rIns="0" tIns="0" bIns="0" anchor="t">
-            <a:spAutoFit/>
-          </a:bodyPr>
-          <a:lstStyle/>
-          <a:p>
-            <a:pPr algn="ctr"/>
-            <a:r>
-              <a:rPr sz="850" b="0" i="0">
-                <a:solidFill>
-                  <a:srgbClr val="4A4A4A"/>
-                </a:solidFill>
-                <a:latin typeface="Calibri"/>
-              </a:rPr>
-              <a:t>5 weighted factors,
-out of 100</a:t>
-            </a:r>
-          </a:p>
-        </p:txBody>
-      </p:sp>
-      <p:sp>
-        <p:nvSpPr>
-          <p:cNvPr id="43" name="TextBox 42"/>
-          <p:cNvSpPr txBox="1"/>
-          <p:nvPr/>
-        </p:nvSpPr>
-        <p:spPr>
-          <a:xfrm>
-            <a:off x="6693408" y="1517904"/>
-            <a:ext cx="128016" cy="274320"/>
-          </a:xfrm>
-          <a:prstGeom prst="rect">
-            <a:avLst/>
-          </a:prstGeom>
-          <a:noFill/>
-        </p:spPr>
-        <p:txBody>
-          <a:bodyPr wrap="square" lIns="0" rIns="0" tIns="0" bIns="0" anchor="t">
-            <a:spAutoFit/>
-          </a:bodyPr>
-          <a:lstStyle/>
-          <a:p>
-            <a:pPr algn="ctr"/>
-            <a:r>
-              <a:rPr sz="1400" b="1" i="0">
-                <a:solidFill>
-                  <a:srgbClr val="7A7A7A"/>
-                </a:solidFill>
-                <a:latin typeface="Calibri"/>
-              </a:rPr>
-              <a:t>›</a:t>
-            </a:r>
-          </a:p>
-        </p:txBody>
-      </p:sp>
-      <p:sp>
-        <p:nvSpPr>
-          <p:cNvPr id="44" name="Rounded Rectangle 43"/>
-          <p:cNvSpPr/>
-          <p:nvPr/>
-        </p:nvSpPr>
-        <p:spPr>
-          <a:xfrm>
-            <a:off x="6803136" y="1170432"/>
-            <a:ext cx="941832" cy="914400"/>
-          </a:xfrm>
-          <a:prstGeom prst="roundRect">
-            <a:avLst>
-              <a:gd name="adj" fmla="val 10000"/>
-            </a:avLst>
-          </a:prstGeom>
-          <a:solidFill>
-            <a:srgbClr val="F6F3F3"/>
-          </a:solidFill>
-          <a:ln w="12700">
-            <a:solidFill>
-              <a:srgbClr val="D9D9D9"/>
-            </a:solidFill>
-          </a:ln>
-          <a:effectLst/>
-        </p:spPr>
-        <p:style>
-          <a:lnRef idx="1">
-            <a:schemeClr val="accent1"/>
-          </a:lnRef>
-          <a:fillRef idx="3">
-            <a:schemeClr val="accent1"/>
-          </a:fillRef>
-          <a:effectRef idx="2">
-            <a:schemeClr val="accent1"/>
-          </a:effectRef>
-          <a:fontRef idx="minor">
-            <a:schemeClr val="lt1"/>
-          </a:fontRef>
-        </p:style>
-        <p:txBody>
-          <a:bodyPr rtlCol="0" anchor="ctr"/>
-          <a:lstStyle/>
-          <a:p>
-            <a:pPr algn="ctr"/>
-          </a:p>
-        </p:txBody>
-      </p:sp>
-      <p:sp>
-        <p:nvSpPr>
-          <p:cNvPr id="45" name="TextBox 44"/>
-          <p:cNvSpPr txBox="1"/>
-          <p:nvPr/>
-        </p:nvSpPr>
-        <p:spPr>
-          <a:xfrm>
-            <a:off x="6803136" y="1234440"/>
-            <a:ext cx="941832" cy="256032"/>
-          </a:xfrm>
-          <a:prstGeom prst="rect">
-            <a:avLst/>
-          </a:prstGeom>
-          <a:noFill/>
-        </p:spPr>
-        <p:txBody>
-          <a:bodyPr wrap="square" lIns="0" rIns="0" tIns="0" bIns="0" anchor="t">
-            <a:spAutoFit/>
-          </a:bodyPr>
-          <a:lstStyle/>
-          <a:p>
-            <a:pPr algn="ctr"/>
-            <a:r>
-              <a:rPr sz="1100" b="1" i="0">
-                <a:solidFill>
-                  <a:srgbClr val="C00000"/>
-                </a:solidFill>
-                <a:latin typeface="Calibri"/>
-              </a:rPr>
-              <a:t>3. Offer</a:t>
-            </a:r>
-          </a:p>
-        </p:txBody>
-      </p:sp>
-      <p:sp>
-        <p:nvSpPr>
-          <p:cNvPr id="46" name="TextBox 45"/>
-          <p:cNvSpPr txBox="1"/>
-          <p:nvPr/>
-        </p:nvSpPr>
-        <p:spPr>
-          <a:xfrm>
-            <a:off x="6839712" y="1508760"/>
-            <a:ext cx="868680" cy="548640"/>
-          </a:xfrm>
-          <a:prstGeom prst="rect">
-            <a:avLst/>
-          </a:prstGeom>
-          <a:noFill/>
-        </p:spPr>
-        <p:txBody>
-          <a:bodyPr wrap="square" lIns="0" rIns="0" tIns="0" bIns="0" anchor="t">
-            <a:spAutoFit/>
-          </a:bodyPr>
-          <a:lstStyle/>
-          <a:p>
-            <a:pPr algn="ctr"/>
-            <a:r>
-              <a:rPr sz="850" b="0" i="0">
-                <a:solidFill>
-                  <a:srgbClr val="4A4A4A"/>
-                </a:solidFill>
-                <a:latin typeface="Calibri"/>
-              </a:rPr>
-              <a:t>best shelter first,
-10 min to reply</a:t>
-            </a:r>
-          </a:p>
-        </p:txBody>
-      </p:sp>
-      <p:sp>
-        <p:nvSpPr>
-          <p:cNvPr id="47" name="TextBox 46"/>
-          <p:cNvSpPr txBox="1"/>
-          <p:nvPr/>
-        </p:nvSpPr>
-        <p:spPr>
-          <a:xfrm>
-            <a:off x="7717536" y="1517904"/>
-            <a:ext cx="128016" cy="274320"/>
-          </a:xfrm>
-          <a:prstGeom prst="rect">
-            <a:avLst/>
-          </a:prstGeom>
-          <a:noFill/>
-        </p:spPr>
-        <p:txBody>
-          <a:bodyPr wrap="square" lIns="0" rIns="0" tIns="0" bIns="0" anchor="t">
-            <a:spAutoFit/>
-          </a:bodyPr>
-          <a:lstStyle/>
-          <a:p>
-            <a:pPr algn="ctr"/>
-            <a:r>
-              <a:rPr sz="1400" b="1" i="0">
-                <a:solidFill>
-                  <a:srgbClr val="7A7A7A"/>
-                </a:solidFill>
-                <a:latin typeface="Calibri"/>
-              </a:rPr>
-              <a:t>›</a:t>
-            </a:r>
-          </a:p>
-        </p:txBody>
-      </p:sp>
-      <p:sp>
-        <p:nvSpPr>
-          <p:cNvPr id="48" name="Rounded Rectangle 47"/>
-          <p:cNvSpPr/>
-          <p:nvPr/>
-        </p:nvSpPr>
-        <p:spPr>
-          <a:xfrm>
-            <a:off x="7827264" y="1170432"/>
-            <a:ext cx="941832" cy="914400"/>
-          </a:xfrm>
-          <a:prstGeom prst="roundRect">
-            <a:avLst>
-              <a:gd name="adj" fmla="val 10000"/>
-            </a:avLst>
-          </a:prstGeom>
-          <a:solidFill>
-            <a:srgbClr val="F6F3F3"/>
-          </a:solidFill>
-          <a:ln w="12700">
-            <a:solidFill>
-              <a:srgbClr val="D9D9D9"/>
-            </a:solidFill>
-          </a:ln>
-          <a:effectLst/>
-        </p:spPr>
-        <p:style>
-          <a:lnRef idx="1">
-            <a:schemeClr val="accent1"/>
-          </a:lnRef>
-          <a:fillRef idx="3">
-            <a:schemeClr val="accent1"/>
-          </a:fillRef>
-          <a:effectRef idx="2">
-            <a:schemeClr val="accent1"/>
-          </a:effectRef>
-          <a:fontRef idx="minor">
-            <a:schemeClr val="lt1"/>
-          </a:fontRef>
-        </p:style>
-        <p:txBody>
-          <a:bodyPr rtlCol="0" anchor="ctr"/>
-          <a:lstStyle/>
-          <a:p>
-            <a:pPr algn="ctr"/>
-          </a:p>
-        </p:txBody>
-      </p:sp>
-      <p:sp>
-        <p:nvSpPr>
-          <p:cNvPr id="49" name="TextBox 48"/>
-          <p:cNvSpPr txBox="1"/>
-          <p:nvPr/>
-        </p:nvSpPr>
-        <p:spPr>
-          <a:xfrm>
-            <a:off x="7827264" y="1234440"/>
-            <a:ext cx="941832" cy="256032"/>
-          </a:xfrm>
-          <a:prstGeom prst="rect">
-            <a:avLst/>
-          </a:prstGeom>
-          <a:noFill/>
-        </p:spPr>
-        <p:txBody>
-          <a:bodyPr wrap="square" lIns="0" rIns="0" tIns="0" bIns="0" anchor="t">
-            <a:spAutoFit/>
-          </a:bodyPr>
-          <a:lstStyle/>
-          <a:p>
-            <a:pPr algn="ctr"/>
-            <a:r>
-              <a:rPr sz="1100" b="1" i="0">
-                <a:solidFill>
-                  <a:srgbClr val="C00000"/>
-                </a:solidFill>
-                <a:latin typeface="Calibri"/>
-              </a:rPr>
-              <a:t>4. Cascade</a:t>
-            </a:r>
-          </a:p>
-        </p:txBody>
-      </p:sp>
-      <p:sp>
-        <p:nvSpPr>
-          <p:cNvPr id="50" name="TextBox 49"/>
-          <p:cNvSpPr txBox="1"/>
-          <p:nvPr/>
-        </p:nvSpPr>
-        <p:spPr>
-          <a:xfrm>
-            <a:off x="7863840" y="1508760"/>
-            <a:ext cx="868680" cy="548640"/>
-          </a:xfrm>
-          <a:prstGeom prst="rect">
-            <a:avLst/>
-          </a:prstGeom>
-          <a:noFill/>
-        </p:spPr>
-        <p:txBody>
-          <a:bodyPr wrap="square" lIns="0" rIns="0" tIns="0" bIns="0" anchor="t">
-            <a:spAutoFit/>
-          </a:bodyPr>
-          <a:lstStyle/>
-          <a:p>
-            <a:pPr algn="ctr"/>
-            <a:r>
-              <a:rPr sz="850" b="0" i="0">
-                <a:solidFill>
-                  <a:srgbClr val="4A4A4A"/>
-                </a:solidFill>
-                <a:latin typeface="Calibri"/>
-              </a:rPr>
-              <a:t>pass or no reply:
-re-score, ask next</a:t>
-            </a:r>
-          </a:p>
-        </p:txBody>
-      </p:sp>
-      <p:sp>
-        <p:nvSpPr>
-          <p:cNvPr id="51" name="TextBox 50"/>
-          <p:cNvSpPr txBox="1"/>
-          <p:nvPr/>
-        </p:nvSpPr>
-        <p:spPr>
-          <a:xfrm>
-            <a:off x="4754880" y="2249424"/>
-            <a:ext cx="4023360" cy="256032"/>
-          </a:xfrm>
-          <a:prstGeom prst="rect">
-            <a:avLst/>
-          </a:prstGeom>
-          <a:noFill/>
-        </p:spPr>
-        <p:txBody>
-          <a:bodyPr wrap="square" lIns="0" rIns="0" tIns="0" bIns="0" anchor="t">
-            <a:spAutoFit/>
-          </a:bodyPr>
-          <a:lstStyle/>
-          <a:p>
-            <a:pPr algn="l"/>
-            <a:r>
-              <a:rPr sz="1200" b="1" i="0">
-                <a:solidFill>
-                  <a:srgbClr val="1F1F1F"/>
-                </a:solidFill>
-                <a:latin typeface="Calibri"/>
-              </a:rPr>
-              <a:t>Score weights</a:t>
-            </a:r>
-          </a:p>
-        </p:txBody>
-      </p:sp>
-      <p:sp>
-        <p:nvSpPr>
-          <p:cNvPr id="52" name="TextBox 51"/>
-          <p:cNvSpPr txBox="1"/>
-          <p:nvPr/>
-        </p:nvSpPr>
-        <p:spPr>
-          <a:xfrm>
-            <a:off x="4754880" y="2542032"/>
-            <a:ext cx="1463040" cy="228600"/>
-          </a:xfrm>
-          <a:prstGeom prst="rect">
-            <a:avLst/>
-          </a:prstGeom>
-          <a:noFill/>
-        </p:spPr>
-        <p:txBody>
-          <a:bodyPr wrap="square" lIns="0" rIns="0" tIns="0" bIns="0" anchor="t">
-            <a:spAutoFit/>
-          </a:bodyPr>
-          <a:lstStyle/>
-          <a:p>
-            <a:pPr algn="l"/>
-            <a:r>
-              <a:rPr sz="1050" b="0" i="0">
-                <a:solidFill>
-                  <a:srgbClr val="1F1F1F"/>
-                </a:solidFill>
-                <a:latin typeface="Calibri"/>
-              </a:rPr>
-              <a:t>Time feasibility</a:t>
-            </a:r>
-          </a:p>
-        </p:txBody>
-      </p:sp>
-      <p:sp>
-        <p:nvSpPr>
-          <p:cNvPr id="53" name="Rounded Rectangle 52"/>
-          <p:cNvSpPr/>
-          <p:nvPr/>
-        </p:nvSpPr>
-        <p:spPr>
-          <a:xfrm>
-            <a:off x="6217920" y="2606039"/>
-            <a:ext cx="2011680" cy="100584"/>
-          </a:xfrm>
-          <a:prstGeom prst="roundRect">
-            <a:avLst>
-              <a:gd name="adj" fmla="val 50000"/>
-            </a:avLst>
-          </a:prstGeom>
-          <a:solidFill>
-            <a:srgbClr val="EEE6E6"/>
-          </a:solidFill>
-          <a:ln>
-            <a:noFill/>
-          </a:ln>
-          <a:effectLst/>
-        </p:spPr>
-        <p:style>
-          <a:lnRef idx="1">
-            <a:schemeClr val="accent1"/>
-          </a:lnRef>
-          <a:fillRef idx="3">
-            <a:schemeClr val="accent1"/>
-          </a:fillRef>
-          <a:effectRef idx="2">
-            <a:schemeClr val="accent1"/>
-          </a:effectRef>
-          <a:fontRef idx="minor">
-            <a:schemeClr val="lt1"/>
-          </a:fontRef>
-        </p:style>
-        <p:txBody>
-          <a:bodyPr rtlCol="0" anchor="ctr"/>
-          <a:lstStyle/>
-          <a:p>
-            <a:pPr algn="ctr"/>
-          </a:p>
-        </p:txBody>
-      </p:sp>
-      <p:sp>
-        <p:nvSpPr>
-          <p:cNvPr id="54" name="Rounded Rectangle 53"/>
-          <p:cNvSpPr/>
-          <p:nvPr/>
-        </p:nvSpPr>
-        <p:spPr>
-          <a:xfrm>
-            <a:off x="6217920" y="2606039"/>
-            <a:ext cx="2011680" cy="100584"/>
-          </a:xfrm>
-          <a:prstGeom prst="roundRect">
-            <a:avLst>
-              <a:gd name="adj" fmla="val 50000"/>
-            </a:avLst>
+            <a:off x="603504" y="1307592"/>
+            <a:ext cx="274320" cy="274320"/>
+          </a:xfrm>
+          <a:prstGeom prst="ellipse">
+            <a:avLst/>
           </a:prstGeom>
           <a:solidFill>
             <a:srgbClr val="C00000"/>
@@ -8980,14 +8799,49 @@
       </p:sp>
       <p:sp>
         <p:nvSpPr>
-          <p:cNvPr id="55" name="TextBox 54"/>
+          <p:cNvPr id="23" name="TextBox 22"/>
           <p:cNvSpPr txBox="1"/>
           <p:nvPr/>
         </p:nvSpPr>
         <p:spPr>
           <a:xfrm>
-            <a:off x="8275320" y="2542032"/>
-            <a:ext cx="502920" cy="228600"/>
+            <a:off x="603504" y="1307592"/>
+            <a:ext cx="274320" cy="274320"/>
+          </a:xfrm>
+          <a:prstGeom prst="rect">
+            <a:avLst/>
+          </a:prstGeom>
+          <a:noFill/>
+        </p:spPr>
+        <p:txBody>
+          <a:bodyPr wrap="square" lIns="0" rIns="0" tIns="0" bIns="0" anchor="ctr">
+            <a:spAutoFit/>
+          </a:bodyPr>
+          <a:lstStyle/>
+          <a:p>
+            <a:pPr algn="ctr"/>
+            <a:r>
+              <a:rPr sz="1150" b="1" i="0">
+                <a:solidFill>
+                  <a:srgbClr val="FFFFFF"/>
+                </a:solidFill>
+                <a:latin typeface="Calibri"/>
+              </a:rPr>
+              <a:t>1</a:t>
+            </a:r>
+          </a:p>
+        </p:txBody>
+      </p:sp>
+      <p:sp>
+        <p:nvSpPr>
+          <p:cNvPr id="24" name="TextBox 23"/>
+          <p:cNvSpPr txBox="1"/>
+          <p:nvPr/>
+        </p:nvSpPr>
+        <p:spPr>
+          <a:xfrm>
+            <a:off x="969264" y="1298448"/>
+            <a:ext cx="3337559" cy="256032"/>
           </a:xfrm>
           <a:prstGeom prst="rect">
             <a:avLst/>
@@ -9000,29 +8854,38 @@
           </a:bodyPr>
           <a:lstStyle/>
           <a:p>
-            <a:pPr algn="r"/>
-            <a:r>
-              <a:rPr sz="1050" b="1" i="0">
-                <a:solidFill>
-                  <a:srgbClr val="1F1F1F"/>
+            <a:pPr algn="l"/>
+            <a:r>
+              <a:rPr sz="1250" b="1" i="0">
+                <a:solidFill>
+                  <a:srgbClr val="B7202E"/>
                 </a:solidFill>
                 <a:latin typeface="Calibri"/>
               </a:rPr>
-              <a:t>35%</a:t>
-            </a:r>
-          </a:p>
-        </p:txBody>
-      </p:sp>
-      <p:sp>
-        <p:nvSpPr>
-          <p:cNvPr id="56" name="TextBox 55"/>
+              <a:t>Browser</a:t>
+            </a:r>
+            <a:r>
+              <a:rPr sz="950" b="0" i="0">
+                <a:solidFill>
+                  <a:srgbClr val="7A7A7A"/>
+                </a:solidFill>
+                <a:latin typeface="Calibri"/>
+              </a:rPr>
+              <a:t>   presentation</a:t>
+            </a:r>
+          </a:p>
+        </p:txBody>
+      </p:sp>
+      <p:sp>
+        <p:nvSpPr>
+          <p:cNvPr id="25" name="TextBox 24"/>
           <p:cNvSpPr txBox="1"/>
           <p:nvPr/>
         </p:nvSpPr>
         <p:spPr>
           <a:xfrm>
-            <a:off x="4754880" y="2807208"/>
-            <a:ext cx="1463040" cy="228600"/>
+            <a:off x="969264" y="1600200"/>
+            <a:ext cx="3319272" cy="548640"/>
           </a:xfrm>
           <a:prstGeom prst="rect">
             <a:avLst/>
@@ -9035,37 +8898,124 @@
           </a:bodyPr>
           <a:lstStyle/>
           <a:p>
-            <a:pPr algn="l"/>
-            <a:r>
-              <a:rPr sz="1050" b="0" i="0">
-                <a:solidFill>
-                  <a:srgbClr val="1F1F1F"/>
+            <a:pPr algn="l">
+              <a:lnSpc>
+                <a:spcPct val="100000"/>
+              </a:lnSpc>
+            </a:pPr>
+            <a:r>
+              <a:rPr sz="950" b="0" i="0">
+                <a:solidFill>
+                  <a:srgbClr val="4A4A4A"/>
                 </a:solidFill>
                 <a:latin typeface="Calibri"/>
               </a:rPr>
-              <a:t>Proximity</a:t>
-            </a:r>
-          </a:p>
-        </p:txBody>
-      </p:sp>
-      <p:sp>
-        <p:nvSpPr>
-          <p:cNvPr id="57" name="Rounded Rectangle 56"/>
+              <a:t>10 pages of plain HTML, CSS and JavaScript
+api.js holds the token and calls fetch()
+Leaflet + OpenStreetMap for the map</a:t>
+            </a:r>
+          </a:p>
+        </p:txBody>
+      </p:sp>
+      <p:sp>
+        <p:nvSpPr>
+          <p:cNvPr id="26" name="TextBox 25"/>
+          <p:cNvSpPr txBox="1"/>
+          <p:nvPr/>
+        </p:nvSpPr>
+        <p:spPr>
+          <a:xfrm>
+            <a:off x="457200" y="2212848"/>
+            <a:ext cx="3977639" cy="201168"/>
+          </a:xfrm>
+          <a:prstGeom prst="rect">
+            <a:avLst/>
+          </a:prstGeom>
+          <a:noFill/>
+        </p:spPr>
+        <p:txBody>
+          <a:bodyPr wrap="square" lIns="0" rIns="0" tIns="0" bIns="0" anchor="t">
+            <a:spAutoFit/>
+          </a:bodyPr>
+          <a:lstStyle/>
+          <a:p>
+            <a:pPr algn="ctr"/>
+            <a:r>
+              <a:rPr sz="900" b="1" i="0">
+                <a:solidFill>
+                  <a:srgbClr val="7A7A7A"/>
+                </a:solidFill>
+                <a:latin typeface="Calibri"/>
+              </a:rPr>
+              <a:t>▼ HTTP / JSON</a:t>
+            </a:r>
+          </a:p>
+        </p:txBody>
+      </p:sp>
+      <p:sp>
+        <p:nvSpPr>
+          <p:cNvPr id="27" name="Rounded Rectangle 26"/>
           <p:cNvSpPr/>
           <p:nvPr/>
         </p:nvSpPr>
         <p:spPr>
           <a:xfrm>
-            <a:off x="6217920" y="2871215"/>
-            <a:ext cx="2011680" cy="100584"/>
+            <a:off x="457200" y="2432304"/>
+            <a:ext cx="3977639" cy="1024128"/>
           </a:xfrm>
           <a:prstGeom prst="roundRect">
             <a:avLst>
-              <a:gd name="adj" fmla="val 50000"/>
+              <a:gd name="adj" fmla="val 8000"/>
             </a:avLst>
           </a:prstGeom>
           <a:solidFill>
-            <a:srgbClr val="EEE6E6"/>
+            <a:srgbClr val="F7F4F4"/>
+          </a:solidFill>
+          <a:ln w="12700">
+            <a:solidFill>
+              <a:srgbClr val="DBD6D6"/>
+            </a:solidFill>
+          </a:ln>
+          <a:effectLst/>
+        </p:spPr>
+        <p:style>
+          <a:lnRef idx="1">
+            <a:schemeClr val="accent1"/>
+          </a:lnRef>
+          <a:fillRef idx="3">
+            <a:schemeClr val="accent1"/>
+          </a:fillRef>
+          <a:effectRef idx="2">
+            <a:schemeClr val="accent1"/>
+          </a:effectRef>
+          <a:fontRef idx="minor">
+            <a:schemeClr val="lt1"/>
+          </a:fontRef>
+        </p:style>
+        <p:txBody>
+          <a:bodyPr rtlCol="0" anchor="ctr"/>
+          <a:lstStyle/>
+          <a:p>
+            <a:pPr algn="ctr"/>
+          </a:p>
+        </p:txBody>
+      </p:sp>
+      <p:sp>
+        <p:nvSpPr>
+          <p:cNvPr id="28" name="Oval 27"/>
+          <p:cNvSpPr/>
+          <p:nvPr/>
+        </p:nvSpPr>
+        <p:spPr>
+          <a:xfrm>
+            <a:off x="603504" y="2569464"/>
+            <a:ext cx="274320" cy="274320"/>
+          </a:xfrm>
+          <a:prstGeom prst="ellipse">
+            <a:avLst/>
+          </a:prstGeom>
+          <a:solidFill>
+            <a:srgbClr val="C00000"/>
           </a:solidFill>
           <a:ln>
             <a:noFill/>
@@ -9096,22 +9046,222 @@
       </p:sp>
       <p:sp>
         <p:nvSpPr>
-          <p:cNvPr id="58" name="Rounded Rectangle 57"/>
+          <p:cNvPr id="29" name="TextBox 28"/>
+          <p:cNvSpPr txBox="1"/>
+          <p:nvPr/>
+        </p:nvSpPr>
+        <p:spPr>
+          <a:xfrm>
+            <a:off x="603504" y="2569464"/>
+            <a:ext cx="274320" cy="274320"/>
+          </a:xfrm>
+          <a:prstGeom prst="rect">
+            <a:avLst/>
+          </a:prstGeom>
+          <a:noFill/>
+        </p:spPr>
+        <p:txBody>
+          <a:bodyPr wrap="square" lIns="0" rIns="0" tIns="0" bIns="0" anchor="ctr">
+            <a:spAutoFit/>
+          </a:bodyPr>
+          <a:lstStyle/>
+          <a:p>
+            <a:pPr algn="ctr"/>
+            <a:r>
+              <a:rPr sz="1150" b="1" i="0">
+                <a:solidFill>
+                  <a:srgbClr val="FFFFFF"/>
+                </a:solidFill>
+                <a:latin typeface="Calibri"/>
+              </a:rPr>
+              <a:t>2</a:t>
+            </a:r>
+          </a:p>
+        </p:txBody>
+      </p:sp>
+      <p:sp>
+        <p:nvSpPr>
+          <p:cNvPr id="30" name="TextBox 29"/>
+          <p:cNvSpPr txBox="1"/>
+          <p:nvPr/>
+        </p:nvSpPr>
+        <p:spPr>
+          <a:xfrm>
+            <a:off x="969264" y="2560320"/>
+            <a:ext cx="3337559" cy="256032"/>
+          </a:xfrm>
+          <a:prstGeom prst="rect">
+            <a:avLst/>
+          </a:prstGeom>
+          <a:noFill/>
+        </p:spPr>
+        <p:txBody>
+          <a:bodyPr wrap="square" lIns="0" rIns="0" tIns="0" bIns="0" anchor="t">
+            <a:spAutoFit/>
+          </a:bodyPr>
+          <a:lstStyle/>
+          <a:p>
+            <a:pPr algn="l"/>
+            <a:r>
+              <a:rPr sz="1250" b="1" i="0">
+                <a:solidFill>
+                  <a:srgbClr val="B7202E"/>
+                </a:solidFill>
+                <a:latin typeface="Calibri"/>
+              </a:rPr>
+              <a:t>Node.js + Express</a:t>
+            </a:r>
+            <a:r>
+              <a:rPr sz="950" b="0" i="0">
+                <a:solidFill>
+                  <a:srgbClr val="7A7A7A"/>
+                </a:solidFill>
+                <a:latin typeface="Calibri"/>
+              </a:rPr>
+              <a:t>   application logic</a:t>
+            </a:r>
+          </a:p>
+        </p:txBody>
+      </p:sp>
+      <p:sp>
+        <p:nvSpPr>
+          <p:cNvPr id="31" name="TextBox 30"/>
+          <p:cNvSpPr txBox="1"/>
+          <p:nvPr/>
+        </p:nvSpPr>
+        <p:spPr>
+          <a:xfrm>
+            <a:off x="969264" y="2862072"/>
+            <a:ext cx="3319272" cy="548640"/>
+          </a:xfrm>
+          <a:prstGeom prst="rect">
+            <a:avLst/>
+          </a:prstGeom>
+          <a:noFill/>
+        </p:spPr>
+        <p:txBody>
+          <a:bodyPr wrap="square" lIns="0" rIns="0" tIns="0" bIns="0" anchor="t">
+            <a:spAutoFit/>
+          </a:bodyPr>
+          <a:lstStyle/>
+          <a:p>
+            <a:pPr algn="l">
+              <a:lnSpc>
+                <a:spcPct val="100000"/>
+              </a:lnSpc>
+            </a:pPr>
+            <a:r>
+              <a:rPr sz="950" b="0" i="0">
+                <a:solidFill>
+                  <a:srgbClr val="4A4A4A"/>
+                </a:solidFill>
+                <a:latin typeface="Calibri"/>
+              </a:rPr>
+              <a:t>/auth  /listings  /offers  /organisations  /admin  /stats
+protect (JWT) + onlyFor (donor / recipient / admin)</a:t>
+            </a:r>
+          </a:p>
+        </p:txBody>
+      </p:sp>
+      <p:sp>
+        <p:nvSpPr>
+          <p:cNvPr id="32" name="TextBox 31"/>
+          <p:cNvSpPr txBox="1"/>
+          <p:nvPr/>
+        </p:nvSpPr>
+        <p:spPr>
+          <a:xfrm>
+            <a:off x="457200" y="3474720"/>
+            <a:ext cx="3977639" cy="201168"/>
+          </a:xfrm>
+          <a:prstGeom prst="rect">
+            <a:avLst/>
+          </a:prstGeom>
+          <a:noFill/>
+        </p:spPr>
+        <p:txBody>
+          <a:bodyPr wrap="square" lIns="0" rIns="0" tIns="0" bIns="0" anchor="t">
+            <a:spAutoFit/>
+          </a:bodyPr>
+          <a:lstStyle/>
+          <a:p>
+            <a:pPr algn="ctr"/>
+            <a:r>
+              <a:rPr sz="900" b="1" i="0">
+                <a:solidFill>
+                  <a:srgbClr val="7A7A7A"/>
+                </a:solidFill>
+                <a:latin typeface="Calibri"/>
+              </a:rPr>
+              <a:t>▼ Mongoose</a:t>
+            </a:r>
+          </a:p>
+        </p:txBody>
+      </p:sp>
+      <p:sp>
+        <p:nvSpPr>
+          <p:cNvPr id="33" name="Rounded Rectangle 32"/>
           <p:cNvSpPr/>
           <p:nvPr/>
         </p:nvSpPr>
         <p:spPr>
           <a:xfrm>
-            <a:off x="6217920" y="2871215"/>
-            <a:ext cx="1436914" cy="100584"/>
+            <a:off x="457200" y="3694176"/>
+            <a:ext cx="3977639" cy="1024128"/>
           </a:xfrm>
           <a:prstGeom prst="roundRect">
             <a:avLst>
-              <a:gd name="adj" fmla="val 50000"/>
+              <a:gd name="adj" fmla="val 8000"/>
             </a:avLst>
           </a:prstGeom>
           <a:solidFill>
-            <a:srgbClr val="B7202E"/>
+            <a:srgbClr val="F7F4F4"/>
+          </a:solidFill>
+          <a:ln w="12700">
+            <a:solidFill>
+              <a:srgbClr val="DBD6D6"/>
+            </a:solidFill>
+          </a:ln>
+          <a:effectLst/>
+        </p:spPr>
+        <p:style>
+          <a:lnRef idx="1">
+            <a:schemeClr val="accent1"/>
+          </a:lnRef>
+          <a:fillRef idx="3">
+            <a:schemeClr val="accent1"/>
+          </a:fillRef>
+          <a:effectRef idx="2">
+            <a:schemeClr val="accent1"/>
+          </a:effectRef>
+          <a:fontRef idx="minor">
+            <a:schemeClr val="lt1"/>
+          </a:fontRef>
+        </p:style>
+        <p:txBody>
+          <a:bodyPr rtlCol="0" anchor="ctr"/>
+          <a:lstStyle/>
+          <a:p>
+            <a:pPr algn="ctr"/>
+          </a:p>
+        </p:txBody>
+      </p:sp>
+      <p:sp>
+        <p:nvSpPr>
+          <p:cNvPr id="34" name="Oval 33"/>
+          <p:cNvSpPr/>
+          <p:nvPr/>
+        </p:nvSpPr>
+        <p:spPr>
+          <a:xfrm>
+            <a:off x="603504" y="3831336"/>
+            <a:ext cx="274320" cy="274320"/>
+          </a:xfrm>
+          <a:prstGeom prst="ellipse">
+            <a:avLst/>
+          </a:prstGeom>
+          <a:solidFill>
+            <a:srgbClr val="C00000"/>
           </a:solidFill>
           <a:ln>
             <a:noFill/>
@@ -9142,14 +9292,49 @@
       </p:sp>
       <p:sp>
         <p:nvSpPr>
-          <p:cNvPr id="59" name="TextBox 58"/>
+          <p:cNvPr id="35" name="TextBox 34"/>
           <p:cNvSpPr txBox="1"/>
           <p:nvPr/>
         </p:nvSpPr>
         <p:spPr>
           <a:xfrm>
-            <a:off x="8275320" y="2807208"/>
-            <a:ext cx="502920" cy="228600"/>
+            <a:off x="603504" y="3831336"/>
+            <a:ext cx="274320" cy="274320"/>
+          </a:xfrm>
+          <a:prstGeom prst="rect">
+            <a:avLst/>
+          </a:prstGeom>
+          <a:noFill/>
+        </p:spPr>
+        <p:txBody>
+          <a:bodyPr wrap="square" lIns="0" rIns="0" tIns="0" bIns="0" anchor="ctr">
+            <a:spAutoFit/>
+          </a:bodyPr>
+          <a:lstStyle/>
+          <a:p>
+            <a:pPr algn="ctr"/>
+            <a:r>
+              <a:rPr sz="1150" b="1" i="0">
+                <a:solidFill>
+                  <a:srgbClr val="FFFFFF"/>
+                </a:solidFill>
+                <a:latin typeface="Calibri"/>
+              </a:rPr>
+              <a:t>3</a:t>
+            </a:r>
+          </a:p>
+        </p:txBody>
+      </p:sp>
+      <p:sp>
+        <p:nvSpPr>
+          <p:cNvPr id="36" name="TextBox 35"/>
+          <p:cNvSpPr txBox="1"/>
+          <p:nvPr/>
+        </p:nvSpPr>
+        <p:spPr>
+          <a:xfrm>
+            <a:off x="969264" y="3822191"/>
+            <a:ext cx="3337559" cy="256032"/>
           </a:xfrm>
           <a:prstGeom prst="rect">
             <a:avLst/>
@@ -9162,29 +9347,38 @@
           </a:bodyPr>
           <a:lstStyle/>
           <a:p>
-            <a:pPr algn="r"/>
-            <a:r>
-              <a:rPr sz="1050" b="1" i="0">
-                <a:solidFill>
-                  <a:srgbClr val="1F1F1F"/>
+            <a:pPr algn="l"/>
+            <a:r>
+              <a:rPr sz="1250" b="1" i="0">
+                <a:solidFill>
+                  <a:srgbClr val="B7202E"/>
                 </a:solidFill>
                 <a:latin typeface="Calibri"/>
               </a:rPr>
-              <a:t>25%</a:t>
-            </a:r>
-          </a:p>
-        </p:txBody>
-      </p:sp>
-      <p:sp>
-        <p:nvSpPr>
-          <p:cNvPr id="60" name="TextBox 59"/>
+              <a:t>MongoDB + Mongoose</a:t>
+            </a:r>
+            <a:r>
+              <a:rPr sz="950" b="0" i="0">
+                <a:solidFill>
+                  <a:srgbClr val="7A7A7A"/>
+                </a:solidFill>
+                <a:latin typeface="Calibri"/>
+              </a:rPr>
+              <a:t>   data</a:t>
+            </a:r>
+          </a:p>
+        </p:txBody>
+      </p:sp>
+      <p:sp>
+        <p:nvSpPr>
+          <p:cNvPr id="37" name="TextBox 36"/>
           <p:cNvSpPr txBox="1"/>
           <p:nvPr/>
         </p:nvSpPr>
         <p:spPr>
           <a:xfrm>
-            <a:off x="4754880" y="3072384"/>
-            <a:ext cx="1463040" cy="228600"/>
+            <a:off x="969264" y="4123944"/>
+            <a:ext cx="3319272" cy="548640"/>
           </a:xfrm>
           <a:prstGeom prst="rect">
             <a:avLst/>
@@ -9197,37 +9391,245 @@
           </a:bodyPr>
           <a:lstStyle/>
           <a:p>
-            <a:pPr algn="l"/>
-            <a:r>
-              <a:rPr sz="1050" b="0" i="0">
-                <a:solidFill>
-                  <a:srgbClr val="1F1F1F"/>
+            <a:pPr algn="l">
+              <a:lnSpc>
+                <a:spcPct val="100000"/>
+              </a:lnSpc>
+            </a:pPr>
+            <a:r>
+              <a:rPr sz="950" b="0" i="0">
+                <a:solidFill>
+                  <a:srgbClr val="4A4A4A"/>
                 </a:solidFill>
                 <a:latin typeface="Calibri"/>
               </a:rPr>
-              <a:t>Capacity fit</a:t>
-            </a:r>
-          </a:p>
-        </p:txBody>
-      </p:sp>
-      <p:sp>
-        <p:nvSpPr>
-          <p:cNvPr id="61" name="Rounded Rectangle 60"/>
+              <a:t>organisations  ·  listings  ·  offers
+Schemas, validators and aggregation pipelines</a:t>
+            </a:r>
+          </a:p>
+        </p:txBody>
+      </p:sp>
+      <p:sp>
+        <p:nvSpPr>
+          <p:cNvPr id="38" name="Rounded Rectangle 37"/>
           <p:cNvSpPr/>
           <p:nvPr/>
         </p:nvSpPr>
         <p:spPr>
           <a:xfrm>
-            <a:off x="6217920" y="3136391"/>
-            <a:ext cx="2011680" cy="100584"/>
+            <a:off x="457200" y="4956048"/>
+            <a:ext cx="3977639" cy="841248"/>
           </a:xfrm>
           <a:prstGeom prst="roundRect">
             <a:avLst>
-              <a:gd name="adj" fmla="val 50000"/>
+              <a:gd name="adj" fmla="val 8000"/>
             </a:avLst>
           </a:prstGeom>
           <a:solidFill>
-            <a:srgbClr val="EEE6E6"/>
+            <a:srgbClr val="F7F4F4"/>
+          </a:solidFill>
+          <a:ln w="12700">
+            <a:solidFill>
+              <a:srgbClr val="DBD6D6"/>
+            </a:solidFill>
+          </a:ln>
+          <a:effectLst/>
+        </p:spPr>
+        <p:style>
+          <a:lnRef idx="1">
+            <a:schemeClr val="accent1"/>
+          </a:lnRef>
+          <a:fillRef idx="3">
+            <a:schemeClr val="accent1"/>
+          </a:fillRef>
+          <a:effectRef idx="2">
+            <a:schemeClr val="accent1"/>
+          </a:effectRef>
+          <a:fontRef idx="minor">
+            <a:schemeClr val="lt1"/>
+          </a:fontRef>
+        </p:style>
+        <p:txBody>
+          <a:bodyPr rtlCol="0" anchor="ctr"/>
+          <a:lstStyle/>
+          <a:p>
+            <a:pPr algn="ctr"/>
+          </a:p>
+        </p:txBody>
+      </p:sp>
+      <p:sp>
+        <p:nvSpPr>
+          <p:cNvPr id="39" name="TextBox 38"/>
+          <p:cNvSpPr txBox="1"/>
+          <p:nvPr/>
+        </p:nvSpPr>
+        <p:spPr>
+          <a:xfrm>
+            <a:off x="621792" y="5065776"/>
+            <a:ext cx="3648456" cy="237744"/>
+          </a:xfrm>
+          <a:prstGeom prst="rect">
+            <a:avLst/>
+          </a:prstGeom>
+          <a:noFill/>
+        </p:spPr>
+        <p:txBody>
+          <a:bodyPr wrap="square" lIns="0" rIns="0" tIns="0" bIns="0" anchor="t">
+            <a:spAutoFit/>
+          </a:bodyPr>
+          <a:lstStyle/>
+          <a:p>
+            <a:pPr algn="l"/>
+            <a:r>
+              <a:rPr sz="1250" b="1" i="0">
+                <a:solidFill>
+                  <a:srgbClr val="B7202E"/>
+                </a:solidFill>
+                <a:latin typeface="Calibri"/>
+              </a:rPr>
+              <a:t>Security</a:t>
+            </a:r>
+          </a:p>
+        </p:txBody>
+      </p:sp>
+      <p:sp>
+        <p:nvSpPr>
+          <p:cNvPr id="40" name="TextBox 39"/>
+          <p:cNvSpPr txBox="1"/>
+          <p:nvPr/>
+        </p:nvSpPr>
+        <p:spPr>
+          <a:xfrm>
+            <a:off x="621792" y="5340096"/>
+            <a:ext cx="3648456" cy="457200"/>
+          </a:xfrm>
+          <a:prstGeom prst="rect">
+            <a:avLst/>
+          </a:prstGeom>
+          <a:noFill/>
+        </p:spPr>
+        <p:txBody>
+          <a:bodyPr wrap="square" lIns="0" rIns="0" tIns="0" bIns="0" anchor="t">
+            <a:spAutoFit/>
+          </a:bodyPr>
+          <a:lstStyle/>
+          <a:p>
+            <a:pPr algn="l">
+              <a:lnSpc>
+                <a:spcPct val="100000"/>
+              </a:lnSpc>
+            </a:pPr>
+            <a:r>
+              <a:rPr sz="950" b="0" i="0">
+                <a:solidFill>
+                  <a:srgbClr val="4A4A4A"/>
+                </a:solidFill>
+                <a:latin typeface="Calibri"/>
+              </a:rPr>
+              <a:t>bcrypt password hashing · the owner comes from the token, never the request body · owner-only routes · .env kept out of Git</a:t>
+            </a:r>
+          </a:p>
+        </p:txBody>
+      </p:sp>
+      <p:sp>
+        <p:nvSpPr>
+          <p:cNvPr id="41" name="TextBox 40"/>
+          <p:cNvSpPr txBox="1"/>
+          <p:nvPr/>
+        </p:nvSpPr>
+        <p:spPr>
+          <a:xfrm>
+            <a:off x="4800600" y="822960"/>
+            <a:ext cx="3977639" cy="292608"/>
+          </a:xfrm>
+          <a:prstGeom prst="rect">
+            <a:avLst/>
+          </a:prstGeom>
+          <a:noFill/>
+        </p:spPr>
+        <p:txBody>
+          <a:bodyPr wrap="square" lIns="0" rIns="0" tIns="0" bIns="0" anchor="t">
+            <a:spAutoFit/>
+          </a:bodyPr>
+          <a:lstStyle/>
+          <a:p>
+            <a:pPr algn="l"/>
+            <a:r>
+              <a:rPr sz="1500" b="1" i="0">
+                <a:solidFill>
+                  <a:srgbClr val="1F1F1F"/>
+                </a:solidFill>
+                <a:latin typeface="Calibri"/>
+              </a:rPr>
+              <a:t>How a listing is matched</a:t>
+            </a:r>
+          </a:p>
+        </p:txBody>
+      </p:sp>
+      <p:sp>
+        <p:nvSpPr>
+          <p:cNvPr id="42" name="Rounded Rectangle 41"/>
+          <p:cNvSpPr/>
+          <p:nvPr/>
+        </p:nvSpPr>
+        <p:spPr>
+          <a:xfrm>
+            <a:off x="4800600" y="1170432"/>
+            <a:ext cx="932688" cy="932688"/>
+          </a:xfrm>
+          <a:prstGeom prst="roundRect">
+            <a:avLst>
+              <a:gd name="adj" fmla="val 11000"/>
+            </a:avLst>
+          </a:prstGeom>
+          <a:solidFill>
+            <a:srgbClr val="F7F4F4"/>
+          </a:solidFill>
+          <a:ln w="12700">
+            <a:solidFill>
+              <a:srgbClr val="DBD6D6"/>
+            </a:solidFill>
+          </a:ln>
+          <a:effectLst/>
+        </p:spPr>
+        <p:style>
+          <a:lnRef idx="1">
+            <a:schemeClr val="accent1"/>
+          </a:lnRef>
+          <a:fillRef idx="3">
+            <a:schemeClr val="accent1"/>
+          </a:fillRef>
+          <a:effectRef idx="2">
+            <a:schemeClr val="accent1"/>
+          </a:effectRef>
+          <a:fontRef idx="minor">
+            <a:schemeClr val="lt1"/>
+          </a:fontRef>
+        </p:style>
+        <p:txBody>
+          <a:bodyPr rtlCol="0" anchor="ctr"/>
+          <a:lstStyle/>
+          <a:p>
+            <a:pPr algn="ctr"/>
+          </a:p>
+        </p:txBody>
+      </p:sp>
+      <p:sp>
+        <p:nvSpPr>
+          <p:cNvPr id="43" name="Oval 42"/>
+          <p:cNvSpPr/>
+          <p:nvPr/>
+        </p:nvSpPr>
+        <p:spPr>
+          <a:xfrm>
+            <a:off x="5143500" y="1243584"/>
+            <a:ext cx="246888" cy="246888"/>
+          </a:xfrm>
+          <a:prstGeom prst="ellipse">
+            <a:avLst/>
+          </a:prstGeom>
+          <a:solidFill>
+            <a:srgbClr val="C00000"/>
           </a:solidFill>
           <a:ln>
             <a:noFill/>
@@ -9258,22 +9660,178 @@
       </p:sp>
       <p:sp>
         <p:nvSpPr>
-          <p:cNvPr id="62" name="Rounded Rectangle 61"/>
+          <p:cNvPr id="44" name="TextBox 43"/>
+          <p:cNvSpPr txBox="1"/>
+          <p:nvPr/>
+        </p:nvSpPr>
+        <p:spPr>
+          <a:xfrm>
+            <a:off x="5143500" y="1243584"/>
+            <a:ext cx="246888" cy="246888"/>
+          </a:xfrm>
+          <a:prstGeom prst="rect">
+            <a:avLst/>
+          </a:prstGeom>
+          <a:noFill/>
+        </p:spPr>
+        <p:txBody>
+          <a:bodyPr wrap="square" lIns="0" rIns="0" tIns="0" bIns="0" anchor="ctr">
+            <a:spAutoFit/>
+          </a:bodyPr>
+          <a:lstStyle/>
+          <a:p>
+            <a:pPr algn="ctr"/>
+            <a:r>
+              <a:rPr sz="1050" b="1" i="0">
+                <a:solidFill>
+                  <a:srgbClr val="FFFFFF"/>
+                </a:solidFill>
+                <a:latin typeface="Calibri"/>
+              </a:rPr>
+              <a:t>1</a:t>
+            </a:r>
+          </a:p>
+        </p:txBody>
+      </p:sp>
+      <p:sp>
+        <p:nvSpPr>
+          <p:cNvPr id="45" name="TextBox 44"/>
+          <p:cNvSpPr txBox="1"/>
+          <p:nvPr/>
+        </p:nvSpPr>
+        <p:spPr>
+          <a:xfrm>
+            <a:off x="4800600" y="1536192"/>
+            <a:ext cx="932688" cy="201168"/>
+          </a:xfrm>
+          <a:prstGeom prst="rect">
+            <a:avLst/>
+          </a:prstGeom>
+          <a:noFill/>
+        </p:spPr>
+        <p:txBody>
+          <a:bodyPr wrap="square" lIns="0" rIns="0" tIns="0" bIns="0" anchor="t">
+            <a:spAutoFit/>
+          </a:bodyPr>
+          <a:lstStyle/>
+          <a:p>
+            <a:pPr algn="ctr"/>
+            <a:r>
+              <a:rPr sz="1050" b="1" i="0">
+                <a:solidFill>
+                  <a:srgbClr val="C00000"/>
+                </a:solidFill>
+                <a:latin typeface="Calibri"/>
+              </a:rPr>
+              <a:t>Filter</a:t>
+            </a:r>
+          </a:p>
+        </p:txBody>
+      </p:sp>
+      <p:sp>
+        <p:nvSpPr>
+          <p:cNvPr id="46" name="TextBox 45"/>
+          <p:cNvSpPr txBox="1"/>
+          <p:nvPr/>
+        </p:nvSpPr>
+        <p:spPr>
+          <a:xfrm>
+            <a:off x="4837176" y="1755648"/>
+            <a:ext cx="859536" cy="329184"/>
+          </a:xfrm>
+          <a:prstGeom prst="rect">
+            <a:avLst/>
+          </a:prstGeom>
+          <a:noFill/>
+        </p:spPr>
+        <p:txBody>
+          <a:bodyPr wrap="square" lIns="0" rIns="0" tIns="0" bIns="0" anchor="t">
+            <a:spAutoFit/>
+          </a:bodyPr>
+          <a:lstStyle/>
+          <a:p>
+            <a:pPr algn="ctr">
+              <a:lnSpc>
+                <a:spcPct val="95000"/>
+              </a:lnSpc>
+            </a:pPr>
+            <a:r>
+              <a:rPr sz="850" b="0" i="0">
+                <a:solidFill>
+                  <a:srgbClr val="4A4A4A"/>
+                </a:solidFill>
+                <a:latin typeface="Calibri"/>
+              </a:rPr>
+              <a:t>wrong food,
+no room, too far</a:t>
+            </a:r>
+          </a:p>
+        </p:txBody>
+      </p:sp>
+      <p:sp>
+        <p:nvSpPr>
+          <p:cNvPr id="47" name="Rounded Rectangle 46"/>
           <p:cNvSpPr/>
           <p:nvPr/>
         </p:nvSpPr>
         <p:spPr>
           <a:xfrm>
-            <a:off x="6217920" y="3136391"/>
-            <a:ext cx="1149531" cy="100584"/>
+            <a:off x="5815584" y="1170432"/>
+            <a:ext cx="932688" cy="932688"/>
           </a:xfrm>
           <a:prstGeom prst="roundRect">
             <a:avLst>
-              <a:gd name="adj" fmla="val 50000"/>
+              <a:gd name="adj" fmla="val 11000"/>
             </a:avLst>
           </a:prstGeom>
           <a:solidFill>
-            <a:srgbClr val="B7202E"/>
+            <a:srgbClr val="F7F4F4"/>
+          </a:solidFill>
+          <a:ln w="12700">
+            <a:solidFill>
+              <a:srgbClr val="DBD6D6"/>
+            </a:solidFill>
+          </a:ln>
+          <a:effectLst/>
+        </p:spPr>
+        <p:style>
+          <a:lnRef idx="1">
+            <a:schemeClr val="accent1"/>
+          </a:lnRef>
+          <a:fillRef idx="3">
+            <a:schemeClr val="accent1"/>
+          </a:fillRef>
+          <a:effectRef idx="2">
+            <a:schemeClr val="accent1"/>
+          </a:effectRef>
+          <a:fontRef idx="minor">
+            <a:schemeClr val="lt1"/>
+          </a:fontRef>
+        </p:style>
+        <p:txBody>
+          <a:bodyPr rtlCol="0" anchor="ctr"/>
+          <a:lstStyle/>
+          <a:p>
+            <a:pPr algn="ctr"/>
+          </a:p>
+        </p:txBody>
+      </p:sp>
+      <p:sp>
+        <p:nvSpPr>
+          <p:cNvPr id="48" name="Oval 47"/>
+          <p:cNvSpPr/>
+          <p:nvPr/>
+        </p:nvSpPr>
+        <p:spPr>
+          <a:xfrm>
+            <a:off x="6158484" y="1243584"/>
+            <a:ext cx="246888" cy="246888"/>
+          </a:xfrm>
+          <a:prstGeom prst="ellipse">
+            <a:avLst/>
+          </a:prstGeom>
+          <a:solidFill>
+            <a:srgbClr val="C00000"/>
           </a:solidFill>
           <a:ln>
             <a:noFill/>
@@ -9304,14 +9862,49 @@
       </p:sp>
       <p:sp>
         <p:nvSpPr>
-          <p:cNvPr id="63" name="TextBox 62"/>
+          <p:cNvPr id="49" name="TextBox 48"/>
           <p:cNvSpPr txBox="1"/>
           <p:nvPr/>
         </p:nvSpPr>
         <p:spPr>
           <a:xfrm>
-            <a:off x="8275320" y="3072384"/>
-            <a:ext cx="502920" cy="228600"/>
+            <a:off x="6158484" y="1243584"/>
+            <a:ext cx="246888" cy="246888"/>
+          </a:xfrm>
+          <a:prstGeom prst="rect">
+            <a:avLst/>
+          </a:prstGeom>
+          <a:noFill/>
+        </p:spPr>
+        <p:txBody>
+          <a:bodyPr wrap="square" lIns="0" rIns="0" tIns="0" bIns="0" anchor="ctr">
+            <a:spAutoFit/>
+          </a:bodyPr>
+          <a:lstStyle/>
+          <a:p>
+            <a:pPr algn="ctr"/>
+            <a:r>
+              <a:rPr sz="1050" b="1" i="0">
+                <a:solidFill>
+                  <a:srgbClr val="FFFFFF"/>
+                </a:solidFill>
+                <a:latin typeface="Calibri"/>
+              </a:rPr>
+              <a:t>2</a:t>
+            </a:r>
+          </a:p>
+        </p:txBody>
+      </p:sp>
+      <p:sp>
+        <p:nvSpPr>
+          <p:cNvPr id="50" name="TextBox 49"/>
+          <p:cNvSpPr txBox="1"/>
+          <p:nvPr/>
+        </p:nvSpPr>
+        <p:spPr>
+          <a:xfrm>
+            <a:off x="5815584" y="1536192"/>
+            <a:ext cx="932688" cy="201168"/>
           </a:xfrm>
           <a:prstGeom prst="rect">
             <a:avLst/>
@@ -9324,29 +9917,29 @@
           </a:bodyPr>
           <a:lstStyle/>
           <a:p>
-            <a:pPr algn="r"/>
+            <a:pPr algn="ctr"/>
             <a:r>
               <a:rPr sz="1050" b="1" i="0">
                 <a:solidFill>
-                  <a:srgbClr val="1F1F1F"/>
+                  <a:srgbClr val="C00000"/>
                 </a:solidFill>
                 <a:latin typeface="Calibri"/>
               </a:rPr>
-              <a:t>20%</a:t>
-            </a:r>
-          </a:p>
-        </p:txBody>
-      </p:sp>
-      <p:sp>
-        <p:nvSpPr>
-          <p:cNvPr id="64" name="TextBox 63"/>
+              <a:t>Score</a:t>
+            </a:r>
+          </a:p>
+        </p:txBody>
+      </p:sp>
+      <p:sp>
+        <p:nvSpPr>
+          <p:cNvPr id="51" name="TextBox 50"/>
           <p:cNvSpPr txBox="1"/>
           <p:nvPr/>
         </p:nvSpPr>
         <p:spPr>
           <a:xfrm>
-            <a:off x="4754880" y="3337559"/>
-            <a:ext cx="1463040" cy="228600"/>
+            <a:off x="5852160" y="1755648"/>
+            <a:ext cx="859536" cy="329184"/>
           </a:xfrm>
           <a:prstGeom prst="rect">
             <a:avLst/>
@@ -9359,37 +9952,88 @@
           </a:bodyPr>
           <a:lstStyle/>
           <a:p>
-            <a:pPr algn="l"/>
-            <a:r>
-              <a:rPr sz="1050" b="0" i="0">
-                <a:solidFill>
-                  <a:srgbClr val="1F1F1F"/>
+            <a:pPr algn="ctr">
+              <a:lnSpc>
+                <a:spcPct val="95000"/>
+              </a:lnSpc>
+            </a:pPr>
+            <a:r>
+              <a:rPr sz="850" b="0" i="0">
+                <a:solidFill>
+                  <a:srgbClr val="4A4A4A"/>
                 </a:solidFill>
                 <a:latin typeface="Calibri"/>
               </a:rPr>
-              <a:t>Food type</a:t>
-            </a:r>
-          </a:p>
-        </p:txBody>
-      </p:sp>
-      <p:sp>
-        <p:nvSpPr>
-          <p:cNvPr id="65" name="Rounded Rectangle 64"/>
+              <a:t>5 weighted
+factors</a:t>
+            </a:r>
+          </a:p>
+        </p:txBody>
+      </p:sp>
+      <p:sp>
+        <p:nvSpPr>
+          <p:cNvPr id="52" name="Rounded Rectangle 51"/>
           <p:cNvSpPr/>
           <p:nvPr/>
         </p:nvSpPr>
         <p:spPr>
           <a:xfrm>
-            <a:off x="6217920" y="3401567"/>
-            <a:ext cx="2011680" cy="100584"/>
+            <a:off x="6830568" y="1170432"/>
+            <a:ext cx="932688" cy="932688"/>
           </a:xfrm>
           <a:prstGeom prst="roundRect">
             <a:avLst>
-              <a:gd name="adj" fmla="val 50000"/>
+              <a:gd name="adj" fmla="val 11000"/>
             </a:avLst>
           </a:prstGeom>
           <a:solidFill>
-            <a:srgbClr val="EEE6E6"/>
+            <a:srgbClr val="F7F4F4"/>
+          </a:solidFill>
+          <a:ln w="12700">
+            <a:solidFill>
+              <a:srgbClr val="DBD6D6"/>
+            </a:solidFill>
+          </a:ln>
+          <a:effectLst/>
+        </p:spPr>
+        <p:style>
+          <a:lnRef idx="1">
+            <a:schemeClr val="accent1"/>
+          </a:lnRef>
+          <a:fillRef idx="3">
+            <a:schemeClr val="accent1"/>
+          </a:fillRef>
+          <a:effectRef idx="2">
+            <a:schemeClr val="accent1"/>
+          </a:effectRef>
+          <a:fontRef idx="minor">
+            <a:schemeClr val="lt1"/>
+          </a:fontRef>
+        </p:style>
+        <p:txBody>
+          <a:bodyPr rtlCol="0" anchor="ctr"/>
+          <a:lstStyle/>
+          <a:p>
+            <a:pPr algn="ctr"/>
+          </a:p>
+        </p:txBody>
+      </p:sp>
+      <p:sp>
+        <p:nvSpPr>
+          <p:cNvPr id="53" name="Oval 52"/>
+          <p:cNvSpPr/>
+          <p:nvPr/>
+        </p:nvSpPr>
+        <p:spPr>
+          <a:xfrm>
+            <a:off x="7173468" y="1243584"/>
+            <a:ext cx="246888" cy="246888"/>
+          </a:xfrm>
+          <a:prstGeom prst="ellipse">
+            <a:avLst/>
+          </a:prstGeom>
+          <a:solidFill>
+            <a:srgbClr val="C00000"/>
           </a:solidFill>
           <a:ln>
             <a:noFill/>
@@ -9420,22 +10064,178 @@
       </p:sp>
       <p:sp>
         <p:nvSpPr>
-          <p:cNvPr id="66" name="Rounded Rectangle 65"/>
+          <p:cNvPr id="54" name="TextBox 53"/>
+          <p:cNvSpPr txBox="1"/>
+          <p:nvPr/>
+        </p:nvSpPr>
+        <p:spPr>
+          <a:xfrm>
+            <a:off x="7173468" y="1243584"/>
+            <a:ext cx="246888" cy="246888"/>
+          </a:xfrm>
+          <a:prstGeom prst="rect">
+            <a:avLst/>
+          </a:prstGeom>
+          <a:noFill/>
+        </p:spPr>
+        <p:txBody>
+          <a:bodyPr wrap="square" lIns="0" rIns="0" tIns="0" bIns="0" anchor="ctr">
+            <a:spAutoFit/>
+          </a:bodyPr>
+          <a:lstStyle/>
+          <a:p>
+            <a:pPr algn="ctr"/>
+            <a:r>
+              <a:rPr sz="1050" b="1" i="0">
+                <a:solidFill>
+                  <a:srgbClr val="FFFFFF"/>
+                </a:solidFill>
+                <a:latin typeface="Calibri"/>
+              </a:rPr>
+              <a:t>3</a:t>
+            </a:r>
+          </a:p>
+        </p:txBody>
+      </p:sp>
+      <p:sp>
+        <p:nvSpPr>
+          <p:cNvPr id="55" name="TextBox 54"/>
+          <p:cNvSpPr txBox="1"/>
+          <p:nvPr/>
+        </p:nvSpPr>
+        <p:spPr>
+          <a:xfrm>
+            <a:off x="6830568" y="1536192"/>
+            <a:ext cx="932688" cy="201168"/>
+          </a:xfrm>
+          <a:prstGeom prst="rect">
+            <a:avLst/>
+          </a:prstGeom>
+          <a:noFill/>
+        </p:spPr>
+        <p:txBody>
+          <a:bodyPr wrap="square" lIns="0" rIns="0" tIns="0" bIns="0" anchor="t">
+            <a:spAutoFit/>
+          </a:bodyPr>
+          <a:lstStyle/>
+          <a:p>
+            <a:pPr algn="ctr"/>
+            <a:r>
+              <a:rPr sz="1050" b="1" i="0">
+                <a:solidFill>
+                  <a:srgbClr val="C00000"/>
+                </a:solidFill>
+                <a:latin typeface="Calibri"/>
+              </a:rPr>
+              <a:t>Offer</a:t>
+            </a:r>
+          </a:p>
+        </p:txBody>
+      </p:sp>
+      <p:sp>
+        <p:nvSpPr>
+          <p:cNvPr id="56" name="TextBox 55"/>
+          <p:cNvSpPr txBox="1"/>
+          <p:nvPr/>
+        </p:nvSpPr>
+        <p:spPr>
+          <a:xfrm>
+            <a:off x="6867144" y="1755648"/>
+            <a:ext cx="859536" cy="329184"/>
+          </a:xfrm>
+          <a:prstGeom prst="rect">
+            <a:avLst/>
+          </a:prstGeom>
+          <a:noFill/>
+        </p:spPr>
+        <p:txBody>
+          <a:bodyPr wrap="square" lIns="0" rIns="0" tIns="0" bIns="0" anchor="t">
+            <a:spAutoFit/>
+          </a:bodyPr>
+          <a:lstStyle/>
+          <a:p>
+            <a:pPr algn="ctr">
+              <a:lnSpc>
+                <a:spcPct val="95000"/>
+              </a:lnSpc>
+            </a:pPr>
+            <a:r>
+              <a:rPr sz="850" b="0" i="0">
+                <a:solidFill>
+                  <a:srgbClr val="4A4A4A"/>
+                </a:solidFill>
+                <a:latin typeface="Calibri"/>
+              </a:rPr>
+              <a:t>best first,
+10 min to reply</a:t>
+            </a:r>
+          </a:p>
+        </p:txBody>
+      </p:sp>
+      <p:sp>
+        <p:nvSpPr>
+          <p:cNvPr id="57" name="Rounded Rectangle 56"/>
           <p:cNvSpPr/>
           <p:nvPr/>
         </p:nvSpPr>
         <p:spPr>
           <a:xfrm>
-            <a:off x="6217920" y="3401567"/>
-            <a:ext cx="574765" cy="100584"/>
+            <a:off x="7845552" y="1170432"/>
+            <a:ext cx="932688" cy="932688"/>
           </a:xfrm>
           <a:prstGeom prst="roundRect">
             <a:avLst>
-              <a:gd name="adj" fmla="val 50000"/>
+              <a:gd name="adj" fmla="val 11000"/>
             </a:avLst>
           </a:prstGeom>
           <a:solidFill>
-            <a:srgbClr val="A6A6A6"/>
+            <a:srgbClr val="F7F4F4"/>
+          </a:solidFill>
+          <a:ln w="12700">
+            <a:solidFill>
+              <a:srgbClr val="DBD6D6"/>
+            </a:solidFill>
+          </a:ln>
+          <a:effectLst/>
+        </p:spPr>
+        <p:style>
+          <a:lnRef idx="1">
+            <a:schemeClr val="accent1"/>
+          </a:lnRef>
+          <a:fillRef idx="3">
+            <a:schemeClr val="accent1"/>
+          </a:fillRef>
+          <a:effectRef idx="2">
+            <a:schemeClr val="accent1"/>
+          </a:effectRef>
+          <a:fontRef idx="minor">
+            <a:schemeClr val="lt1"/>
+          </a:fontRef>
+        </p:style>
+        <p:txBody>
+          <a:bodyPr rtlCol="0" anchor="ctr"/>
+          <a:lstStyle/>
+          <a:p>
+            <a:pPr algn="ctr"/>
+          </a:p>
+        </p:txBody>
+      </p:sp>
+      <p:sp>
+        <p:nvSpPr>
+          <p:cNvPr id="58" name="Oval 57"/>
+          <p:cNvSpPr/>
+          <p:nvPr/>
+        </p:nvSpPr>
+        <p:spPr>
+          <a:xfrm>
+            <a:off x="8188452" y="1243584"/>
+            <a:ext cx="246888" cy="246888"/>
+          </a:xfrm>
+          <a:prstGeom prst="ellipse">
+            <a:avLst/>
+          </a:prstGeom>
+          <a:solidFill>
+            <a:srgbClr val="C00000"/>
           </a:solidFill>
           <a:ln>
             <a:noFill/>
@@ -9466,14 +10266,49 @@
       </p:sp>
       <p:sp>
         <p:nvSpPr>
-          <p:cNvPr id="67" name="TextBox 66"/>
+          <p:cNvPr id="59" name="TextBox 58"/>
           <p:cNvSpPr txBox="1"/>
           <p:nvPr/>
         </p:nvSpPr>
         <p:spPr>
           <a:xfrm>
-            <a:off x="8275320" y="3337559"/>
-            <a:ext cx="502920" cy="228600"/>
+            <a:off x="8188452" y="1243584"/>
+            <a:ext cx="246888" cy="246888"/>
+          </a:xfrm>
+          <a:prstGeom prst="rect">
+            <a:avLst/>
+          </a:prstGeom>
+          <a:noFill/>
+        </p:spPr>
+        <p:txBody>
+          <a:bodyPr wrap="square" lIns="0" rIns="0" tIns="0" bIns="0" anchor="ctr">
+            <a:spAutoFit/>
+          </a:bodyPr>
+          <a:lstStyle/>
+          <a:p>
+            <a:pPr algn="ctr"/>
+            <a:r>
+              <a:rPr sz="1050" b="1" i="0">
+                <a:solidFill>
+                  <a:srgbClr val="FFFFFF"/>
+                </a:solidFill>
+                <a:latin typeface="Calibri"/>
+              </a:rPr>
+              <a:t>4</a:t>
+            </a:r>
+          </a:p>
+        </p:txBody>
+      </p:sp>
+      <p:sp>
+        <p:nvSpPr>
+          <p:cNvPr id="60" name="TextBox 59"/>
+          <p:cNvSpPr txBox="1"/>
+          <p:nvPr/>
+        </p:nvSpPr>
+        <p:spPr>
+          <a:xfrm>
+            <a:off x="7845552" y="1536192"/>
+            <a:ext cx="932688" cy="201168"/>
           </a:xfrm>
           <a:prstGeom prst="rect">
             <a:avLst/>
@@ -9486,29 +10321,29 @@
           </a:bodyPr>
           <a:lstStyle/>
           <a:p>
-            <a:pPr algn="r"/>
+            <a:pPr algn="ctr"/>
             <a:r>
               <a:rPr sz="1050" b="1" i="0">
                 <a:solidFill>
-                  <a:srgbClr val="1F1F1F"/>
+                  <a:srgbClr val="C00000"/>
                 </a:solidFill>
                 <a:latin typeface="Calibri"/>
               </a:rPr>
-              <a:t>10%</a:t>
-            </a:r>
-          </a:p>
-        </p:txBody>
-      </p:sp>
-      <p:sp>
-        <p:nvSpPr>
-          <p:cNvPr id="68" name="TextBox 67"/>
+              <a:t>Cascade</a:t>
+            </a:r>
+          </a:p>
+        </p:txBody>
+      </p:sp>
+      <p:sp>
+        <p:nvSpPr>
+          <p:cNvPr id="61" name="TextBox 60"/>
           <p:cNvSpPr txBox="1"/>
           <p:nvPr/>
         </p:nvSpPr>
         <p:spPr>
           <a:xfrm>
-            <a:off x="4754880" y="3602735"/>
-            <a:ext cx="1463040" cy="228600"/>
+            <a:off x="7882127" y="1755648"/>
+            <a:ext cx="859536" cy="329184"/>
           </a:xfrm>
           <a:prstGeom prst="rect">
             <a:avLst/>
@@ -9521,40 +10356,100 @@
           </a:bodyPr>
           <a:lstStyle/>
           <a:p>
-            <a:pPr algn="l"/>
-            <a:r>
-              <a:rPr sz="1050" b="0" i="0">
-                <a:solidFill>
-                  <a:srgbClr val="1F1F1F"/>
+            <a:pPr algn="ctr">
+              <a:lnSpc>
+                <a:spcPct val="95000"/>
+              </a:lnSpc>
+            </a:pPr>
+            <a:r>
+              <a:rPr sz="850" b="0" i="0">
+                <a:solidFill>
+                  <a:srgbClr val="4A4A4A"/>
                 </a:solidFill>
                 <a:latin typeface="Calibri"/>
               </a:rPr>
-              <a:t>Reliability</a:t>
-            </a:r>
-          </a:p>
-        </p:txBody>
-      </p:sp>
-      <p:sp>
-        <p:nvSpPr>
-          <p:cNvPr id="69" name="Rounded Rectangle 68"/>
+              <a:t>re-score,
+ask the next</a:t>
+            </a:r>
+          </a:p>
+        </p:txBody>
+      </p:sp>
+      <p:sp>
+        <p:nvSpPr>
+          <p:cNvPr id="62" name="TextBox 61"/>
+          <p:cNvSpPr txBox="1"/>
+          <p:nvPr/>
+        </p:nvSpPr>
+        <p:spPr>
+          <a:xfrm>
+            <a:off x="4800600" y="2231136"/>
+            <a:ext cx="3977639" cy="237744"/>
+          </a:xfrm>
+          <a:prstGeom prst="rect">
+            <a:avLst/>
+          </a:prstGeom>
+          <a:noFill/>
+        </p:spPr>
+        <p:txBody>
+          <a:bodyPr wrap="square" lIns="0" rIns="0" tIns="0" bIns="0" anchor="t">
+            <a:spAutoFit/>
+          </a:bodyPr>
+          <a:lstStyle/>
+          <a:p>
+            <a:pPr algn="l"/>
+            <a:r>
+              <a:rPr sz="1200" b="1" i="0">
+                <a:solidFill>
+                  <a:srgbClr val="1F1F1F"/>
+                </a:solidFill>
+                <a:latin typeface="Calibri"/>
+              </a:rPr>
+              <a:t>Score weights</a:t>
+            </a:r>
+          </a:p>
+        </p:txBody>
+      </p:sp>
+      <p:graphicFrame>
+        <p:nvGraphicFramePr>
+          <p:cNvPr id="63" name="Chart 62"/>
+          <p:cNvGraphicFramePr>
+            <a:graphicFrameLocks noGrp="1"/>
+          </p:cNvGraphicFramePr>
+          <p:nvPr/>
+        </p:nvGraphicFramePr>
+        <p:xfrm>
+          <a:off x="4709160" y="2432304"/>
+          <a:ext cx="4160520" cy="1417320"/>
+        </p:xfrm>
+        <a:graphic>
+          <a:graphicData uri="http://schemas.openxmlformats.org/drawingml/2006/chart">
+            <c:chart xmlns:c="http://schemas.openxmlformats.org/drawingml/2006/chart" r:id="rId5"/>
+          </a:graphicData>
+        </a:graphic>
+      </p:graphicFrame>
+      <p:sp>
+        <p:nvSpPr>
+          <p:cNvPr id="64" name="Rounded Rectangle 63"/>
           <p:cNvSpPr/>
           <p:nvPr/>
         </p:nvSpPr>
         <p:spPr>
           <a:xfrm>
-            <a:off x="6217920" y="3666744"/>
-            <a:ext cx="2011680" cy="100584"/>
+            <a:off x="4800600" y="3959352"/>
+            <a:ext cx="3977639" cy="1755648"/>
           </a:xfrm>
           <a:prstGeom prst="roundRect">
             <a:avLst>
-              <a:gd name="adj" fmla="val 50000"/>
+              <a:gd name="adj" fmla="val 8000"/>
             </a:avLst>
           </a:prstGeom>
           <a:solidFill>
-            <a:srgbClr val="EEE6E6"/>
+            <a:srgbClr val="ECF5EE"/>
           </a:solidFill>
-          <a:ln>
-            <a:noFill/>
+          <a:ln w="12700">
+            <a:solidFill>
+              <a:srgbClr val="C6E2CB"/>
+            </a:solidFill>
           </a:ln>
           <a:effectLst/>
         </p:spPr>
@@ -9582,60 +10477,14 @@
       </p:sp>
       <p:sp>
         <p:nvSpPr>
-          <p:cNvPr id="70" name="Rounded Rectangle 69"/>
-          <p:cNvSpPr/>
-          <p:nvPr/>
-        </p:nvSpPr>
-        <p:spPr>
-          <a:xfrm>
-            <a:off x="6217920" y="3666744"/>
-            <a:ext cx="574765" cy="100584"/>
-          </a:xfrm>
-          <a:prstGeom prst="roundRect">
-            <a:avLst>
-              <a:gd name="adj" fmla="val 50000"/>
-            </a:avLst>
-          </a:prstGeom>
-          <a:solidFill>
-            <a:srgbClr val="A6A6A6"/>
-          </a:solidFill>
-          <a:ln>
-            <a:noFill/>
-          </a:ln>
-          <a:effectLst/>
-        </p:spPr>
-        <p:style>
-          <a:lnRef idx="1">
-            <a:schemeClr val="accent1"/>
-          </a:lnRef>
-          <a:fillRef idx="3">
-            <a:schemeClr val="accent1"/>
-          </a:fillRef>
-          <a:effectRef idx="2">
-            <a:schemeClr val="accent1"/>
-          </a:effectRef>
-          <a:fontRef idx="minor">
-            <a:schemeClr val="lt1"/>
-          </a:fontRef>
-        </p:style>
-        <p:txBody>
-          <a:bodyPr rtlCol="0" anchor="ctr"/>
-          <a:lstStyle/>
-          <a:p>
-            <a:pPr algn="ctr"/>
-          </a:p>
-        </p:txBody>
-      </p:sp>
-      <p:sp>
-        <p:nvSpPr>
-          <p:cNvPr id="71" name="TextBox 70"/>
+          <p:cNvPr id="65" name="TextBox 64"/>
           <p:cNvSpPr txBox="1"/>
           <p:nvPr/>
         </p:nvSpPr>
         <p:spPr>
           <a:xfrm>
-            <a:off x="8275320" y="3602735"/>
-            <a:ext cx="502920" cy="228600"/>
+            <a:off x="4965192" y="4059936"/>
+            <a:ext cx="3648456" cy="237744"/>
           </a:xfrm>
           <a:prstGeom prst="rect">
             <a:avLst/>
@@ -9648,112 +10497,38 @@
           </a:bodyPr>
           <a:lstStyle/>
           <a:p>
-            <a:pPr algn="r"/>
-            <a:r>
-              <a:rPr sz="1050" b="1" i="0">
+            <a:pPr algn="l"/>
+            <a:r>
+              <a:rPr sz="1150" b="1" i="0">
                 <a:solidFill>
                   <a:srgbClr val="1F1F1F"/>
                 </a:solidFill>
                 <a:latin typeface="Calibri"/>
               </a:rPr>
-              <a:t>10%</a:t>
-            </a:r>
-          </a:p>
-        </p:txBody>
-      </p:sp>
-      <p:sp>
-        <p:nvSpPr>
-          <p:cNvPr id="72" name="Rounded Rectangle 71"/>
-          <p:cNvSpPr/>
-          <p:nvPr/>
-        </p:nvSpPr>
-        <p:spPr>
-          <a:xfrm>
-            <a:off x="4754880" y="3950208"/>
-            <a:ext cx="4023360" cy="1764792"/>
-          </a:xfrm>
-          <a:prstGeom prst="roundRect">
-            <a:avLst>
-              <a:gd name="adj" fmla="val 8000"/>
-            </a:avLst>
-          </a:prstGeom>
-          <a:solidFill>
-            <a:srgbClr val="F6F3F3"/>
-          </a:solidFill>
-          <a:ln w="12700">
-            <a:solidFill>
-              <a:srgbClr val="D9D9D9"/>
-            </a:solidFill>
-          </a:ln>
-          <a:effectLst/>
-        </p:spPr>
-        <p:style>
-          <a:lnRef idx="1">
-            <a:schemeClr val="accent1"/>
-          </a:lnRef>
-          <a:fillRef idx="3">
-            <a:schemeClr val="accent1"/>
-          </a:fillRef>
-          <a:effectRef idx="2">
-            <a:schemeClr val="accent1"/>
-          </a:effectRef>
-          <a:fontRef idx="minor">
-            <a:schemeClr val="lt1"/>
-          </a:fontRef>
-        </p:style>
-        <p:txBody>
-          <a:bodyPr rtlCol="0" anchor="ctr"/>
-          <a:lstStyle/>
-          <a:p>
-            <a:pPr algn="ctr"/>
-          </a:p>
-        </p:txBody>
-      </p:sp>
-      <p:sp>
-        <p:nvSpPr>
-          <p:cNvPr id="73" name="TextBox 72"/>
-          <p:cNvSpPr txBox="1"/>
-          <p:nvPr/>
-        </p:nvSpPr>
-        <p:spPr>
-          <a:xfrm>
-            <a:off x="4937760" y="4059936"/>
-            <a:ext cx="3657600" cy="256032"/>
-          </a:xfrm>
-          <a:prstGeom prst="rect">
-            <a:avLst/>
-          </a:prstGeom>
-          <a:noFill/>
-        </p:spPr>
-        <p:txBody>
-          <a:bodyPr wrap="square" lIns="0" rIns="0" tIns="0" bIns="0" anchor="t">
-            <a:spAutoFit/>
-          </a:bodyPr>
-          <a:lstStyle/>
-          <a:p>
-            <a:pPr algn="l"/>
-            <a:r>
-              <a:rPr sz="1100" b="1" i="0">
-                <a:solidFill>
-                  <a:srgbClr val="1F1F1F"/>
+              <a:t>Worked example</a:t>
+            </a:r>
+            <a:r>
+              <a:rPr sz="1000" b="0" i="0">
+                <a:solidFill>
+                  <a:srgbClr val="4A4A4A"/>
                 </a:solidFill>
                 <a:latin typeface="Calibri"/>
               </a:rPr>
-              <a:t>Worked example · 40 veg meals, 3 hours</a:t>
-            </a:r>
-          </a:p>
-        </p:txBody>
-      </p:sp>
-      <p:sp>
-        <p:nvSpPr>
-          <p:cNvPr id="74" name="TextBox 73"/>
+              <a:t>   40 veg meals, 3 hours</a:t>
+            </a:r>
+          </a:p>
+        </p:txBody>
+      </p:sp>
+      <p:sp>
+        <p:nvSpPr>
+          <p:cNvPr id="66" name="TextBox 65"/>
           <p:cNvSpPr txBox="1"/>
           <p:nvPr/>
         </p:nvSpPr>
         <p:spPr>
           <a:xfrm>
-            <a:off x="4937760" y="4352544"/>
-            <a:ext cx="2743200" cy="868680"/>
+            <a:off x="4965192" y="4370832"/>
+            <a:ext cx="2514600" cy="822960"/>
           </a:xfrm>
           <a:prstGeom prst="rect">
             <a:avLst/>
@@ -9772,7 +10547,7 @@
               </a:spcAft>
             </a:pPr>
             <a:r>
-              <a:rPr sz="1050" b="0" i="0">
+              <a:rPr sz="1000" b="0" i="0">
                 <a:solidFill>
                   <a:srgbClr val="4A4A4A"/>
                 </a:solidFill>
@@ -9788,7 +10563,7 @@
               </a:spcAft>
             </a:pPr>
             <a:r>
-              <a:rPr sz="1050" b="0" i="0">
+              <a:rPr sz="1000" b="0" i="0">
                 <a:solidFill>
                   <a:srgbClr val="4A4A4A"/>
                 </a:solidFill>
@@ -9804,7 +10579,7 @@
               </a:spcAft>
             </a:pPr>
             <a:r>
-              <a:rPr sz="1000" b="0" i="1">
+              <a:rPr sz="950" b="0" i="1">
                 <a:solidFill>
                   <a:srgbClr val="7A7A7A"/>
                 </a:solidFill>
@@ -9817,14 +10592,14 @@
       </p:sp>
       <p:sp>
         <p:nvSpPr>
-          <p:cNvPr id="75" name="TextBox 74"/>
+          <p:cNvPr id="67" name="TextBox 66"/>
           <p:cNvSpPr txBox="1"/>
           <p:nvPr/>
         </p:nvSpPr>
         <p:spPr>
           <a:xfrm>
-            <a:off x="7589520" y="4315968"/>
-            <a:ext cx="1005840" cy="640080"/>
+            <a:off x="7498079" y="4315968"/>
+            <a:ext cx="1115568" cy="658368"/>
           </a:xfrm>
           <a:prstGeom prst="rect">
             <a:avLst/>
@@ -9839,7 +10614,7 @@
           <a:p>
             <a:pPr algn="r"/>
             <a:r>
-              <a:rPr sz="3400" b="1" i="0">
+              <a:rPr sz="3600" b="1" i="0">
                 <a:solidFill>
                   <a:srgbClr val="C00000"/>
                 </a:solidFill>
@@ -9852,14 +10627,14 @@
       </p:sp>
       <p:sp>
         <p:nvSpPr>
-          <p:cNvPr id="76" name="TextBox 75"/>
+          <p:cNvPr id="68" name="TextBox 67"/>
           <p:cNvSpPr txBox="1"/>
           <p:nvPr/>
         </p:nvSpPr>
         <p:spPr>
           <a:xfrm>
-            <a:off x="7589520" y="4901184"/>
-            <a:ext cx="1005840" cy="256032"/>
+            <a:off x="7498079" y="4919472"/>
+            <a:ext cx="1115568" cy="219456"/>
           </a:xfrm>
           <a:prstGeom prst="rect">
             <a:avLst/>
@@ -9874,27 +10649,27 @@
           <a:p>
             <a:pPr algn="r"/>
             <a:r>
-              <a:rPr sz="1050" b="0" i="0">
+              <a:rPr sz="950" b="0" i="0">
                 <a:solidFill>
                   <a:srgbClr val="7A7A7A"/>
                 </a:solidFill>
                 <a:latin typeface="Calibri"/>
               </a:rPr>
-              <a:t>/ 100</a:t>
-            </a:r>
-          </a:p>
-        </p:txBody>
-      </p:sp>
-      <p:sp>
-        <p:nvSpPr>
-          <p:cNvPr id="77" name="TextBox 76"/>
+              <a:t>out of 100</a:t>
+            </a:r>
+          </a:p>
+        </p:txBody>
+      </p:sp>
+      <p:sp>
+        <p:nvSpPr>
+          <p:cNvPr id="69" name="TextBox 68"/>
           <p:cNvSpPr txBox="1"/>
           <p:nvPr/>
         </p:nvSpPr>
         <p:spPr>
           <a:xfrm>
-            <a:off x="4937760" y="5285232"/>
-            <a:ext cx="3657600" cy="365760"/>
+            <a:off x="4965192" y="5266944"/>
+            <a:ext cx="3648456" cy="365760"/>
           </a:xfrm>
           <a:prstGeom prst="rect">
             <a:avLst/>
@@ -9907,15 +10682,19 @@
           </a:bodyPr>
           <a:lstStyle/>
           <a:p>
-            <a:pPr algn="l"/>
-            <a:r>
-              <a:rPr sz="950" b="0" i="0">
+            <a:pPr algn="l">
+              <a:lnSpc>
+                <a:spcPct val="100000"/>
+              </a:lnSpc>
+            </a:pPr>
+            <a:r>
+              <a:rPr sz="900" b="0" i="0">
                 <a:solidFill>
                   <a:srgbClr val="4A4A4A"/>
                 </a:solidFill>
                 <a:latin typeface="Calibri"/>
               </a:rPr>
-              <a:t>Prakash Old Age Home scores 0: it is veg-only with room for 25, so the filter removes it before scoring.</a:t>
+              <a:t>Prakash Old Age Home scores 0: veg-only with room for 25, so the filter removes it first.</a:t>
             </a:r>
           </a:p>
         </p:txBody>
@@ -10028,8 +10807,8 @@
         </p:nvSpPr>
         <p:spPr>
           <a:xfrm>
-            <a:off x="2377440" y="109728"/>
-            <a:ext cx="6217920" cy="566928"/>
+            <a:off x="2331720" y="109728"/>
+            <a:ext cx="6309360" cy="566928"/>
           </a:xfrm>
           <a:prstGeom prst="rect">
             <a:avLst/>
@@ -10212,8 +10991,8 @@
         </p:nvSpPr>
         <p:spPr>
           <a:xfrm>
-            <a:off x="457200" y="822960"/>
-            <a:ext cx="8321040" cy="365760"/>
+            <a:off x="457200" y="804672"/>
+            <a:ext cx="8321040" cy="347472"/>
           </a:xfrm>
           <a:prstGeom prst="rect">
             <a:avLst/>
@@ -10257,7 +11036,7 @@
         <p:spPr>
           <a:xfrm>
             <a:off x="457200" y="1207008"/>
-            <a:ext cx="8321040" cy="292608"/>
+            <a:ext cx="8321040" cy="237744"/>
           </a:xfrm>
           <a:prstGeom prst="rect">
             <a:avLst/>
@@ -10272,13 +11051,13 @@
           <a:p>
             <a:pPr algn="l"/>
             <a:r>
-              <a:rPr sz="1100" b="0" i="0">
+              <a:rPr sz="1000" b="0" i="0">
                 <a:solidFill>
                   <a:srgbClr val="4A4A4A"/>
                 </a:solidFill>
                 <a:latin typeface="Calibri"/>
               </a:rPr>
-              <a:t>Donors, recipients and an admin share one live MongoDB database. Food posted on the donor page appears on the shelter's dashboard within seconds, and every status change is stored.</a:t>
+              <a:t>Separate sign-up · JWT for 3 roles · ranked cascade · handover code · admin verification · two-way ratings · surplus prediction · live impact charts</a:t>
             </a:r>
           </a:p>
         </p:txBody>
@@ -10299,15 +11078,15 @@
         </p:blipFill>
         <p:spPr>
           <a:xfrm>
-            <a:off x="457200" y="1627632"/>
-            <a:ext cx="2682240" cy="1847765"/>
+            <a:off x="457200" y="1554480"/>
+            <a:ext cx="4069080" cy="2803144"/>
           </a:xfrm>
           <a:prstGeom prst="rect">
             <a:avLst/>
           </a:prstGeom>
           <a:ln w="9525">
             <a:solidFill>
-              <a:srgbClr val="D9D9D9"/>
+              <a:srgbClr val="DBD6D6"/>
             </a:solidFill>
           </a:ln>
         </p:spPr>
@@ -10320,8 +11099,8 @@
         </p:nvSpPr>
         <p:spPr>
           <a:xfrm>
-            <a:off x="457200" y="3548549"/>
-            <a:ext cx="2682240" cy="548640"/>
+            <a:off x="457200" y="4449063"/>
+            <a:ext cx="4069080" cy="237744"/>
           </a:xfrm>
           <a:prstGeom prst="rect">
             <a:avLst/>
@@ -10336,7 +11115,7 @@
           <a:p>
             <a:pPr algn="l"/>
             <a:r>
-              <a:rPr sz="1150" b="1" i="0">
+              <a:rPr sz="1200" b="1" i="0">
                 <a:solidFill>
                   <a:srgbClr val="1F1F1F"/>
                 </a:solidFill>
@@ -10345,23 +11124,50 @@
               <a:t>Donor dashboard</a:t>
             </a:r>
           </a:p>
-          <a:p>
-            <a:pPr algn="l"/>
-            <a:r>
-              <a:rPr sz="900" b="0" i="0">
+        </p:txBody>
+      </p:sp>
+      <p:sp>
+        <p:nvSpPr>
+          <p:cNvPr id="24" name="TextBox 23"/>
+          <p:cNvSpPr txBox="1"/>
+          <p:nvPr/>
+        </p:nvSpPr>
+        <p:spPr>
+          <a:xfrm>
+            <a:off x="457200" y="4686808"/>
+            <a:ext cx="4069080" cy="402336"/>
+          </a:xfrm>
+          <a:prstGeom prst="rect">
+            <a:avLst/>
+          </a:prstGeom>
+          <a:noFill/>
+        </p:spPr>
+        <p:txBody>
+          <a:bodyPr wrap="square" lIns="0" rIns="0" tIns="0" bIns="0" anchor="t">
+            <a:spAutoFit/>
+          </a:bodyPr>
+          <a:lstStyle/>
+          <a:p>
+            <a:pPr algn="l">
+              <a:lnSpc>
+                <a:spcPct val="100000"/>
+              </a:lnSpc>
+            </a:pPr>
+            <a:r>
+              <a:rPr sz="950" b="0" i="0">
                 <a:solidFill>
                   <a:srgbClr val="4A4A4A"/>
                 </a:solidFill>
                 <a:latin typeface="Calibri"/>
               </a:rPr>
-              <a:t>Ranked shelters, live countdown, handover code</a:t>
+              <a:t>Ranked shelters with distance, drive time and score. Live countdown, then a box for the handover code.</a:t>
             </a:r>
           </a:p>
         </p:txBody>
       </p:sp>
       <p:pic>
         <p:nvPicPr>
-          <p:cNvPr id="24" name="Picture 23" descr="fs-recipient.jpg"/>
+          <p:cNvPr id="25" name="Picture 24" descr="fs-impact.jpg"/>
           <p:cNvPicPr>
             <a:picLocks noChangeAspect="1"/>
           </p:cNvPicPr>
@@ -10375,29 +11181,29 @@
         </p:blipFill>
         <p:spPr>
           <a:xfrm>
-            <a:off x="3276599" y="1627632"/>
-            <a:ext cx="2682240" cy="1847765"/>
+            <a:off x="4709160" y="1554480"/>
+            <a:ext cx="4069080" cy="2803144"/>
           </a:xfrm>
           <a:prstGeom prst="rect">
             <a:avLst/>
           </a:prstGeom>
           <a:ln w="9525">
             <a:solidFill>
-              <a:srgbClr val="D9D9D9"/>
+              <a:srgbClr val="DBD6D6"/>
             </a:solidFill>
           </a:ln>
         </p:spPr>
       </p:pic>
       <p:sp>
         <p:nvSpPr>
-          <p:cNvPr id="25" name="TextBox 24"/>
+          <p:cNvPr id="26" name="TextBox 25"/>
           <p:cNvSpPr txBox="1"/>
           <p:nvPr/>
         </p:nvSpPr>
         <p:spPr>
           <a:xfrm>
-            <a:off x="3276599" y="3548549"/>
-            <a:ext cx="2682240" cy="548640"/>
+            <a:off x="4709160" y="4449063"/>
+            <a:ext cx="4069080" cy="237744"/>
           </a:xfrm>
           <a:prstGeom prst="rect">
             <a:avLst/>
@@ -10412,58 +11218,17 @@
           <a:p>
             <a:pPr algn="l"/>
             <a:r>
-              <a:rPr sz="1150" b="1" i="0">
+              <a:rPr sz="1200" b="1" i="0">
                 <a:solidFill>
                   <a:srgbClr val="1F1F1F"/>
                 </a:solidFill>
                 <a:latin typeface="Calibri"/>
               </a:rPr>
-              <a:t>Recipient dashboard</a:t>
-            </a:r>
-          </a:p>
-          <a:p>
-            <a:pPr algn="l"/>
-            <a:r>
-              <a:rPr sz="900" b="0" i="0">
-                <a:solidFill>
-                  <a:srgbClr val="4A4A4A"/>
-                </a:solidFill>
-                <a:latin typeface="Calibri"/>
-              </a:rPr>
-              <a:t>Reply window, score breakdown, accept or pass</a:t>
-            </a:r>
-          </a:p>
-        </p:txBody>
-      </p:sp>
-      <p:pic>
-        <p:nvPicPr>
-          <p:cNvPr id="26" name="Picture 25" descr="fs-impact.jpg"/>
-          <p:cNvPicPr>
-            <a:picLocks noChangeAspect="1"/>
-          </p:cNvPicPr>
-          <p:nvPr/>
-        </p:nvPicPr>
-        <p:blipFill>
-          <a:blip r:embed="rId7"/>
-          <a:stretch>
-            <a:fillRect/>
-          </a:stretch>
-        </p:blipFill>
-        <p:spPr>
-          <a:xfrm>
-            <a:off x="6095999" y="1627632"/>
-            <a:ext cx="2682240" cy="1847765"/>
-          </a:xfrm>
-          <a:prstGeom prst="rect">
-            <a:avLst/>
-          </a:prstGeom>
-          <a:ln w="9525">
-            <a:solidFill>
-              <a:srgbClr val="D9D9D9"/>
-            </a:solidFill>
-          </a:ln>
-        </p:spPr>
-      </p:pic>
+              <a:t>Impact dashboard</a:t>
+            </a:r>
+          </a:p>
+        </p:txBody>
+      </p:sp>
       <p:sp>
         <p:nvSpPr>
           <p:cNvPr id="27" name="TextBox 26"/>
@@ -10472,8 +11237,8 @@
         </p:nvSpPr>
         <p:spPr>
           <a:xfrm>
-            <a:off x="6095999" y="3548549"/>
-            <a:ext cx="2682240" cy="548640"/>
+            <a:off x="4709160" y="4686808"/>
+            <a:ext cx="4069080" cy="402336"/>
           </a:xfrm>
           <a:prstGeom prst="rect">
             <a:avLst/>
@@ -10486,88 +11251,45 @@
           </a:bodyPr>
           <a:lstStyle/>
           <a:p>
-            <a:pPr algn="l"/>
-            <a:r>
-              <a:rPr sz="1150" b="1" i="0">
-                <a:solidFill>
-                  <a:srgbClr val="1F1F1F"/>
+            <a:pPr algn="l">
+              <a:lnSpc>
+                <a:spcPct val="100000"/>
+              </a:lnSpc>
+            </a:pPr>
+            <a:r>
+              <a:rPr sz="950" b="0" i="0">
+                <a:solidFill>
+                  <a:srgbClr val="4A4A4A"/>
                 </a:solidFill>
                 <a:latin typeface="Calibri"/>
               </a:rPr>
-              <a:t>Impact dashboard</a:t>
-            </a:r>
-          </a:p>
-          <a:p>
-            <a:pPr algn="l"/>
-            <a:r>
-              <a:rPr sz="900" b="0" i="0">
-                <a:solidFill>
-                  <a:srgbClr val="4A4A4A"/>
-                </a:solidFill>
-                <a:latin typeface="Calibri"/>
-              </a:rPr>
-              <a:t>MongoDB aggregation: meals, food types, top givers</a:t>
-            </a:r>
-          </a:p>
-        </p:txBody>
-      </p:sp>
-      <p:sp>
-        <p:nvSpPr>
-          <p:cNvPr id="28" name="TextBox 27"/>
-          <p:cNvSpPr txBox="1"/>
-          <p:nvPr/>
-        </p:nvSpPr>
-        <p:spPr>
-          <a:xfrm>
-            <a:off x="457200" y="4315968"/>
-            <a:ext cx="5486400" cy="228600"/>
-          </a:xfrm>
-          <a:prstGeom prst="rect">
-            <a:avLst/>
-          </a:prstGeom>
-          <a:noFill/>
-        </p:spPr>
-        <p:txBody>
-          <a:bodyPr wrap="square" lIns="0" rIns="0" tIns="0" bIns="0" anchor="t">
-            <a:spAutoFit/>
-          </a:bodyPr>
-          <a:lstStyle/>
-          <a:p>
-            <a:pPr algn="l"/>
-            <a:r>
-              <a:rPr sz="1000" b="1" i="0">
-                <a:solidFill>
-                  <a:srgbClr val="C00000"/>
-                </a:solidFill>
-                <a:latin typeface="Calibri"/>
-              </a:rPr>
-              <a:t>WHAT WORKS TODAY</a:t>
-            </a:r>
-          </a:p>
-        </p:txBody>
-      </p:sp>
-      <p:sp>
-        <p:nvSpPr>
-          <p:cNvPr id="29" name="Rounded Rectangle 28"/>
+              <a:t>Every figure built live from MongoDB aggregation: meals a day, food types, collected against expired.</a:t>
+            </a:r>
+          </a:p>
+        </p:txBody>
+      </p:sp>
+      <p:sp>
+        <p:nvSpPr>
+          <p:cNvPr id="28" name="Rounded Rectangle 27"/>
           <p:cNvSpPr/>
           <p:nvPr/>
         </p:nvSpPr>
         <p:spPr>
           <a:xfrm>
-            <a:off x="457200" y="4535424"/>
-            <a:ext cx="2320747" cy="274320"/>
+            <a:off x="457200" y="4974336"/>
+            <a:ext cx="8321040" cy="768096"/>
           </a:xfrm>
           <a:prstGeom prst="roundRect">
             <a:avLst>
-              <a:gd name="adj" fmla="val 40000"/>
+              <a:gd name="adj" fmla="val 8000"/>
             </a:avLst>
           </a:prstGeom>
           <a:solidFill>
-            <a:srgbClr val="ECF4EE"/>
+            <a:srgbClr val="F7F4F4"/>
           </a:solidFill>
           <a:ln w="12700">
             <a:solidFill>
-              <a:srgbClr val="C8E3CA"/>
+              <a:srgbClr val="DBD6D6"/>
             </a:solidFill>
           </a:ln>
           <a:effectLst/>
@@ -10596,678 +11318,14 @@
       </p:sp>
       <p:sp>
         <p:nvSpPr>
-          <p:cNvPr id="30" name="TextBox 29"/>
+          <p:cNvPr id="29" name="TextBox 28"/>
           <p:cNvSpPr txBox="1"/>
           <p:nvPr/>
         </p:nvSpPr>
         <p:spPr>
           <a:xfrm>
-            <a:off x="457200" y="4535424"/>
-            <a:ext cx="2320747" cy="274320"/>
-          </a:xfrm>
-          <a:prstGeom prst="rect">
-            <a:avLst/>
-          </a:prstGeom>
-          <a:noFill/>
-        </p:spPr>
-        <p:txBody>
-          <a:bodyPr wrap="square" lIns="0" rIns="0" tIns="0" bIns="0" anchor="ctr">
-            <a:spAutoFit/>
-          </a:bodyPr>
-          <a:lstStyle/>
-          <a:p>
-            <a:pPr algn="ctr"/>
-            <a:r>
-              <a:rPr sz="900" b="0" i="0">
-                <a:solidFill>
-                  <a:srgbClr val="1F1F1F"/>
-                </a:solidFill>
-                <a:latin typeface="Calibri"/>
-              </a:rPr>
-              <a:t>Separate donor / recipient sign-up</a:t>
-            </a:r>
-          </a:p>
-        </p:txBody>
-      </p:sp>
-      <p:sp>
-        <p:nvSpPr>
-          <p:cNvPr id="31" name="Rounded Rectangle 30"/>
-          <p:cNvSpPr/>
-          <p:nvPr/>
-        </p:nvSpPr>
-        <p:spPr>
-          <a:xfrm>
-            <a:off x="2851099" y="4535424"/>
-            <a:ext cx="1524304" cy="274320"/>
-          </a:xfrm>
-          <a:prstGeom prst="roundRect">
-            <a:avLst>
-              <a:gd name="adj" fmla="val 40000"/>
-            </a:avLst>
-          </a:prstGeom>
-          <a:solidFill>
-            <a:srgbClr val="ECF4EE"/>
-          </a:solidFill>
-          <a:ln w="12700">
-            <a:solidFill>
-              <a:srgbClr val="C8E3CA"/>
-            </a:solidFill>
-          </a:ln>
-          <a:effectLst/>
-        </p:spPr>
-        <p:style>
-          <a:lnRef idx="1">
-            <a:schemeClr val="accent1"/>
-          </a:lnRef>
-          <a:fillRef idx="3">
-            <a:schemeClr val="accent1"/>
-          </a:fillRef>
-          <a:effectRef idx="2">
-            <a:schemeClr val="accent1"/>
-          </a:effectRef>
-          <a:fontRef idx="minor">
-            <a:schemeClr val="lt1"/>
-          </a:fontRef>
-        </p:style>
-        <p:txBody>
-          <a:bodyPr rtlCol="0" anchor="ctr"/>
-          <a:lstStyle/>
-          <a:p>
-            <a:pPr algn="ctr"/>
-          </a:p>
-        </p:txBody>
-      </p:sp>
-      <p:sp>
-        <p:nvSpPr>
-          <p:cNvPr id="32" name="TextBox 31"/>
-          <p:cNvSpPr txBox="1"/>
-          <p:nvPr/>
-        </p:nvSpPr>
-        <p:spPr>
-          <a:xfrm>
-            <a:off x="2851099" y="4535424"/>
-            <a:ext cx="1524304" cy="274320"/>
-          </a:xfrm>
-          <a:prstGeom prst="rect">
-            <a:avLst/>
-          </a:prstGeom>
-          <a:noFill/>
-        </p:spPr>
-        <p:txBody>
-          <a:bodyPr wrap="square" lIns="0" rIns="0" tIns="0" bIns="0" anchor="ctr">
-            <a:spAutoFit/>
-          </a:bodyPr>
-          <a:lstStyle/>
-          <a:p>
-            <a:pPr algn="ctr"/>
-            <a:r>
-              <a:rPr sz="900" b="0" i="0">
-                <a:solidFill>
-                  <a:srgbClr val="1F1F1F"/>
-                </a:solidFill>
-                <a:latin typeface="Calibri"/>
-              </a:rPr>
-              <a:t>JWT login for 3 roles</a:t>
-            </a:r>
-          </a:p>
-        </p:txBody>
-      </p:sp>
-      <p:sp>
-        <p:nvSpPr>
-          <p:cNvPr id="33" name="Rounded Rectangle 32"/>
-          <p:cNvSpPr/>
-          <p:nvPr/>
-        </p:nvSpPr>
-        <p:spPr>
-          <a:xfrm>
-            <a:off x="4448556" y="4535424"/>
-            <a:ext cx="1769364" cy="274320"/>
-          </a:xfrm>
-          <a:prstGeom prst="roundRect">
-            <a:avLst>
-              <a:gd name="adj" fmla="val 40000"/>
-            </a:avLst>
-          </a:prstGeom>
-          <a:solidFill>
-            <a:srgbClr val="ECF4EE"/>
-          </a:solidFill>
-          <a:ln w="12700">
-            <a:solidFill>
-              <a:srgbClr val="C8E3CA"/>
-            </a:solidFill>
-          </a:ln>
-          <a:effectLst/>
-        </p:spPr>
-        <p:style>
-          <a:lnRef idx="1">
-            <a:schemeClr val="accent1"/>
-          </a:lnRef>
-          <a:fillRef idx="3">
-            <a:schemeClr val="accent1"/>
-          </a:fillRef>
-          <a:effectRef idx="2">
-            <a:schemeClr val="accent1"/>
-          </a:effectRef>
-          <a:fontRef idx="minor">
-            <a:schemeClr val="lt1"/>
-          </a:fontRef>
-        </p:style>
-        <p:txBody>
-          <a:bodyPr rtlCol="0" anchor="ctr"/>
-          <a:lstStyle/>
-          <a:p>
-            <a:pPr algn="ctr"/>
-          </a:p>
-        </p:txBody>
-      </p:sp>
-      <p:sp>
-        <p:nvSpPr>
-          <p:cNvPr id="34" name="TextBox 33"/>
-          <p:cNvSpPr txBox="1"/>
-          <p:nvPr/>
-        </p:nvSpPr>
-        <p:spPr>
-          <a:xfrm>
-            <a:off x="4448556" y="4535424"/>
-            <a:ext cx="1769364" cy="274320"/>
-          </a:xfrm>
-          <a:prstGeom prst="rect">
-            <a:avLst/>
-          </a:prstGeom>
-          <a:noFill/>
-        </p:spPr>
-        <p:txBody>
-          <a:bodyPr wrap="square" lIns="0" rIns="0" tIns="0" bIns="0" anchor="ctr">
-            <a:spAutoFit/>
-          </a:bodyPr>
-          <a:lstStyle/>
-          <a:p>
-            <a:pPr algn="ctr"/>
-            <a:r>
-              <a:rPr sz="900" b="0" i="0">
-                <a:solidFill>
-                  <a:srgbClr val="1F1F1F"/>
-                </a:solidFill>
-                <a:latin typeface="Calibri"/>
-              </a:rPr>
-              <a:t>Ranked matching + cascade</a:t>
-            </a:r>
-          </a:p>
-        </p:txBody>
-      </p:sp>
-      <p:sp>
-        <p:nvSpPr>
-          <p:cNvPr id="35" name="Rounded Rectangle 34"/>
-          <p:cNvSpPr/>
-          <p:nvPr/>
-        </p:nvSpPr>
-        <p:spPr>
-          <a:xfrm>
-            <a:off x="6291072" y="4535424"/>
-            <a:ext cx="1891893" cy="274320"/>
-          </a:xfrm>
-          <a:prstGeom prst="roundRect">
-            <a:avLst>
-              <a:gd name="adj" fmla="val 40000"/>
-            </a:avLst>
-          </a:prstGeom>
-          <a:solidFill>
-            <a:srgbClr val="ECF4EE"/>
-          </a:solidFill>
-          <a:ln w="12700">
-            <a:solidFill>
-              <a:srgbClr val="C8E3CA"/>
-            </a:solidFill>
-          </a:ln>
-          <a:effectLst/>
-        </p:spPr>
-        <p:style>
-          <a:lnRef idx="1">
-            <a:schemeClr val="accent1"/>
-          </a:lnRef>
-          <a:fillRef idx="3">
-            <a:schemeClr val="accent1"/>
-          </a:fillRef>
-          <a:effectRef idx="2">
-            <a:schemeClr val="accent1"/>
-          </a:effectRef>
-          <a:fontRef idx="minor">
-            <a:schemeClr val="lt1"/>
-          </a:fontRef>
-        </p:style>
-        <p:txBody>
-          <a:bodyPr rtlCol="0" anchor="ctr"/>
-          <a:lstStyle/>
-          <a:p>
-            <a:pPr algn="ctr"/>
-          </a:p>
-        </p:txBody>
-      </p:sp>
-      <p:sp>
-        <p:nvSpPr>
-          <p:cNvPr id="36" name="TextBox 35"/>
-          <p:cNvSpPr txBox="1"/>
-          <p:nvPr/>
-        </p:nvSpPr>
-        <p:spPr>
-          <a:xfrm>
-            <a:off x="6291072" y="4535424"/>
-            <a:ext cx="1891893" cy="274320"/>
-          </a:xfrm>
-          <a:prstGeom prst="rect">
-            <a:avLst/>
-          </a:prstGeom>
-          <a:noFill/>
-        </p:spPr>
-        <p:txBody>
-          <a:bodyPr wrap="square" lIns="0" rIns="0" tIns="0" bIns="0" anchor="ctr">
-            <a:spAutoFit/>
-          </a:bodyPr>
-          <a:lstStyle/>
-          <a:p>
-            <a:pPr algn="ctr"/>
-            <a:r>
-              <a:rPr sz="900" b="0" i="0">
-                <a:solidFill>
-                  <a:srgbClr val="1F1F1F"/>
-                </a:solidFill>
-                <a:latin typeface="Calibri"/>
-              </a:rPr>
-              <a:t>Handover code &amp; pickup slip</a:t>
-            </a:r>
-          </a:p>
-        </p:txBody>
-      </p:sp>
-      <p:sp>
-        <p:nvSpPr>
-          <p:cNvPr id="37" name="Rounded Rectangle 36"/>
-          <p:cNvSpPr/>
-          <p:nvPr/>
-        </p:nvSpPr>
-        <p:spPr>
-          <a:xfrm>
-            <a:off x="457200" y="4882896"/>
-            <a:ext cx="1340510" cy="274320"/>
-          </a:xfrm>
-          <a:prstGeom prst="roundRect">
-            <a:avLst>
-              <a:gd name="adj" fmla="val 40000"/>
-            </a:avLst>
-          </a:prstGeom>
-          <a:solidFill>
-            <a:srgbClr val="ECF4EE"/>
-          </a:solidFill>
-          <a:ln w="12700">
-            <a:solidFill>
-              <a:srgbClr val="C8E3CA"/>
-            </a:solidFill>
-          </a:ln>
-          <a:effectLst/>
-        </p:spPr>
-        <p:style>
-          <a:lnRef idx="1">
-            <a:schemeClr val="accent1"/>
-          </a:lnRef>
-          <a:fillRef idx="3">
-            <a:schemeClr val="accent1"/>
-          </a:fillRef>
-          <a:effectRef idx="2">
-            <a:schemeClr val="accent1"/>
-          </a:effectRef>
-          <a:fontRef idx="minor">
-            <a:schemeClr val="lt1"/>
-          </a:fontRef>
-        </p:style>
-        <p:txBody>
-          <a:bodyPr rtlCol="0" anchor="ctr"/>
-          <a:lstStyle/>
-          <a:p>
-            <a:pPr algn="ctr"/>
-          </a:p>
-        </p:txBody>
-      </p:sp>
-      <p:sp>
-        <p:nvSpPr>
-          <p:cNvPr id="38" name="TextBox 37"/>
-          <p:cNvSpPr txBox="1"/>
-          <p:nvPr/>
-        </p:nvSpPr>
-        <p:spPr>
-          <a:xfrm>
-            <a:off x="457200" y="4882896"/>
-            <a:ext cx="1340510" cy="274320"/>
-          </a:xfrm>
-          <a:prstGeom prst="rect">
-            <a:avLst/>
-          </a:prstGeom>
-          <a:noFill/>
-        </p:spPr>
-        <p:txBody>
-          <a:bodyPr wrap="square" lIns="0" rIns="0" tIns="0" bIns="0" anchor="ctr">
-            <a:spAutoFit/>
-          </a:bodyPr>
-          <a:lstStyle/>
-          <a:p>
-            <a:pPr algn="ctr"/>
-            <a:r>
-              <a:rPr sz="900" b="0" i="0">
-                <a:solidFill>
-                  <a:srgbClr val="1F1F1F"/>
-                </a:solidFill>
-                <a:latin typeface="Calibri"/>
-              </a:rPr>
-              <a:t>Admin verification</a:t>
-            </a:r>
-          </a:p>
-        </p:txBody>
-      </p:sp>
-      <p:sp>
-        <p:nvSpPr>
-          <p:cNvPr id="39" name="Rounded Rectangle 38"/>
-          <p:cNvSpPr/>
-          <p:nvPr/>
-        </p:nvSpPr>
-        <p:spPr>
-          <a:xfrm>
-            <a:off x="1870862" y="4882896"/>
-            <a:ext cx="1156716" cy="274320"/>
-          </a:xfrm>
-          <a:prstGeom prst="roundRect">
-            <a:avLst>
-              <a:gd name="adj" fmla="val 40000"/>
-            </a:avLst>
-          </a:prstGeom>
-          <a:solidFill>
-            <a:srgbClr val="ECF4EE"/>
-          </a:solidFill>
-          <a:ln w="12700">
-            <a:solidFill>
-              <a:srgbClr val="C8E3CA"/>
-            </a:solidFill>
-          </a:ln>
-          <a:effectLst/>
-        </p:spPr>
-        <p:style>
-          <a:lnRef idx="1">
-            <a:schemeClr val="accent1"/>
-          </a:lnRef>
-          <a:fillRef idx="3">
-            <a:schemeClr val="accent1"/>
-          </a:fillRef>
-          <a:effectRef idx="2">
-            <a:schemeClr val="accent1"/>
-          </a:effectRef>
-          <a:fontRef idx="minor">
-            <a:schemeClr val="lt1"/>
-          </a:fontRef>
-        </p:style>
-        <p:txBody>
-          <a:bodyPr rtlCol="0" anchor="ctr"/>
-          <a:lstStyle/>
-          <a:p>
-            <a:pPr algn="ctr"/>
-          </a:p>
-        </p:txBody>
-      </p:sp>
-      <p:sp>
-        <p:nvSpPr>
-          <p:cNvPr id="40" name="TextBox 39"/>
-          <p:cNvSpPr txBox="1"/>
-          <p:nvPr/>
-        </p:nvSpPr>
-        <p:spPr>
-          <a:xfrm>
-            <a:off x="1870862" y="4882896"/>
-            <a:ext cx="1156716" cy="274320"/>
-          </a:xfrm>
-          <a:prstGeom prst="rect">
-            <a:avLst/>
-          </a:prstGeom>
-          <a:noFill/>
-        </p:spPr>
-        <p:txBody>
-          <a:bodyPr wrap="square" lIns="0" rIns="0" tIns="0" bIns="0" anchor="ctr">
-            <a:spAutoFit/>
-          </a:bodyPr>
-          <a:lstStyle/>
-          <a:p>
-            <a:pPr algn="ctr"/>
-            <a:r>
-              <a:rPr sz="900" b="0" i="0">
-                <a:solidFill>
-                  <a:srgbClr val="1F1F1F"/>
-                </a:solidFill>
-                <a:latin typeface="Calibri"/>
-              </a:rPr>
-              <a:t>Two-way ratings</a:t>
-            </a:r>
-          </a:p>
-        </p:txBody>
-      </p:sp>
-      <p:sp>
-        <p:nvSpPr>
-          <p:cNvPr id="41" name="Rounded Rectangle 40"/>
-          <p:cNvSpPr/>
-          <p:nvPr/>
-        </p:nvSpPr>
-        <p:spPr>
-          <a:xfrm>
-            <a:off x="3100730" y="4882896"/>
-            <a:ext cx="1340510" cy="274320"/>
-          </a:xfrm>
-          <a:prstGeom prst="roundRect">
-            <a:avLst>
-              <a:gd name="adj" fmla="val 40000"/>
-            </a:avLst>
-          </a:prstGeom>
-          <a:solidFill>
-            <a:srgbClr val="ECF4EE"/>
-          </a:solidFill>
-          <a:ln w="12700">
-            <a:solidFill>
-              <a:srgbClr val="C8E3CA"/>
-            </a:solidFill>
-          </a:ln>
-          <a:effectLst/>
-        </p:spPr>
-        <p:style>
-          <a:lnRef idx="1">
-            <a:schemeClr val="accent1"/>
-          </a:lnRef>
-          <a:fillRef idx="3">
-            <a:schemeClr val="accent1"/>
-          </a:fillRef>
-          <a:effectRef idx="2">
-            <a:schemeClr val="accent1"/>
-          </a:effectRef>
-          <a:fontRef idx="minor">
-            <a:schemeClr val="lt1"/>
-          </a:fontRef>
-        </p:style>
-        <p:txBody>
-          <a:bodyPr rtlCol="0" anchor="ctr"/>
-          <a:lstStyle/>
-          <a:p>
-            <a:pPr algn="ctr"/>
-          </a:p>
-        </p:txBody>
-      </p:sp>
-      <p:sp>
-        <p:nvSpPr>
-          <p:cNvPr id="42" name="TextBox 41"/>
-          <p:cNvSpPr txBox="1"/>
-          <p:nvPr/>
-        </p:nvSpPr>
-        <p:spPr>
-          <a:xfrm>
-            <a:off x="3100730" y="4882896"/>
-            <a:ext cx="1340510" cy="274320"/>
-          </a:xfrm>
-          <a:prstGeom prst="rect">
-            <a:avLst/>
-          </a:prstGeom>
-          <a:noFill/>
-        </p:spPr>
-        <p:txBody>
-          <a:bodyPr wrap="square" lIns="0" rIns="0" tIns="0" bIns="0" anchor="ctr">
-            <a:spAutoFit/>
-          </a:bodyPr>
-          <a:lstStyle/>
-          <a:p>
-            <a:pPr algn="ctr"/>
-            <a:r>
-              <a:rPr sz="900" b="0" i="0">
-                <a:solidFill>
-                  <a:srgbClr val="1F1F1F"/>
-                </a:solidFill>
-                <a:latin typeface="Calibri"/>
-              </a:rPr>
-              <a:t>Surplus prediction</a:t>
-            </a:r>
-          </a:p>
-        </p:txBody>
-      </p:sp>
-      <p:sp>
-        <p:nvSpPr>
-          <p:cNvPr id="43" name="Rounded Rectangle 42"/>
-          <p:cNvSpPr/>
-          <p:nvPr/>
-        </p:nvSpPr>
-        <p:spPr>
-          <a:xfrm>
-            <a:off x="4514392" y="4882896"/>
-            <a:ext cx="1340510" cy="274320"/>
-          </a:xfrm>
-          <a:prstGeom prst="roundRect">
-            <a:avLst>
-              <a:gd name="adj" fmla="val 40000"/>
-            </a:avLst>
-          </a:prstGeom>
-          <a:solidFill>
-            <a:srgbClr val="ECF4EE"/>
-          </a:solidFill>
-          <a:ln w="12700">
-            <a:solidFill>
-              <a:srgbClr val="C8E3CA"/>
-            </a:solidFill>
-          </a:ln>
-          <a:effectLst/>
-        </p:spPr>
-        <p:style>
-          <a:lnRef idx="1">
-            <a:schemeClr val="accent1"/>
-          </a:lnRef>
-          <a:fillRef idx="3">
-            <a:schemeClr val="accent1"/>
-          </a:fillRef>
-          <a:effectRef idx="2">
-            <a:schemeClr val="accent1"/>
-          </a:effectRef>
-          <a:fontRef idx="minor">
-            <a:schemeClr val="lt1"/>
-          </a:fontRef>
-        </p:style>
-        <p:txBody>
-          <a:bodyPr rtlCol="0" anchor="ctr"/>
-          <a:lstStyle/>
-          <a:p>
-            <a:pPr algn="ctr"/>
-          </a:p>
-        </p:txBody>
-      </p:sp>
-      <p:sp>
-        <p:nvSpPr>
-          <p:cNvPr id="44" name="TextBox 43"/>
-          <p:cNvSpPr txBox="1"/>
-          <p:nvPr/>
-        </p:nvSpPr>
-        <p:spPr>
-          <a:xfrm>
-            <a:off x="4514392" y="4882896"/>
-            <a:ext cx="1340510" cy="274320"/>
-          </a:xfrm>
-          <a:prstGeom prst="rect">
-            <a:avLst/>
-          </a:prstGeom>
-          <a:noFill/>
-        </p:spPr>
-        <p:txBody>
-          <a:bodyPr wrap="square" lIns="0" rIns="0" tIns="0" bIns="0" anchor="ctr">
-            <a:spAutoFit/>
-          </a:bodyPr>
-          <a:lstStyle/>
-          <a:p>
-            <a:pPr algn="ctr"/>
-            <a:r>
-              <a:rPr sz="900" b="0" i="0">
-                <a:solidFill>
-                  <a:srgbClr val="1F1F1F"/>
-                </a:solidFill>
-                <a:latin typeface="Calibri"/>
-              </a:rPr>
-              <a:t>Live impact charts</a:t>
-            </a:r>
-          </a:p>
-        </p:txBody>
-      </p:sp>
-      <p:sp>
-        <p:nvSpPr>
-          <p:cNvPr id="45" name="Rounded Rectangle 44"/>
-          <p:cNvSpPr/>
-          <p:nvPr/>
-        </p:nvSpPr>
-        <p:spPr>
-          <a:xfrm>
-            <a:off x="457200" y="5285232"/>
-            <a:ext cx="8321040" cy="438912"/>
-          </a:xfrm>
-          <a:prstGeom prst="roundRect">
-            <a:avLst>
-              <a:gd name="adj" fmla="val 8000"/>
-            </a:avLst>
-          </a:prstGeom>
-          <a:solidFill>
-            <a:srgbClr val="F6F3F3"/>
-          </a:solidFill>
-          <a:ln w="12700">
-            <a:solidFill>
-              <a:srgbClr val="D9D9D9"/>
-            </a:solidFill>
-          </a:ln>
-          <a:effectLst/>
-        </p:spPr>
-        <p:style>
-          <a:lnRef idx="1">
-            <a:schemeClr val="accent1"/>
-          </a:lnRef>
-          <a:fillRef idx="3">
-            <a:schemeClr val="accent1"/>
-          </a:fillRef>
-          <a:effectRef idx="2">
-            <a:schemeClr val="accent1"/>
-          </a:effectRef>
-          <a:fontRef idx="minor">
-            <a:schemeClr val="lt1"/>
-          </a:fontRef>
-        </p:style>
-        <p:txBody>
-          <a:bodyPr rtlCol="0" anchor="ctr"/>
-          <a:lstStyle/>
-          <a:p>
-            <a:pPr algn="ctr"/>
-          </a:p>
-        </p:txBody>
-      </p:sp>
-      <p:sp>
-        <p:nvSpPr>
-          <p:cNvPr id="46" name="TextBox 45"/>
-          <p:cNvSpPr txBox="1"/>
-          <p:nvPr/>
-        </p:nvSpPr>
-        <p:spPr>
-          <a:xfrm>
-            <a:off x="658368" y="5376672"/>
-            <a:ext cx="2011680" cy="274320"/>
+            <a:off x="658368" y="5074920"/>
+            <a:ext cx="1805939" cy="292608"/>
           </a:xfrm>
           <a:prstGeom prst="rect">
             <a:avLst/>
@@ -11282,36 +11340,36 @@
           <a:p>
             <a:pPr algn="l"/>
             <a:r>
-              <a:rPr sz="1300" b="1" i="0">
+              <a:rPr sz="1700" b="1" i="0">
                 <a:solidFill>
                   <a:srgbClr val="C00000"/>
                 </a:solidFill>
                 <a:latin typeface="Calibri"/>
               </a:rPr>
-              <a:t>100  </a:t>
-            </a:r>
-            <a:r>
-              <a:rPr sz="950" b="0" i="0">
-                <a:solidFill>
-                  <a:srgbClr val="4A4A4A"/>
+              <a:t>100</a:t>
+            </a:r>
+            <a:r>
+              <a:rPr sz="1000" b="0" i="0">
+                <a:solidFill>
+                  <a:srgbClr val="1F1F1F"/>
                 </a:solidFill>
                 <a:latin typeface="Calibri"/>
               </a:rPr>
-              <a:t>automated tests pass</a:t>
-            </a:r>
-          </a:p>
-        </p:txBody>
-      </p:sp>
-      <p:sp>
-        <p:nvSpPr>
-          <p:cNvPr id="47" name="TextBox 46"/>
+              <a:t>  automated tests pass</a:t>
+            </a:r>
+          </a:p>
+        </p:txBody>
+      </p:sp>
+      <p:sp>
+        <p:nvSpPr>
+          <p:cNvPr id="30" name="TextBox 29"/>
           <p:cNvSpPr txBox="1"/>
           <p:nvPr/>
         </p:nvSpPr>
         <p:spPr>
           <a:xfrm>
-            <a:off x="2715768" y="5376672"/>
-            <a:ext cx="2011680" cy="274320"/>
+            <a:off x="658368" y="5376672"/>
+            <a:ext cx="1805939" cy="237744"/>
           </a:xfrm>
           <a:prstGeom prst="rect">
             <a:avLst/>
@@ -11326,36 +11384,27 @@
           <a:p>
             <a:pPr algn="l"/>
             <a:r>
-              <a:rPr sz="1300" b="1" i="0">
-                <a:solidFill>
-                  <a:srgbClr val="C00000"/>
+              <a:rPr sz="900" b="0" i="0">
+                <a:solidFill>
+                  <a:srgbClr val="7A7A7A"/>
                 </a:solidFill>
                 <a:latin typeface="Calibri"/>
               </a:rPr>
-              <a:t>10  </a:t>
-            </a:r>
-            <a:r>
-              <a:rPr sz="950" b="0" i="0">
-                <a:solidFill>
-                  <a:srgbClr val="4A4A4A"/>
-                </a:solidFill>
-                <a:latin typeface="Calibri"/>
-              </a:rPr>
-              <a:t>pages</a:t>
-            </a:r>
-          </a:p>
-        </p:txBody>
-      </p:sp>
-      <p:sp>
-        <p:nvSpPr>
-          <p:cNvPr id="48" name="TextBox 47"/>
+              <a:t>44 on the API, 56 in a real browser</a:t>
+            </a:r>
+          </a:p>
+        </p:txBody>
+      </p:sp>
+      <p:sp>
+        <p:nvSpPr>
+          <p:cNvPr id="31" name="TextBox 30"/>
           <p:cNvSpPr txBox="1"/>
           <p:nvPr/>
         </p:nvSpPr>
         <p:spPr>
           <a:xfrm>
-            <a:off x="4773168" y="5376672"/>
-            <a:ext cx="2011680" cy="274320"/>
+            <a:off x="2738628" y="5074920"/>
+            <a:ext cx="1805939" cy="292608"/>
           </a:xfrm>
           <a:prstGeom prst="rect">
             <a:avLst/>
@@ -11370,36 +11419,36 @@
           <a:p>
             <a:pPr algn="l"/>
             <a:r>
-              <a:rPr sz="1300" b="1" i="0">
+              <a:rPr sz="1700" b="1" i="0">
                 <a:solidFill>
                   <a:srgbClr val="C00000"/>
                 </a:solidFill>
                 <a:latin typeface="Calibri"/>
               </a:rPr>
-              <a:t>~1,300  </a:t>
-            </a:r>
-            <a:r>
-              <a:rPr sz="950" b="0" i="0">
-                <a:solidFill>
-                  <a:srgbClr val="4A4A4A"/>
+              <a:t>3</a:t>
+            </a:r>
+            <a:r>
+              <a:rPr sz="1000" b="0" i="0">
+                <a:solidFill>
+                  <a:srgbClr val="1F1F1F"/>
                 </a:solidFill>
                 <a:latin typeface="Calibri"/>
               </a:rPr>
-              <a:t>meals in the demo database</a:t>
-            </a:r>
-          </a:p>
-        </p:txBody>
-      </p:sp>
-      <p:sp>
-        <p:nvSpPr>
-          <p:cNvPr id="49" name="TextBox 48"/>
+              <a:t>  roles, one database</a:t>
+            </a:r>
+          </a:p>
+        </p:txBody>
+      </p:sp>
+      <p:sp>
+        <p:nvSpPr>
+          <p:cNvPr id="32" name="TextBox 31"/>
           <p:cNvSpPr txBox="1"/>
           <p:nvPr/>
         </p:nvSpPr>
         <p:spPr>
           <a:xfrm>
-            <a:off x="6830568" y="5376672"/>
-            <a:ext cx="2011680" cy="274320"/>
+            <a:off x="2738628" y="5376672"/>
+            <a:ext cx="1805939" cy="237744"/>
           </a:xfrm>
           <a:prstGeom prst="rect">
             <a:avLst/>
@@ -11414,36 +11463,27 @@
           <a:p>
             <a:pPr algn="l"/>
             <a:r>
-              <a:rPr sz="1300" b="1" i="0">
-                <a:solidFill>
-                  <a:srgbClr val="C00000"/>
+              <a:rPr sz="900" b="0" i="0">
+                <a:solidFill>
+                  <a:srgbClr val="7A7A7A"/>
                 </a:solidFill>
                 <a:latin typeface="Calibri"/>
               </a:rPr>
-              <a:t>91%  </a:t>
-            </a:r>
-            <a:r>
-              <a:rPr sz="950" b="0" i="0">
-                <a:solidFill>
-                  <a:srgbClr val="4A4A4A"/>
-                </a:solidFill>
-                <a:latin typeface="Calibri"/>
-              </a:rPr>
-              <a:t>collection rate</a:t>
-            </a:r>
-          </a:p>
-        </p:txBody>
-      </p:sp>
-      <p:sp>
-        <p:nvSpPr>
-          <p:cNvPr id="50" name="TextBox 49"/>
+              <a:t>donor, recipient and admin</a:t>
+            </a:r>
+          </a:p>
+        </p:txBody>
+      </p:sp>
+      <p:sp>
+        <p:nvSpPr>
+          <p:cNvPr id="33" name="TextBox 32"/>
           <p:cNvSpPr txBox="1"/>
           <p:nvPr/>
         </p:nvSpPr>
         <p:spPr>
           <a:xfrm>
-            <a:off x="6309360" y="4315968"/>
-            <a:ext cx="2468880" cy="228600"/>
+            <a:off x="4818888" y="5074920"/>
+            <a:ext cx="1805939" cy="292608"/>
           </a:xfrm>
           <a:prstGeom prst="rect">
             <a:avLst/>
@@ -11456,15 +11496,138 @@
           </a:bodyPr>
           <a:lstStyle/>
           <a:p>
-            <a:pPr algn="r"/>
-            <a:r>
-              <a:rPr sz="1000" b="1" i="0">
+            <a:pPr algn="l"/>
+            <a:r>
+              <a:rPr sz="1700" b="1" i="0">
                 <a:solidFill>
                   <a:srgbClr val="C00000"/>
                 </a:solidFill>
                 <a:latin typeface="Calibri"/>
               </a:rPr>
-              <a:t>Next: deploy + SMS alerts</a:t>
+              <a:t>91%</a:t>
+            </a:r>
+            <a:r>
+              <a:rPr sz="1000" b="0" i="0">
+                <a:solidFill>
+                  <a:srgbClr val="1F1F1F"/>
+                </a:solidFill>
+                <a:latin typeface="Calibri"/>
+              </a:rPr>
+              <a:t>  of finished listings</a:t>
+            </a:r>
+          </a:p>
+        </p:txBody>
+      </p:sp>
+      <p:sp>
+        <p:nvSpPr>
+          <p:cNvPr id="34" name="TextBox 33"/>
+          <p:cNvSpPr txBox="1"/>
+          <p:nvPr/>
+        </p:nvSpPr>
+        <p:spPr>
+          <a:xfrm>
+            <a:off x="4818888" y="5376672"/>
+            <a:ext cx="1805939" cy="237744"/>
+          </a:xfrm>
+          <a:prstGeom prst="rect">
+            <a:avLst/>
+          </a:prstGeom>
+          <a:noFill/>
+        </p:spPr>
+        <p:txBody>
+          <a:bodyPr wrap="square" lIns="0" rIns="0" tIns="0" bIns="0" anchor="t">
+            <a:spAutoFit/>
+          </a:bodyPr>
+          <a:lstStyle/>
+          <a:p>
+            <a:pPr algn="l"/>
+            <a:r>
+              <a:rPr sz="900" b="0" i="0">
+                <a:solidFill>
+                  <a:srgbClr val="7A7A7A"/>
+                </a:solidFill>
+                <a:latin typeface="Calibri"/>
+              </a:rPr>
+              <a:t>were collected, not wasted</a:t>
+            </a:r>
+          </a:p>
+        </p:txBody>
+      </p:sp>
+      <p:sp>
+        <p:nvSpPr>
+          <p:cNvPr id="35" name="TextBox 34"/>
+          <p:cNvSpPr txBox="1"/>
+          <p:nvPr/>
+        </p:nvSpPr>
+        <p:spPr>
+          <a:xfrm>
+            <a:off x="6899147" y="5074920"/>
+            <a:ext cx="1805939" cy="292608"/>
+          </a:xfrm>
+          <a:prstGeom prst="rect">
+            <a:avLst/>
+          </a:prstGeom>
+          <a:noFill/>
+        </p:spPr>
+        <p:txBody>
+          <a:bodyPr wrap="square" lIns="0" rIns="0" tIns="0" bIns="0" anchor="t">
+            <a:spAutoFit/>
+          </a:bodyPr>
+          <a:lstStyle/>
+          <a:p>
+            <a:pPr algn="l"/>
+            <a:r>
+              <a:rPr sz="1700" b="1" i="0">
+                <a:solidFill>
+                  <a:srgbClr val="C00000"/>
+                </a:solidFill>
+                <a:latin typeface="Calibri"/>
+              </a:rPr>
+              <a:t>~5,300</a:t>
+            </a:r>
+            <a:r>
+              <a:rPr sz="1000" b="0" i="0">
+                <a:solidFill>
+                  <a:srgbClr val="1F1F1F"/>
+                </a:solidFill>
+                <a:latin typeface="Calibri"/>
+              </a:rPr>
+              <a:t>  lines of code</a:t>
+            </a:r>
+          </a:p>
+        </p:txBody>
+      </p:sp>
+      <p:sp>
+        <p:nvSpPr>
+          <p:cNvPr id="36" name="TextBox 35"/>
+          <p:cNvSpPr txBox="1"/>
+          <p:nvPr/>
+        </p:nvSpPr>
+        <p:spPr>
+          <a:xfrm>
+            <a:off x="6899147" y="5376672"/>
+            <a:ext cx="1805939" cy="237744"/>
+          </a:xfrm>
+          <a:prstGeom prst="rect">
+            <a:avLst/>
+          </a:prstGeom>
+          <a:noFill/>
+        </p:spPr>
+        <p:txBody>
+          <a:bodyPr wrap="square" lIns="0" rIns="0" tIns="0" bIns="0" anchor="t">
+            <a:spAutoFit/>
+          </a:bodyPr>
+          <a:lstStyle/>
+          <a:p>
+            <a:pPr algn="l"/>
+            <a:r>
+              <a:rPr sz="900" b="0" i="0">
+                <a:solidFill>
+                  <a:srgbClr val="7A7A7A"/>
+                </a:solidFill>
+                <a:latin typeface="Calibri"/>
+              </a:rPr>
+              <a:t>2,940 front end, 2,385 back end</a:t>
             </a:r>
           </a:p>
         </p:txBody>
